--- a/Assessment/GAT Slides.pptx
+++ b/Assessment/GAT Slides.pptx
@@ -5,7 +5,7 @@
     <p:sldMasterId id="2147483660" r:id="rId1"/>
   </p:sldMasterIdLst>
   <p:notesMasterIdLst>
-    <p:notesMasterId r:id="rId11"/>
+    <p:notesMasterId r:id="rId22"/>
   </p:notesMasterIdLst>
   <p:sldIdLst>
     <p:sldId id="256" r:id="rId2"/>
@@ -15,8 +15,19 @@
     <p:sldId id="260" r:id="rId6"/>
     <p:sldId id="263" r:id="rId7"/>
     <p:sldId id="264" r:id="rId8"/>
-    <p:sldId id="261" r:id="rId9"/>
-    <p:sldId id="262" r:id="rId10"/>
+    <p:sldId id="265" r:id="rId9"/>
+    <p:sldId id="266" r:id="rId10"/>
+    <p:sldId id="267" r:id="rId11"/>
+    <p:sldId id="268" r:id="rId12"/>
+    <p:sldId id="269" r:id="rId13"/>
+    <p:sldId id="270" r:id="rId14"/>
+    <p:sldId id="271" r:id="rId15"/>
+    <p:sldId id="272" r:id="rId16"/>
+    <p:sldId id="274" r:id="rId17"/>
+    <p:sldId id="273" r:id="rId18"/>
+    <p:sldId id="275" r:id="rId19"/>
+    <p:sldId id="261" r:id="rId20"/>
+    <p:sldId id="262" r:id="rId21"/>
   </p:sldIdLst>
   <p:sldSz cx="12192000" cy="6858000"/>
   <p:notesSz cx="6858000" cy="9144000"/>
@@ -115,6 +126,11 @@
       </a:defRPr>
     </a:lvl9pPr>
   </p:defaultTextStyle>
+  <p:extLst>
+    <p:ext uri="{EFAFB233-063F-42B5-8137-9DF3F51BA10A}">
+      <p15:sldGuideLst xmlns:p15="http://schemas.microsoft.com/office/powerpoint/2012/main"/>
+    </p:ext>
+  </p:extLst>
 </p:presentation>
 </file>
 
@@ -200,7 +216,7 @@
           <a:p>
             <a:fld id="{2170EE20-8034-4089-8C1A-C269AE308ACD}" type="datetimeFigureOut">
               <a:rPr lang="en-GB" smtClean="0"/>
-              <a:t>12/01/2026</a:t>
+              <a:t>13/01/2026</a:t>
             </a:fld>
             <a:endParaRPr lang="en-GB"/>
           </a:p>
@@ -558,6 +574,926 @@
 </p:notes>
 </file>
 
+<file path=ppt/notesSlides/notesSlide10.xml><?xml version="1.0" encoding="utf-8"?>
+<p:notes xmlns:a="http://schemas.openxmlformats.org/drawingml/2006/main" xmlns:r="http://schemas.openxmlformats.org/officeDocument/2006/relationships" xmlns:p="http://schemas.openxmlformats.org/presentationml/2006/main">
+  <p:cSld>
+    <p:spTree>
+      <p:nvGrpSpPr>
+        <p:cNvPr id="1" name="">
+          <a:extLst>
+            <a:ext uri="{FF2B5EF4-FFF2-40B4-BE49-F238E27FC236}">
+              <a16:creationId xmlns:a16="http://schemas.microsoft.com/office/drawing/2014/main" id="{CDA66C4B-9E8C-5F52-EA74-3B02A5DA0F07}"/>
+            </a:ext>
+          </a:extLst>
+        </p:cNvPr>
+        <p:cNvGrpSpPr/>
+        <p:nvPr/>
+      </p:nvGrpSpPr>
+      <p:grpSpPr>
+        <a:xfrm>
+          <a:off x="0" y="0"/>
+          <a:ext cx="0" cy="0"/>
+          <a:chOff x="0" y="0"/>
+          <a:chExt cx="0" cy="0"/>
+        </a:xfrm>
+      </p:grpSpPr>
+      <p:sp>
+        <p:nvSpPr>
+          <p:cNvPr id="2" name="Slide Image Placeholder 1">
+            <a:extLst>
+              <a:ext uri="{FF2B5EF4-FFF2-40B4-BE49-F238E27FC236}">
+                <a16:creationId xmlns:a16="http://schemas.microsoft.com/office/drawing/2014/main" id="{E71D7C57-A6B3-34E9-0C7D-4DB55559D26F}"/>
+              </a:ext>
+            </a:extLst>
+          </p:cNvPr>
+          <p:cNvSpPr>
+            <a:spLocks noGrp="1" noRot="1" noChangeAspect="1"/>
+          </p:cNvSpPr>
+          <p:nvPr>
+            <p:ph type="sldImg"/>
+          </p:nvPr>
+        </p:nvSpPr>
+        <p:spPr/>
+        <p:txBody>
+          <a:bodyPr/>
+          <a:lstStyle/>
+          <a:p>
+            <a:endParaRPr lang="en-GB"/>
+          </a:p>
+        </p:txBody>
+      </p:sp>
+      <p:sp>
+        <p:nvSpPr>
+          <p:cNvPr id="3" name="Notes Placeholder 2">
+            <a:extLst>
+              <a:ext uri="{FF2B5EF4-FFF2-40B4-BE49-F238E27FC236}">
+                <a16:creationId xmlns:a16="http://schemas.microsoft.com/office/drawing/2014/main" id="{7CF83610-DBF7-3ACB-7A92-B875259BB567}"/>
+              </a:ext>
+            </a:extLst>
+          </p:cNvPr>
+          <p:cNvSpPr>
+            <a:spLocks noGrp="1"/>
+          </p:cNvSpPr>
+          <p:nvPr>
+            <p:ph type="body" idx="1"/>
+          </p:nvPr>
+        </p:nvSpPr>
+        <p:spPr/>
+        <p:txBody>
+          <a:bodyPr/>
+          <a:lstStyle/>
+          <a:p>
+            <a:endParaRPr lang="en-GB" dirty="0"/>
+          </a:p>
+        </p:txBody>
+      </p:sp>
+      <p:sp>
+        <p:nvSpPr>
+          <p:cNvPr id="4" name="Slide Number Placeholder 3">
+            <a:extLst>
+              <a:ext uri="{FF2B5EF4-FFF2-40B4-BE49-F238E27FC236}">
+                <a16:creationId xmlns:a16="http://schemas.microsoft.com/office/drawing/2014/main" id="{1FB854FB-7A46-0A6B-261F-5EE1730DA0D5}"/>
+              </a:ext>
+            </a:extLst>
+          </p:cNvPr>
+          <p:cNvSpPr>
+            <a:spLocks noGrp="1"/>
+          </p:cNvSpPr>
+          <p:nvPr>
+            <p:ph type="sldNum" sz="quarter" idx="5"/>
+          </p:nvPr>
+        </p:nvSpPr>
+        <p:spPr/>
+        <p:txBody>
+          <a:bodyPr/>
+          <a:lstStyle/>
+          <a:p>
+            <a:fld id="{7B1068C9-7DA1-4EF7-9D68-F089B7AF17C6}" type="slidenum">
+              <a:rPr lang="en-GB" smtClean="0"/>
+              <a:t>11</a:t>
+            </a:fld>
+            <a:endParaRPr lang="en-GB"/>
+          </a:p>
+        </p:txBody>
+      </p:sp>
+    </p:spTree>
+    <p:extLst>
+      <p:ext uri="{BB962C8B-B14F-4D97-AF65-F5344CB8AC3E}">
+        <p14:creationId xmlns:p14="http://schemas.microsoft.com/office/powerpoint/2010/main" val="572124424"/>
+      </p:ext>
+    </p:extLst>
+  </p:cSld>
+  <p:clrMapOvr>
+    <a:masterClrMapping/>
+  </p:clrMapOvr>
+</p:notes>
+</file>
+
+<file path=ppt/notesSlides/notesSlide11.xml><?xml version="1.0" encoding="utf-8"?>
+<p:notes xmlns:a="http://schemas.openxmlformats.org/drawingml/2006/main" xmlns:r="http://schemas.openxmlformats.org/officeDocument/2006/relationships" xmlns:p="http://schemas.openxmlformats.org/presentationml/2006/main">
+  <p:cSld>
+    <p:spTree>
+      <p:nvGrpSpPr>
+        <p:cNvPr id="1" name="">
+          <a:extLst>
+            <a:ext uri="{FF2B5EF4-FFF2-40B4-BE49-F238E27FC236}">
+              <a16:creationId xmlns:a16="http://schemas.microsoft.com/office/drawing/2014/main" id="{635D2021-3645-034F-779C-D6702D0A02B2}"/>
+            </a:ext>
+          </a:extLst>
+        </p:cNvPr>
+        <p:cNvGrpSpPr/>
+        <p:nvPr/>
+      </p:nvGrpSpPr>
+      <p:grpSpPr>
+        <a:xfrm>
+          <a:off x="0" y="0"/>
+          <a:ext cx="0" cy="0"/>
+          <a:chOff x="0" y="0"/>
+          <a:chExt cx="0" cy="0"/>
+        </a:xfrm>
+      </p:grpSpPr>
+      <p:sp>
+        <p:nvSpPr>
+          <p:cNvPr id="2" name="Slide Image Placeholder 1">
+            <a:extLst>
+              <a:ext uri="{FF2B5EF4-FFF2-40B4-BE49-F238E27FC236}">
+                <a16:creationId xmlns:a16="http://schemas.microsoft.com/office/drawing/2014/main" id="{49744F58-6B7B-5ABD-9E8D-FFE309EF716C}"/>
+              </a:ext>
+            </a:extLst>
+          </p:cNvPr>
+          <p:cNvSpPr>
+            <a:spLocks noGrp="1" noRot="1" noChangeAspect="1"/>
+          </p:cNvSpPr>
+          <p:nvPr>
+            <p:ph type="sldImg"/>
+          </p:nvPr>
+        </p:nvSpPr>
+        <p:spPr/>
+        <p:txBody>
+          <a:bodyPr/>
+          <a:lstStyle/>
+          <a:p>
+            <a:endParaRPr lang="en-GB"/>
+          </a:p>
+        </p:txBody>
+      </p:sp>
+      <p:sp>
+        <p:nvSpPr>
+          <p:cNvPr id="3" name="Notes Placeholder 2">
+            <a:extLst>
+              <a:ext uri="{FF2B5EF4-FFF2-40B4-BE49-F238E27FC236}">
+                <a16:creationId xmlns:a16="http://schemas.microsoft.com/office/drawing/2014/main" id="{C32D5AB4-B918-56E9-D75E-96653D523CF3}"/>
+              </a:ext>
+            </a:extLst>
+          </p:cNvPr>
+          <p:cNvSpPr>
+            <a:spLocks noGrp="1"/>
+          </p:cNvSpPr>
+          <p:nvPr>
+            <p:ph type="body" idx="1"/>
+          </p:nvPr>
+        </p:nvSpPr>
+        <p:spPr/>
+        <p:txBody>
+          <a:bodyPr/>
+          <a:lstStyle/>
+          <a:p>
+            <a:endParaRPr lang="en-GB" dirty="0"/>
+          </a:p>
+        </p:txBody>
+      </p:sp>
+      <p:sp>
+        <p:nvSpPr>
+          <p:cNvPr id="4" name="Slide Number Placeholder 3">
+            <a:extLst>
+              <a:ext uri="{FF2B5EF4-FFF2-40B4-BE49-F238E27FC236}">
+                <a16:creationId xmlns:a16="http://schemas.microsoft.com/office/drawing/2014/main" id="{CCFFA214-5950-56DE-0B15-586CDB7A349B}"/>
+              </a:ext>
+            </a:extLst>
+          </p:cNvPr>
+          <p:cNvSpPr>
+            <a:spLocks noGrp="1"/>
+          </p:cNvSpPr>
+          <p:nvPr>
+            <p:ph type="sldNum" sz="quarter" idx="5"/>
+          </p:nvPr>
+        </p:nvSpPr>
+        <p:spPr/>
+        <p:txBody>
+          <a:bodyPr/>
+          <a:lstStyle/>
+          <a:p>
+            <a:fld id="{7B1068C9-7DA1-4EF7-9D68-F089B7AF17C6}" type="slidenum">
+              <a:rPr lang="en-GB" smtClean="0"/>
+              <a:t>12</a:t>
+            </a:fld>
+            <a:endParaRPr lang="en-GB"/>
+          </a:p>
+        </p:txBody>
+      </p:sp>
+    </p:spTree>
+    <p:extLst>
+      <p:ext uri="{BB962C8B-B14F-4D97-AF65-F5344CB8AC3E}">
+        <p14:creationId xmlns:p14="http://schemas.microsoft.com/office/powerpoint/2010/main" val="2387257365"/>
+      </p:ext>
+    </p:extLst>
+  </p:cSld>
+  <p:clrMapOvr>
+    <a:masterClrMapping/>
+  </p:clrMapOvr>
+</p:notes>
+</file>
+
+<file path=ppt/notesSlides/notesSlide12.xml><?xml version="1.0" encoding="utf-8"?>
+<p:notes xmlns:a="http://schemas.openxmlformats.org/drawingml/2006/main" xmlns:r="http://schemas.openxmlformats.org/officeDocument/2006/relationships" xmlns:p="http://schemas.openxmlformats.org/presentationml/2006/main">
+  <p:cSld>
+    <p:spTree>
+      <p:nvGrpSpPr>
+        <p:cNvPr id="1" name="">
+          <a:extLst>
+            <a:ext uri="{FF2B5EF4-FFF2-40B4-BE49-F238E27FC236}">
+              <a16:creationId xmlns:a16="http://schemas.microsoft.com/office/drawing/2014/main" id="{16C7B17A-313D-FD6E-929D-8C22DF723121}"/>
+            </a:ext>
+          </a:extLst>
+        </p:cNvPr>
+        <p:cNvGrpSpPr/>
+        <p:nvPr/>
+      </p:nvGrpSpPr>
+      <p:grpSpPr>
+        <a:xfrm>
+          <a:off x="0" y="0"/>
+          <a:ext cx="0" cy="0"/>
+          <a:chOff x="0" y="0"/>
+          <a:chExt cx="0" cy="0"/>
+        </a:xfrm>
+      </p:grpSpPr>
+      <p:sp>
+        <p:nvSpPr>
+          <p:cNvPr id="2" name="Slide Image Placeholder 1">
+            <a:extLst>
+              <a:ext uri="{FF2B5EF4-FFF2-40B4-BE49-F238E27FC236}">
+                <a16:creationId xmlns:a16="http://schemas.microsoft.com/office/drawing/2014/main" id="{99CEF748-E628-695A-2026-FCD96080B38B}"/>
+              </a:ext>
+            </a:extLst>
+          </p:cNvPr>
+          <p:cNvSpPr>
+            <a:spLocks noGrp="1" noRot="1" noChangeAspect="1"/>
+          </p:cNvSpPr>
+          <p:nvPr>
+            <p:ph type="sldImg"/>
+          </p:nvPr>
+        </p:nvSpPr>
+        <p:spPr/>
+        <p:txBody>
+          <a:bodyPr/>
+          <a:lstStyle/>
+          <a:p>
+            <a:endParaRPr lang="en-GB"/>
+          </a:p>
+        </p:txBody>
+      </p:sp>
+      <p:sp>
+        <p:nvSpPr>
+          <p:cNvPr id="3" name="Notes Placeholder 2">
+            <a:extLst>
+              <a:ext uri="{FF2B5EF4-FFF2-40B4-BE49-F238E27FC236}">
+                <a16:creationId xmlns:a16="http://schemas.microsoft.com/office/drawing/2014/main" id="{CD4467B6-527C-5FF3-A240-4669B66161E3}"/>
+              </a:ext>
+            </a:extLst>
+          </p:cNvPr>
+          <p:cNvSpPr>
+            <a:spLocks noGrp="1"/>
+          </p:cNvSpPr>
+          <p:nvPr>
+            <p:ph type="body" idx="1"/>
+          </p:nvPr>
+        </p:nvSpPr>
+        <p:spPr/>
+        <p:txBody>
+          <a:bodyPr/>
+          <a:lstStyle/>
+          <a:p>
+            <a:endParaRPr lang="en-GB" dirty="0"/>
+          </a:p>
+        </p:txBody>
+      </p:sp>
+      <p:sp>
+        <p:nvSpPr>
+          <p:cNvPr id="4" name="Slide Number Placeholder 3">
+            <a:extLst>
+              <a:ext uri="{FF2B5EF4-FFF2-40B4-BE49-F238E27FC236}">
+                <a16:creationId xmlns:a16="http://schemas.microsoft.com/office/drawing/2014/main" id="{F5C4151A-2A06-423C-1BE6-E87F43634841}"/>
+              </a:ext>
+            </a:extLst>
+          </p:cNvPr>
+          <p:cNvSpPr>
+            <a:spLocks noGrp="1"/>
+          </p:cNvSpPr>
+          <p:nvPr>
+            <p:ph type="sldNum" sz="quarter" idx="5"/>
+          </p:nvPr>
+        </p:nvSpPr>
+        <p:spPr/>
+        <p:txBody>
+          <a:bodyPr/>
+          <a:lstStyle/>
+          <a:p>
+            <a:fld id="{7B1068C9-7DA1-4EF7-9D68-F089B7AF17C6}" type="slidenum">
+              <a:rPr lang="en-GB" smtClean="0"/>
+              <a:t>13</a:t>
+            </a:fld>
+            <a:endParaRPr lang="en-GB"/>
+          </a:p>
+        </p:txBody>
+      </p:sp>
+    </p:spTree>
+    <p:extLst>
+      <p:ext uri="{BB962C8B-B14F-4D97-AF65-F5344CB8AC3E}">
+        <p14:creationId xmlns:p14="http://schemas.microsoft.com/office/powerpoint/2010/main" val="1154899986"/>
+      </p:ext>
+    </p:extLst>
+  </p:cSld>
+  <p:clrMapOvr>
+    <a:masterClrMapping/>
+  </p:clrMapOvr>
+</p:notes>
+</file>
+
+<file path=ppt/notesSlides/notesSlide13.xml><?xml version="1.0" encoding="utf-8"?>
+<p:notes xmlns:a="http://schemas.openxmlformats.org/drawingml/2006/main" xmlns:r="http://schemas.openxmlformats.org/officeDocument/2006/relationships" xmlns:p="http://schemas.openxmlformats.org/presentationml/2006/main">
+  <p:cSld>
+    <p:spTree>
+      <p:nvGrpSpPr>
+        <p:cNvPr id="1" name="">
+          <a:extLst>
+            <a:ext uri="{FF2B5EF4-FFF2-40B4-BE49-F238E27FC236}">
+              <a16:creationId xmlns:a16="http://schemas.microsoft.com/office/drawing/2014/main" id="{EE0546DF-55E2-10F8-B365-9A28B1A93AF4}"/>
+            </a:ext>
+          </a:extLst>
+        </p:cNvPr>
+        <p:cNvGrpSpPr/>
+        <p:nvPr/>
+      </p:nvGrpSpPr>
+      <p:grpSpPr>
+        <a:xfrm>
+          <a:off x="0" y="0"/>
+          <a:ext cx="0" cy="0"/>
+          <a:chOff x="0" y="0"/>
+          <a:chExt cx="0" cy="0"/>
+        </a:xfrm>
+      </p:grpSpPr>
+      <p:sp>
+        <p:nvSpPr>
+          <p:cNvPr id="2" name="Slide Image Placeholder 1">
+            <a:extLst>
+              <a:ext uri="{FF2B5EF4-FFF2-40B4-BE49-F238E27FC236}">
+                <a16:creationId xmlns:a16="http://schemas.microsoft.com/office/drawing/2014/main" id="{7E82E2F7-486C-1501-E6DE-93DCCC990A07}"/>
+              </a:ext>
+            </a:extLst>
+          </p:cNvPr>
+          <p:cNvSpPr>
+            <a:spLocks noGrp="1" noRot="1" noChangeAspect="1"/>
+          </p:cNvSpPr>
+          <p:nvPr>
+            <p:ph type="sldImg"/>
+          </p:nvPr>
+        </p:nvSpPr>
+        <p:spPr/>
+        <p:txBody>
+          <a:bodyPr/>
+          <a:lstStyle/>
+          <a:p>
+            <a:endParaRPr lang="en-GB"/>
+          </a:p>
+        </p:txBody>
+      </p:sp>
+      <p:sp>
+        <p:nvSpPr>
+          <p:cNvPr id="3" name="Notes Placeholder 2">
+            <a:extLst>
+              <a:ext uri="{FF2B5EF4-FFF2-40B4-BE49-F238E27FC236}">
+                <a16:creationId xmlns:a16="http://schemas.microsoft.com/office/drawing/2014/main" id="{9D6F92D4-A0D9-3A96-E0E3-4F8D8307C484}"/>
+              </a:ext>
+            </a:extLst>
+          </p:cNvPr>
+          <p:cNvSpPr>
+            <a:spLocks noGrp="1"/>
+          </p:cNvSpPr>
+          <p:nvPr>
+            <p:ph type="body" idx="1"/>
+          </p:nvPr>
+        </p:nvSpPr>
+        <p:spPr/>
+        <p:txBody>
+          <a:bodyPr/>
+          <a:lstStyle/>
+          <a:p>
+            <a:endParaRPr lang="en-GB" dirty="0"/>
+          </a:p>
+        </p:txBody>
+      </p:sp>
+      <p:sp>
+        <p:nvSpPr>
+          <p:cNvPr id="4" name="Slide Number Placeholder 3">
+            <a:extLst>
+              <a:ext uri="{FF2B5EF4-FFF2-40B4-BE49-F238E27FC236}">
+                <a16:creationId xmlns:a16="http://schemas.microsoft.com/office/drawing/2014/main" id="{A6DA61F7-F9CA-79EA-5526-B68FC85C8A8C}"/>
+              </a:ext>
+            </a:extLst>
+          </p:cNvPr>
+          <p:cNvSpPr>
+            <a:spLocks noGrp="1"/>
+          </p:cNvSpPr>
+          <p:nvPr>
+            <p:ph type="sldNum" sz="quarter" idx="5"/>
+          </p:nvPr>
+        </p:nvSpPr>
+        <p:spPr/>
+        <p:txBody>
+          <a:bodyPr/>
+          <a:lstStyle/>
+          <a:p>
+            <a:fld id="{7B1068C9-7DA1-4EF7-9D68-F089B7AF17C6}" type="slidenum">
+              <a:rPr lang="en-GB" smtClean="0"/>
+              <a:t>14</a:t>
+            </a:fld>
+            <a:endParaRPr lang="en-GB"/>
+          </a:p>
+        </p:txBody>
+      </p:sp>
+    </p:spTree>
+    <p:extLst>
+      <p:ext uri="{BB962C8B-B14F-4D97-AF65-F5344CB8AC3E}">
+        <p14:creationId xmlns:p14="http://schemas.microsoft.com/office/powerpoint/2010/main" val="200700040"/>
+      </p:ext>
+    </p:extLst>
+  </p:cSld>
+  <p:clrMapOvr>
+    <a:masterClrMapping/>
+  </p:clrMapOvr>
+</p:notes>
+</file>
+
+<file path=ppt/notesSlides/notesSlide14.xml><?xml version="1.0" encoding="utf-8"?>
+<p:notes xmlns:a="http://schemas.openxmlformats.org/drawingml/2006/main" xmlns:r="http://schemas.openxmlformats.org/officeDocument/2006/relationships" xmlns:p="http://schemas.openxmlformats.org/presentationml/2006/main">
+  <p:cSld>
+    <p:spTree>
+      <p:nvGrpSpPr>
+        <p:cNvPr id="1" name="">
+          <a:extLst>
+            <a:ext uri="{FF2B5EF4-FFF2-40B4-BE49-F238E27FC236}">
+              <a16:creationId xmlns:a16="http://schemas.microsoft.com/office/drawing/2014/main" id="{8BBD20FF-DEF4-3170-71E0-BAF6A6FE1BEA}"/>
+            </a:ext>
+          </a:extLst>
+        </p:cNvPr>
+        <p:cNvGrpSpPr/>
+        <p:nvPr/>
+      </p:nvGrpSpPr>
+      <p:grpSpPr>
+        <a:xfrm>
+          <a:off x="0" y="0"/>
+          <a:ext cx="0" cy="0"/>
+          <a:chOff x="0" y="0"/>
+          <a:chExt cx="0" cy="0"/>
+        </a:xfrm>
+      </p:grpSpPr>
+      <p:sp>
+        <p:nvSpPr>
+          <p:cNvPr id="2" name="Slide Image Placeholder 1">
+            <a:extLst>
+              <a:ext uri="{FF2B5EF4-FFF2-40B4-BE49-F238E27FC236}">
+                <a16:creationId xmlns:a16="http://schemas.microsoft.com/office/drawing/2014/main" id="{037AFCBC-8D3C-9072-B960-A2EE9D44C465}"/>
+              </a:ext>
+            </a:extLst>
+          </p:cNvPr>
+          <p:cNvSpPr>
+            <a:spLocks noGrp="1" noRot="1" noChangeAspect="1"/>
+          </p:cNvSpPr>
+          <p:nvPr>
+            <p:ph type="sldImg"/>
+          </p:nvPr>
+        </p:nvSpPr>
+        <p:spPr/>
+        <p:txBody>
+          <a:bodyPr/>
+          <a:lstStyle/>
+          <a:p>
+            <a:endParaRPr lang="en-GB"/>
+          </a:p>
+        </p:txBody>
+      </p:sp>
+      <p:sp>
+        <p:nvSpPr>
+          <p:cNvPr id="3" name="Notes Placeholder 2">
+            <a:extLst>
+              <a:ext uri="{FF2B5EF4-FFF2-40B4-BE49-F238E27FC236}">
+                <a16:creationId xmlns:a16="http://schemas.microsoft.com/office/drawing/2014/main" id="{9B6DF3B4-D0E9-318B-FE30-3B4B940790C8}"/>
+              </a:ext>
+            </a:extLst>
+          </p:cNvPr>
+          <p:cNvSpPr>
+            <a:spLocks noGrp="1"/>
+          </p:cNvSpPr>
+          <p:nvPr>
+            <p:ph type="body" idx="1"/>
+          </p:nvPr>
+        </p:nvSpPr>
+        <p:spPr/>
+        <p:txBody>
+          <a:bodyPr/>
+          <a:lstStyle/>
+          <a:p>
+            <a:endParaRPr lang="en-GB" dirty="0"/>
+          </a:p>
+        </p:txBody>
+      </p:sp>
+      <p:sp>
+        <p:nvSpPr>
+          <p:cNvPr id="4" name="Slide Number Placeholder 3">
+            <a:extLst>
+              <a:ext uri="{FF2B5EF4-FFF2-40B4-BE49-F238E27FC236}">
+                <a16:creationId xmlns:a16="http://schemas.microsoft.com/office/drawing/2014/main" id="{601FB0FB-E978-C0DF-AD01-0BB3C48912C8}"/>
+              </a:ext>
+            </a:extLst>
+          </p:cNvPr>
+          <p:cNvSpPr>
+            <a:spLocks noGrp="1"/>
+          </p:cNvSpPr>
+          <p:nvPr>
+            <p:ph type="sldNum" sz="quarter" idx="5"/>
+          </p:nvPr>
+        </p:nvSpPr>
+        <p:spPr/>
+        <p:txBody>
+          <a:bodyPr/>
+          <a:lstStyle/>
+          <a:p>
+            <a:fld id="{7B1068C9-7DA1-4EF7-9D68-F089B7AF17C6}" type="slidenum">
+              <a:rPr lang="en-GB" smtClean="0"/>
+              <a:t>15</a:t>
+            </a:fld>
+            <a:endParaRPr lang="en-GB"/>
+          </a:p>
+        </p:txBody>
+      </p:sp>
+    </p:spTree>
+    <p:extLst>
+      <p:ext uri="{BB962C8B-B14F-4D97-AF65-F5344CB8AC3E}">
+        <p14:creationId xmlns:p14="http://schemas.microsoft.com/office/powerpoint/2010/main" val="514158692"/>
+      </p:ext>
+    </p:extLst>
+  </p:cSld>
+  <p:clrMapOvr>
+    <a:masterClrMapping/>
+  </p:clrMapOvr>
+</p:notes>
+</file>
+
+<file path=ppt/notesSlides/notesSlide15.xml><?xml version="1.0" encoding="utf-8"?>
+<p:notes xmlns:a="http://schemas.openxmlformats.org/drawingml/2006/main" xmlns:r="http://schemas.openxmlformats.org/officeDocument/2006/relationships" xmlns:p="http://schemas.openxmlformats.org/presentationml/2006/main">
+  <p:cSld>
+    <p:spTree>
+      <p:nvGrpSpPr>
+        <p:cNvPr id="1" name="">
+          <a:extLst>
+            <a:ext uri="{FF2B5EF4-FFF2-40B4-BE49-F238E27FC236}">
+              <a16:creationId xmlns:a16="http://schemas.microsoft.com/office/drawing/2014/main" id="{384DF694-0DFE-5DBA-241F-E013C2820A2E}"/>
+            </a:ext>
+          </a:extLst>
+        </p:cNvPr>
+        <p:cNvGrpSpPr/>
+        <p:nvPr/>
+      </p:nvGrpSpPr>
+      <p:grpSpPr>
+        <a:xfrm>
+          <a:off x="0" y="0"/>
+          <a:ext cx="0" cy="0"/>
+          <a:chOff x="0" y="0"/>
+          <a:chExt cx="0" cy="0"/>
+        </a:xfrm>
+      </p:grpSpPr>
+      <p:sp>
+        <p:nvSpPr>
+          <p:cNvPr id="2" name="Slide Image Placeholder 1">
+            <a:extLst>
+              <a:ext uri="{FF2B5EF4-FFF2-40B4-BE49-F238E27FC236}">
+                <a16:creationId xmlns:a16="http://schemas.microsoft.com/office/drawing/2014/main" id="{F14D4515-DBF7-6CF6-9301-2ABFAAC919D6}"/>
+              </a:ext>
+            </a:extLst>
+          </p:cNvPr>
+          <p:cNvSpPr>
+            <a:spLocks noGrp="1" noRot="1" noChangeAspect="1"/>
+          </p:cNvSpPr>
+          <p:nvPr>
+            <p:ph type="sldImg"/>
+          </p:nvPr>
+        </p:nvSpPr>
+        <p:spPr/>
+        <p:txBody>
+          <a:bodyPr/>
+          <a:lstStyle/>
+          <a:p>
+            <a:endParaRPr lang="en-GB"/>
+          </a:p>
+        </p:txBody>
+      </p:sp>
+      <p:sp>
+        <p:nvSpPr>
+          <p:cNvPr id="3" name="Notes Placeholder 2">
+            <a:extLst>
+              <a:ext uri="{FF2B5EF4-FFF2-40B4-BE49-F238E27FC236}">
+                <a16:creationId xmlns:a16="http://schemas.microsoft.com/office/drawing/2014/main" id="{86750486-BBE4-5B42-45F8-D9B5DC97BF99}"/>
+              </a:ext>
+            </a:extLst>
+          </p:cNvPr>
+          <p:cNvSpPr>
+            <a:spLocks noGrp="1"/>
+          </p:cNvSpPr>
+          <p:nvPr>
+            <p:ph type="body" idx="1"/>
+          </p:nvPr>
+        </p:nvSpPr>
+        <p:spPr/>
+        <p:txBody>
+          <a:bodyPr/>
+          <a:lstStyle/>
+          <a:p>
+            <a:endParaRPr lang="en-GB" dirty="0"/>
+          </a:p>
+        </p:txBody>
+      </p:sp>
+      <p:sp>
+        <p:nvSpPr>
+          <p:cNvPr id="4" name="Slide Number Placeholder 3">
+            <a:extLst>
+              <a:ext uri="{FF2B5EF4-FFF2-40B4-BE49-F238E27FC236}">
+                <a16:creationId xmlns:a16="http://schemas.microsoft.com/office/drawing/2014/main" id="{7A4DBE25-5ACF-67C4-712F-70DE03A1433B}"/>
+              </a:ext>
+            </a:extLst>
+          </p:cNvPr>
+          <p:cNvSpPr>
+            <a:spLocks noGrp="1"/>
+          </p:cNvSpPr>
+          <p:nvPr>
+            <p:ph type="sldNum" sz="quarter" idx="5"/>
+          </p:nvPr>
+        </p:nvSpPr>
+        <p:spPr/>
+        <p:txBody>
+          <a:bodyPr/>
+          <a:lstStyle/>
+          <a:p>
+            <a:fld id="{7B1068C9-7DA1-4EF7-9D68-F089B7AF17C6}" type="slidenum">
+              <a:rPr lang="en-GB" smtClean="0"/>
+              <a:t>16</a:t>
+            </a:fld>
+            <a:endParaRPr lang="en-GB"/>
+          </a:p>
+        </p:txBody>
+      </p:sp>
+    </p:spTree>
+    <p:extLst>
+      <p:ext uri="{BB962C8B-B14F-4D97-AF65-F5344CB8AC3E}">
+        <p14:creationId xmlns:p14="http://schemas.microsoft.com/office/powerpoint/2010/main" val="118294952"/>
+      </p:ext>
+    </p:extLst>
+  </p:cSld>
+  <p:clrMapOvr>
+    <a:masterClrMapping/>
+  </p:clrMapOvr>
+</p:notes>
+</file>
+
+<file path=ppt/notesSlides/notesSlide16.xml><?xml version="1.0" encoding="utf-8"?>
+<p:notes xmlns:a="http://schemas.openxmlformats.org/drawingml/2006/main" xmlns:r="http://schemas.openxmlformats.org/officeDocument/2006/relationships" xmlns:p="http://schemas.openxmlformats.org/presentationml/2006/main">
+  <p:cSld>
+    <p:spTree>
+      <p:nvGrpSpPr>
+        <p:cNvPr id="1" name="">
+          <a:extLst>
+            <a:ext uri="{FF2B5EF4-FFF2-40B4-BE49-F238E27FC236}">
+              <a16:creationId xmlns:a16="http://schemas.microsoft.com/office/drawing/2014/main" id="{CC0DB649-A5DD-D90B-EB8E-47F8F0F6B965}"/>
+            </a:ext>
+          </a:extLst>
+        </p:cNvPr>
+        <p:cNvGrpSpPr/>
+        <p:nvPr/>
+      </p:nvGrpSpPr>
+      <p:grpSpPr>
+        <a:xfrm>
+          <a:off x="0" y="0"/>
+          <a:ext cx="0" cy="0"/>
+          <a:chOff x="0" y="0"/>
+          <a:chExt cx="0" cy="0"/>
+        </a:xfrm>
+      </p:grpSpPr>
+      <p:sp>
+        <p:nvSpPr>
+          <p:cNvPr id="2" name="Slide Image Placeholder 1">
+            <a:extLst>
+              <a:ext uri="{FF2B5EF4-FFF2-40B4-BE49-F238E27FC236}">
+                <a16:creationId xmlns:a16="http://schemas.microsoft.com/office/drawing/2014/main" id="{B68DB7A5-9C0C-7ADB-E2BC-81A281882A6A}"/>
+              </a:ext>
+            </a:extLst>
+          </p:cNvPr>
+          <p:cNvSpPr>
+            <a:spLocks noGrp="1" noRot="1" noChangeAspect="1"/>
+          </p:cNvSpPr>
+          <p:nvPr>
+            <p:ph type="sldImg"/>
+          </p:nvPr>
+        </p:nvSpPr>
+        <p:spPr/>
+        <p:txBody>
+          <a:bodyPr/>
+          <a:lstStyle/>
+          <a:p>
+            <a:endParaRPr lang="en-GB"/>
+          </a:p>
+        </p:txBody>
+      </p:sp>
+      <p:sp>
+        <p:nvSpPr>
+          <p:cNvPr id="3" name="Notes Placeholder 2">
+            <a:extLst>
+              <a:ext uri="{FF2B5EF4-FFF2-40B4-BE49-F238E27FC236}">
+                <a16:creationId xmlns:a16="http://schemas.microsoft.com/office/drawing/2014/main" id="{5AFA2789-4B53-C588-D56F-FCE179322700}"/>
+              </a:ext>
+            </a:extLst>
+          </p:cNvPr>
+          <p:cNvSpPr>
+            <a:spLocks noGrp="1"/>
+          </p:cNvSpPr>
+          <p:nvPr>
+            <p:ph type="body" idx="1"/>
+          </p:nvPr>
+        </p:nvSpPr>
+        <p:spPr/>
+        <p:txBody>
+          <a:bodyPr/>
+          <a:lstStyle/>
+          <a:p>
+            <a:endParaRPr lang="en-GB" dirty="0"/>
+          </a:p>
+        </p:txBody>
+      </p:sp>
+      <p:sp>
+        <p:nvSpPr>
+          <p:cNvPr id="4" name="Slide Number Placeholder 3">
+            <a:extLst>
+              <a:ext uri="{FF2B5EF4-FFF2-40B4-BE49-F238E27FC236}">
+                <a16:creationId xmlns:a16="http://schemas.microsoft.com/office/drawing/2014/main" id="{04954686-1188-B8AF-29CD-D4A4AF59226A}"/>
+              </a:ext>
+            </a:extLst>
+          </p:cNvPr>
+          <p:cNvSpPr>
+            <a:spLocks noGrp="1"/>
+          </p:cNvSpPr>
+          <p:nvPr>
+            <p:ph type="sldNum" sz="quarter" idx="5"/>
+          </p:nvPr>
+        </p:nvSpPr>
+        <p:spPr/>
+        <p:txBody>
+          <a:bodyPr/>
+          <a:lstStyle/>
+          <a:p>
+            <a:fld id="{7B1068C9-7DA1-4EF7-9D68-F089B7AF17C6}" type="slidenum">
+              <a:rPr lang="en-GB" smtClean="0"/>
+              <a:t>17</a:t>
+            </a:fld>
+            <a:endParaRPr lang="en-GB"/>
+          </a:p>
+        </p:txBody>
+      </p:sp>
+    </p:spTree>
+    <p:extLst>
+      <p:ext uri="{BB962C8B-B14F-4D97-AF65-F5344CB8AC3E}">
+        <p14:creationId xmlns:p14="http://schemas.microsoft.com/office/powerpoint/2010/main" val="3469157772"/>
+      </p:ext>
+    </p:extLst>
+  </p:cSld>
+  <p:clrMapOvr>
+    <a:masterClrMapping/>
+  </p:clrMapOvr>
+</p:notes>
+</file>
+
+<file path=ppt/notesSlides/notesSlide17.xml><?xml version="1.0" encoding="utf-8"?>
+<p:notes xmlns:a="http://schemas.openxmlformats.org/drawingml/2006/main" xmlns:r="http://schemas.openxmlformats.org/officeDocument/2006/relationships" xmlns:p="http://schemas.openxmlformats.org/presentationml/2006/main">
+  <p:cSld>
+    <p:spTree>
+      <p:nvGrpSpPr>
+        <p:cNvPr id="1" name="">
+          <a:extLst>
+            <a:ext uri="{FF2B5EF4-FFF2-40B4-BE49-F238E27FC236}">
+              <a16:creationId xmlns:a16="http://schemas.microsoft.com/office/drawing/2014/main" id="{D8CDA172-A56A-F8E4-204A-FB51964ED06E}"/>
+            </a:ext>
+          </a:extLst>
+        </p:cNvPr>
+        <p:cNvGrpSpPr/>
+        <p:nvPr/>
+      </p:nvGrpSpPr>
+      <p:grpSpPr>
+        <a:xfrm>
+          <a:off x="0" y="0"/>
+          <a:ext cx="0" cy="0"/>
+          <a:chOff x="0" y="0"/>
+          <a:chExt cx="0" cy="0"/>
+        </a:xfrm>
+      </p:grpSpPr>
+      <p:sp>
+        <p:nvSpPr>
+          <p:cNvPr id="2" name="Slide Image Placeholder 1">
+            <a:extLst>
+              <a:ext uri="{FF2B5EF4-FFF2-40B4-BE49-F238E27FC236}">
+                <a16:creationId xmlns:a16="http://schemas.microsoft.com/office/drawing/2014/main" id="{72852A7C-0300-4439-AD6E-3B023CD64173}"/>
+              </a:ext>
+            </a:extLst>
+          </p:cNvPr>
+          <p:cNvSpPr>
+            <a:spLocks noGrp="1" noRot="1" noChangeAspect="1"/>
+          </p:cNvSpPr>
+          <p:nvPr>
+            <p:ph type="sldImg"/>
+          </p:nvPr>
+        </p:nvSpPr>
+        <p:spPr/>
+        <p:txBody>
+          <a:bodyPr/>
+          <a:lstStyle/>
+          <a:p>
+            <a:endParaRPr lang="en-GB"/>
+          </a:p>
+        </p:txBody>
+      </p:sp>
+      <p:sp>
+        <p:nvSpPr>
+          <p:cNvPr id="3" name="Notes Placeholder 2">
+            <a:extLst>
+              <a:ext uri="{FF2B5EF4-FFF2-40B4-BE49-F238E27FC236}">
+                <a16:creationId xmlns:a16="http://schemas.microsoft.com/office/drawing/2014/main" id="{3F5320A3-A34A-A84D-F835-5ED23D5099BA}"/>
+              </a:ext>
+            </a:extLst>
+          </p:cNvPr>
+          <p:cNvSpPr>
+            <a:spLocks noGrp="1"/>
+          </p:cNvSpPr>
+          <p:nvPr>
+            <p:ph type="body" idx="1"/>
+          </p:nvPr>
+        </p:nvSpPr>
+        <p:spPr/>
+        <p:txBody>
+          <a:bodyPr/>
+          <a:lstStyle/>
+          <a:p>
+            <a:endParaRPr lang="en-GB" dirty="0"/>
+          </a:p>
+        </p:txBody>
+      </p:sp>
+      <p:sp>
+        <p:nvSpPr>
+          <p:cNvPr id="4" name="Slide Number Placeholder 3">
+            <a:extLst>
+              <a:ext uri="{FF2B5EF4-FFF2-40B4-BE49-F238E27FC236}">
+                <a16:creationId xmlns:a16="http://schemas.microsoft.com/office/drawing/2014/main" id="{17884844-218E-A6B9-5747-447378FD7C05}"/>
+              </a:ext>
+            </a:extLst>
+          </p:cNvPr>
+          <p:cNvSpPr>
+            <a:spLocks noGrp="1"/>
+          </p:cNvSpPr>
+          <p:nvPr>
+            <p:ph type="sldNum" sz="quarter" idx="5"/>
+          </p:nvPr>
+        </p:nvSpPr>
+        <p:spPr/>
+        <p:txBody>
+          <a:bodyPr/>
+          <a:lstStyle/>
+          <a:p>
+            <a:fld id="{7B1068C9-7DA1-4EF7-9D68-F089B7AF17C6}" type="slidenum">
+              <a:rPr lang="en-GB" smtClean="0"/>
+              <a:t>18</a:t>
+            </a:fld>
+            <a:endParaRPr lang="en-GB"/>
+          </a:p>
+        </p:txBody>
+      </p:sp>
+    </p:spTree>
+    <p:extLst>
+      <p:ext uri="{BB962C8B-B14F-4D97-AF65-F5344CB8AC3E}">
+        <p14:creationId xmlns:p14="http://schemas.microsoft.com/office/powerpoint/2010/main" val="165704282"/>
+      </p:ext>
+    </p:extLst>
+  </p:cSld>
+  <p:clrMapOvr>
+    <a:masterClrMapping/>
+  </p:clrMapOvr>
+</p:notes>
+</file>
+
 <file path=ppt/notesSlides/notesSlide2.xml><?xml version="1.0" encoding="utf-8"?>
 <p:notes xmlns:a="http://schemas.openxmlformats.org/drawingml/2006/main" xmlns:r="http://schemas.openxmlformats.org/officeDocument/2006/relationships" xmlns:p="http://schemas.openxmlformats.org/presentationml/2006/main">
   <p:cSld>
@@ -1124,6 +2060,351 @@
     <p:extLst>
       <p:ext uri="{BB962C8B-B14F-4D97-AF65-F5344CB8AC3E}">
         <p14:creationId xmlns:p14="http://schemas.microsoft.com/office/powerpoint/2010/main" val="3787720646"/>
+      </p:ext>
+    </p:extLst>
+  </p:cSld>
+  <p:clrMapOvr>
+    <a:masterClrMapping/>
+  </p:clrMapOvr>
+</p:notes>
+</file>
+
+<file path=ppt/notesSlides/notesSlide7.xml><?xml version="1.0" encoding="utf-8"?>
+<p:notes xmlns:a="http://schemas.openxmlformats.org/drawingml/2006/main" xmlns:r="http://schemas.openxmlformats.org/officeDocument/2006/relationships" xmlns:p="http://schemas.openxmlformats.org/presentationml/2006/main">
+  <p:cSld>
+    <p:spTree>
+      <p:nvGrpSpPr>
+        <p:cNvPr id="1" name="">
+          <a:extLst>
+            <a:ext uri="{FF2B5EF4-FFF2-40B4-BE49-F238E27FC236}">
+              <a16:creationId xmlns:a16="http://schemas.microsoft.com/office/drawing/2014/main" id="{6C7E9B1E-97D8-A998-B0F0-784967EE643A}"/>
+            </a:ext>
+          </a:extLst>
+        </p:cNvPr>
+        <p:cNvGrpSpPr/>
+        <p:nvPr/>
+      </p:nvGrpSpPr>
+      <p:grpSpPr>
+        <a:xfrm>
+          <a:off x="0" y="0"/>
+          <a:ext cx="0" cy="0"/>
+          <a:chOff x="0" y="0"/>
+          <a:chExt cx="0" cy="0"/>
+        </a:xfrm>
+      </p:grpSpPr>
+      <p:sp>
+        <p:nvSpPr>
+          <p:cNvPr id="2" name="Slide Image Placeholder 1">
+            <a:extLst>
+              <a:ext uri="{FF2B5EF4-FFF2-40B4-BE49-F238E27FC236}">
+                <a16:creationId xmlns:a16="http://schemas.microsoft.com/office/drawing/2014/main" id="{CAE572EF-BA85-FEB5-93BB-857094473AC3}"/>
+              </a:ext>
+            </a:extLst>
+          </p:cNvPr>
+          <p:cNvSpPr>
+            <a:spLocks noGrp="1" noRot="1" noChangeAspect="1"/>
+          </p:cNvSpPr>
+          <p:nvPr>
+            <p:ph type="sldImg"/>
+          </p:nvPr>
+        </p:nvSpPr>
+        <p:spPr/>
+        <p:txBody>
+          <a:bodyPr/>
+          <a:lstStyle/>
+          <a:p>
+            <a:endParaRPr lang="en-GB"/>
+          </a:p>
+        </p:txBody>
+      </p:sp>
+      <p:sp>
+        <p:nvSpPr>
+          <p:cNvPr id="3" name="Notes Placeholder 2">
+            <a:extLst>
+              <a:ext uri="{FF2B5EF4-FFF2-40B4-BE49-F238E27FC236}">
+                <a16:creationId xmlns:a16="http://schemas.microsoft.com/office/drawing/2014/main" id="{1E7ABD9B-BA02-33AC-14EB-FD5EBFE021F0}"/>
+              </a:ext>
+            </a:extLst>
+          </p:cNvPr>
+          <p:cNvSpPr>
+            <a:spLocks noGrp="1"/>
+          </p:cNvSpPr>
+          <p:nvPr>
+            <p:ph type="body" idx="1"/>
+          </p:nvPr>
+        </p:nvSpPr>
+        <p:spPr/>
+        <p:txBody>
+          <a:bodyPr/>
+          <a:lstStyle/>
+          <a:p>
+            <a:endParaRPr lang="en-GB" dirty="0"/>
+          </a:p>
+        </p:txBody>
+      </p:sp>
+      <p:sp>
+        <p:nvSpPr>
+          <p:cNvPr id="4" name="Slide Number Placeholder 3">
+            <a:extLst>
+              <a:ext uri="{FF2B5EF4-FFF2-40B4-BE49-F238E27FC236}">
+                <a16:creationId xmlns:a16="http://schemas.microsoft.com/office/drawing/2014/main" id="{0F14A480-35AE-8A19-FF46-D51D06D76728}"/>
+              </a:ext>
+            </a:extLst>
+          </p:cNvPr>
+          <p:cNvSpPr>
+            <a:spLocks noGrp="1"/>
+          </p:cNvSpPr>
+          <p:nvPr>
+            <p:ph type="sldNum" sz="quarter" idx="5"/>
+          </p:nvPr>
+        </p:nvSpPr>
+        <p:spPr/>
+        <p:txBody>
+          <a:bodyPr/>
+          <a:lstStyle/>
+          <a:p>
+            <a:fld id="{7B1068C9-7DA1-4EF7-9D68-F089B7AF17C6}" type="slidenum">
+              <a:rPr lang="en-GB" smtClean="0"/>
+              <a:t>8</a:t>
+            </a:fld>
+            <a:endParaRPr lang="en-GB"/>
+          </a:p>
+        </p:txBody>
+      </p:sp>
+    </p:spTree>
+    <p:extLst>
+      <p:ext uri="{BB962C8B-B14F-4D97-AF65-F5344CB8AC3E}">
+        <p14:creationId xmlns:p14="http://schemas.microsoft.com/office/powerpoint/2010/main" val="3083153914"/>
+      </p:ext>
+    </p:extLst>
+  </p:cSld>
+  <p:clrMapOvr>
+    <a:masterClrMapping/>
+  </p:clrMapOvr>
+</p:notes>
+</file>
+
+<file path=ppt/notesSlides/notesSlide8.xml><?xml version="1.0" encoding="utf-8"?>
+<p:notes xmlns:a="http://schemas.openxmlformats.org/drawingml/2006/main" xmlns:r="http://schemas.openxmlformats.org/officeDocument/2006/relationships" xmlns:p="http://schemas.openxmlformats.org/presentationml/2006/main">
+  <p:cSld>
+    <p:spTree>
+      <p:nvGrpSpPr>
+        <p:cNvPr id="1" name="">
+          <a:extLst>
+            <a:ext uri="{FF2B5EF4-FFF2-40B4-BE49-F238E27FC236}">
+              <a16:creationId xmlns:a16="http://schemas.microsoft.com/office/drawing/2014/main" id="{1A1992A5-6EFD-FD1C-FE73-1EA5C397B6A5}"/>
+            </a:ext>
+          </a:extLst>
+        </p:cNvPr>
+        <p:cNvGrpSpPr/>
+        <p:nvPr/>
+      </p:nvGrpSpPr>
+      <p:grpSpPr>
+        <a:xfrm>
+          <a:off x="0" y="0"/>
+          <a:ext cx="0" cy="0"/>
+          <a:chOff x="0" y="0"/>
+          <a:chExt cx="0" cy="0"/>
+        </a:xfrm>
+      </p:grpSpPr>
+      <p:sp>
+        <p:nvSpPr>
+          <p:cNvPr id="2" name="Slide Image Placeholder 1">
+            <a:extLst>
+              <a:ext uri="{FF2B5EF4-FFF2-40B4-BE49-F238E27FC236}">
+                <a16:creationId xmlns:a16="http://schemas.microsoft.com/office/drawing/2014/main" id="{C4CA22B5-6C44-0462-63B0-BC18167EC22B}"/>
+              </a:ext>
+            </a:extLst>
+          </p:cNvPr>
+          <p:cNvSpPr>
+            <a:spLocks noGrp="1" noRot="1" noChangeAspect="1"/>
+          </p:cNvSpPr>
+          <p:nvPr>
+            <p:ph type="sldImg"/>
+          </p:nvPr>
+        </p:nvSpPr>
+        <p:spPr/>
+        <p:txBody>
+          <a:bodyPr/>
+          <a:lstStyle/>
+          <a:p>
+            <a:endParaRPr lang="en-GB"/>
+          </a:p>
+        </p:txBody>
+      </p:sp>
+      <p:sp>
+        <p:nvSpPr>
+          <p:cNvPr id="3" name="Notes Placeholder 2">
+            <a:extLst>
+              <a:ext uri="{FF2B5EF4-FFF2-40B4-BE49-F238E27FC236}">
+                <a16:creationId xmlns:a16="http://schemas.microsoft.com/office/drawing/2014/main" id="{45A8BECA-F44A-16F9-B446-440203C71A0E}"/>
+              </a:ext>
+            </a:extLst>
+          </p:cNvPr>
+          <p:cNvSpPr>
+            <a:spLocks noGrp="1"/>
+          </p:cNvSpPr>
+          <p:nvPr>
+            <p:ph type="body" idx="1"/>
+          </p:nvPr>
+        </p:nvSpPr>
+        <p:spPr/>
+        <p:txBody>
+          <a:bodyPr/>
+          <a:lstStyle/>
+          <a:p>
+            <a:endParaRPr lang="en-GB" dirty="0"/>
+          </a:p>
+        </p:txBody>
+      </p:sp>
+      <p:sp>
+        <p:nvSpPr>
+          <p:cNvPr id="4" name="Slide Number Placeholder 3">
+            <a:extLst>
+              <a:ext uri="{FF2B5EF4-FFF2-40B4-BE49-F238E27FC236}">
+                <a16:creationId xmlns:a16="http://schemas.microsoft.com/office/drawing/2014/main" id="{594145B6-BC14-9C49-238E-51FE88EFEB71}"/>
+              </a:ext>
+            </a:extLst>
+          </p:cNvPr>
+          <p:cNvSpPr>
+            <a:spLocks noGrp="1"/>
+          </p:cNvSpPr>
+          <p:nvPr>
+            <p:ph type="sldNum" sz="quarter" idx="5"/>
+          </p:nvPr>
+        </p:nvSpPr>
+        <p:spPr/>
+        <p:txBody>
+          <a:bodyPr/>
+          <a:lstStyle/>
+          <a:p>
+            <a:fld id="{7B1068C9-7DA1-4EF7-9D68-F089B7AF17C6}" type="slidenum">
+              <a:rPr lang="en-GB" smtClean="0"/>
+              <a:t>9</a:t>
+            </a:fld>
+            <a:endParaRPr lang="en-GB"/>
+          </a:p>
+        </p:txBody>
+      </p:sp>
+    </p:spTree>
+    <p:extLst>
+      <p:ext uri="{BB962C8B-B14F-4D97-AF65-F5344CB8AC3E}">
+        <p14:creationId xmlns:p14="http://schemas.microsoft.com/office/powerpoint/2010/main" val="2769927794"/>
+      </p:ext>
+    </p:extLst>
+  </p:cSld>
+  <p:clrMapOvr>
+    <a:masterClrMapping/>
+  </p:clrMapOvr>
+</p:notes>
+</file>
+
+<file path=ppt/notesSlides/notesSlide9.xml><?xml version="1.0" encoding="utf-8"?>
+<p:notes xmlns:a="http://schemas.openxmlformats.org/drawingml/2006/main" xmlns:r="http://schemas.openxmlformats.org/officeDocument/2006/relationships" xmlns:p="http://schemas.openxmlformats.org/presentationml/2006/main">
+  <p:cSld>
+    <p:spTree>
+      <p:nvGrpSpPr>
+        <p:cNvPr id="1" name="">
+          <a:extLst>
+            <a:ext uri="{FF2B5EF4-FFF2-40B4-BE49-F238E27FC236}">
+              <a16:creationId xmlns:a16="http://schemas.microsoft.com/office/drawing/2014/main" id="{EB6376A4-59DF-0324-634B-7E4945661E45}"/>
+            </a:ext>
+          </a:extLst>
+        </p:cNvPr>
+        <p:cNvGrpSpPr/>
+        <p:nvPr/>
+      </p:nvGrpSpPr>
+      <p:grpSpPr>
+        <a:xfrm>
+          <a:off x="0" y="0"/>
+          <a:ext cx="0" cy="0"/>
+          <a:chOff x="0" y="0"/>
+          <a:chExt cx="0" cy="0"/>
+        </a:xfrm>
+      </p:grpSpPr>
+      <p:sp>
+        <p:nvSpPr>
+          <p:cNvPr id="2" name="Slide Image Placeholder 1">
+            <a:extLst>
+              <a:ext uri="{FF2B5EF4-FFF2-40B4-BE49-F238E27FC236}">
+                <a16:creationId xmlns:a16="http://schemas.microsoft.com/office/drawing/2014/main" id="{D6B5E2CF-BB01-77BA-CCF3-DAF5BE58D9B6}"/>
+              </a:ext>
+            </a:extLst>
+          </p:cNvPr>
+          <p:cNvSpPr>
+            <a:spLocks noGrp="1" noRot="1" noChangeAspect="1"/>
+          </p:cNvSpPr>
+          <p:nvPr>
+            <p:ph type="sldImg"/>
+          </p:nvPr>
+        </p:nvSpPr>
+        <p:spPr/>
+        <p:txBody>
+          <a:bodyPr/>
+          <a:lstStyle/>
+          <a:p>
+            <a:endParaRPr lang="en-GB"/>
+          </a:p>
+        </p:txBody>
+      </p:sp>
+      <p:sp>
+        <p:nvSpPr>
+          <p:cNvPr id="3" name="Notes Placeholder 2">
+            <a:extLst>
+              <a:ext uri="{FF2B5EF4-FFF2-40B4-BE49-F238E27FC236}">
+                <a16:creationId xmlns:a16="http://schemas.microsoft.com/office/drawing/2014/main" id="{0820F8CF-B6B6-85BA-71F4-2CC14A3B5986}"/>
+              </a:ext>
+            </a:extLst>
+          </p:cNvPr>
+          <p:cNvSpPr>
+            <a:spLocks noGrp="1"/>
+          </p:cNvSpPr>
+          <p:nvPr>
+            <p:ph type="body" idx="1"/>
+          </p:nvPr>
+        </p:nvSpPr>
+        <p:spPr/>
+        <p:txBody>
+          <a:bodyPr/>
+          <a:lstStyle/>
+          <a:p>
+            <a:endParaRPr lang="en-GB" dirty="0"/>
+          </a:p>
+        </p:txBody>
+      </p:sp>
+      <p:sp>
+        <p:nvSpPr>
+          <p:cNvPr id="4" name="Slide Number Placeholder 3">
+            <a:extLst>
+              <a:ext uri="{FF2B5EF4-FFF2-40B4-BE49-F238E27FC236}">
+                <a16:creationId xmlns:a16="http://schemas.microsoft.com/office/drawing/2014/main" id="{20B438C1-F1E4-03FC-23A9-EE0452270059}"/>
+              </a:ext>
+            </a:extLst>
+          </p:cNvPr>
+          <p:cNvSpPr>
+            <a:spLocks noGrp="1"/>
+          </p:cNvSpPr>
+          <p:nvPr>
+            <p:ph type="sldNum" sz="quarter" idx="5"/>
+          </p:nvPr>
+        </p:nvSpPr>
+        <p:spPr/>
+        <p:txBody>
+          <a:bodyPr/>
+          <a:lstStyle/>
+          <a:p>
+            <a:fld id="{7B1068C9-7DA1-4EF7-9D68-F089B7AF17C6}" type="slidenum">
+              <a:rPr lang="en-GB" smtClean="0"/>
+              <a:t>10</a:t>
+            </a:fld>
+            <a:endParaRPr lang="en-GB"/>
+          </a:p>
+        </p:txBody>
+      </p:sp>
+    </p:spTree>
+    <p:extLst>
+      <p:ext uri="{BB962C8B-B14F-4D97-AF65-F5344CB8AC3E}">
+        <p14:creationId xmlns:p14="http://schemas.microsoft.com/office/powerpoint/2010/main" val="946442685"/>
       </p:ext>
     </p:extLst>
   </p:cSld>
@@ -1296,7 +2577,7 @@
           <a:p>
             <a:fld id="{856F4BE6-7DA3-4EEC-8751-6B8C5C416A26}" type="datetimeFigureOut">
               <a:rPr lang="en-GB" smtClean="0"/>
-              <a:t>12/01/2026</a:t>
+              <a:t>13/01/2026</a:t>
             </a:fld>
             <a:endParaRPr lang="en-GB"/>
           </a:p>
@@ -1466,7 +2747,7 @@
           <a:p>
             <a:fld id="{856F4BE6-7DA3-4EEC-8751-6B8C5C416A26}" type="datetimeFigureOut">
               <a:rPr lang="en-GB" smtClean="0"/>
-              <a:t>12/01/2026</a:t>
+              <a:t>13/01/2026</a:t>
             </a:fld>
             <a:endParaRPr lang="en-GB"/>
           </a:p>
@@ -1646,7 +2927,7 @@
           <a:p>
             <a:fld id="{856F4BE6-7DA3-4EEC-8751-6B8C5C416A26}" type="datetimeFigureOut">
               <a:rPr lang="en-GB" smtClean="0"/>
-              <a:t>12/01/2026</a:t>
+              <a:t>13/01/2026</a:t>
             </a:fld>
             <a:endParaRPr lang="en-GB"/>
           </a:p>
@@ -1816,7 +3097,7 @@
           <a:p>
             <a:fld id="{856F4BE6-7DA3-4EEC-8751-6B8C5C416A26}" type="datetimeFigureOut">
               <a:rPr lang="en-GB" smtClean="0"/>
-              <a:t>12/01/2026</a:t>
+              <a:t>13/01/2026</a:t>
             </a:fld>
             <a:endParaRPr lang="en-GB"/>
           </a:p>
@@ -2084,7 +3365,7 @@
           <a:p>
             <a:fld id="{856F4BE6-7DA3-4EEC-8751-6B8C5C416A26}" type="datetimeFigureOut">
               <a:rPr lang="en-GB" smtClean="0"/>
-              <a:t>12/01/2026</a:t>
+              <a:t>13/01/2026</a:t>
             </a:fld>
             <a:endParaRPr lang="en-GB"/>
           </a:p>
@@ -2316,7 +3597,7 @@
           <a:p>
             <a:fld id="{856F4BE6-7DA3-4EEC-8751-6B8C5C416A26}" type="datetimeFigureOut">
               <a:rPr lang="en-GB" smtClean="0"/>
-              <a:t>12/01/2026</a:t>
+              <a:t>13/01/2026</a:t>
             </a:fld>
             <a:endParaRPr lang="en-GB"/>
           </a:p>
@@ -2675,7 +3956,7 @@
           <a:p>
             <a:fld id="{856F4BE6-7DA3-4EEC-8751-6B8C5C416A26}" type="datetimeFigureOut">
               <a:rPr lang="en-GB" smtClean="0"/>
-              <a:t>12/01/2026</a:t>
+              <a:t>13/01/2026</a:t>
             </a:fld>
             <a:endParaRPr lang="en-GB"/>
           </a:p>
@@ -2816,7 +4097,7 @@
           <a:p>
             <a:fld id="{856F4BE6-7DA3-4EEC-8751-6B8C5C416A26}" type="datetimeFigureOut">
               <a:rPr lang="en-GB" smtClean="0"/>
-              <a:t>12/01/2026</a:t>
+              <a:t>13/01/2026</a:t>
             </a:fld>
             <a:endParaRPr lang="en-GB"/>
           </a:p>
@@ -2911,7 +4192,7 @@
           <a:p>
             <a:fld id="{856F4BE6-7DA3-4EEC-8751-6B8C5C416A26}" type="datetimeFigureOut">
               <a:rPr lang="en-GB" smtClean="0"/>
-              <a:t>12/01/2026</a:t>
+              <a:t>13/01/2026</a:t>
             </a:fld>
             <a:endParaRPr lang="en-GB"/>
           </a:p>
@@ -3275,7 +4556,7 @@
           <a:p>
             <a:fld id="{856F4BE6-7DA3-4EEC-8751-6B8C5C416A26}" type="datetimeFigureOut">
               <a:rPr lang="en-GB" smtClean="0"/>
-              <a:t>12/01/2026</a:t>
+              <a:t>13/01/2026</a:t>
             </a:fld>
             <a:endParaRPr lang="en-GB"/>
           </a:p>
@@ -3639,7 +4920,7 @@
           <a:p>
             <a:fld id="{856F4BE6-7DA3-4EEC-8751-6B8C5C416A26}" type="datetimeFigureOut">
               <a:rPr lang="en-GB" smtClean="0"/>
-              <a:t>12/01/2026</a:t>
+              <a:t>13/01/2026</a:t>
             </a:fld>
             <a:endParaRPr lang="en-GB"/>
           </a:p>
@@ -3881,7 +5162,7 @@
           <a:p>
             <a:fld id="{856F4BE6-7DA3-4EEC-8751-6B8C5C416A26}" type="datetimeFigureOut">
               <a:rPr lang="en-GB" smtClean="0"/>
-              <a:t>12/01/2026</a:t>
+              <a:t>13/01/2026</a:t>
             </a:fld>
             <a:endParaRPr lang="en-GB"/>
           </a:p>
@@ -4404,6 +5685,3136 @@
 </p:sld>
 </file>
 
+<file path=ppt/slides/slide10.xml><?xml version="1.0" encoding="utf-8"?>
+<p:sld xmlns:a="http://schemas.openxmlformats.org/drawingml/2006/main" xmlns:r="http://schemas.openxmlformats.org/officeDocument/2006/relationships" xmlns:p="http://schemas.openxmlformats.org/presentationml/2006/main">
+  <p:cSld>
+    <p:spTree>
+      <p:nvGrpSpPr>
+        <p:cNvPr id="1" name="">
+          <a:extLst>
+            <a:ext uri="{FF2B5EF4-FFF2-40B4-BE49-F238E27FC236}">
+              <a16:creationId xmlns:a16="http://schemas.microsoft.com/office/drawing/2014/main" id="{FBDC0F9D-ED98-CFE4-CFFD-E409C692F39D}"/>
+            </a:ext>
+          </a:extLst>
+        </p:cNvPr>
+        <p:cNvGrpSpPr/>
+        <p:nvPr/>
+      </p:nvGrpSpPr>
+      <p:grpSpPr>
+        <a:xfrm>
+          <a:off x="0" y="0"/>
+          <a:ext cx="0" cy="0"/>
+          <a:chOff x="0" y="0"/>
+          <a:chExt cx="0" cy="0"/>
+        </a:xfrm>
+      </p:grpSpPr>
+      <p:sp>
+        <p:nvSpPr>
+          <p:cNvPr id="2" name="Title 1">
+            <a:extLst>
+              <a:ext uri="{FF2B5EF4-FFF2-40B4-BE49-F238E27FC236}">
+                <a16:creationId xmlns:a16="http://schemas.microsoft.com/office/drawing/2014/main" id="{346C7958-F7BB-ABAA-0FB0-0A7BFBE6D5CC}"/>
+              </a:ext>
+            </a:extLst>
+          </p:cNvPr>
+          <p:cNvSpPr>
+            <a:spLocks noGrp="1"/>
+          </p:cNvSpPr>
+          <p:nvPr>
+            <p:ph type="title"/>
+          </p:nvPr>
+        </p:nvSpPr>
+        <p:spPr>
+          <a:xfrm>
+            <a:off x="2231136" y="243332"/>
+            <a:ext cx="7729728" cy="680121"/>
+          </a:xfrm>
+        </p:spPr>
+        <p:txBody>
+          <a:bodyPr>
+            <a:normAutofit fontScale="90000"/>
+          </a:bodyPr>
+          <a:lstStyle/>
+          <a:p>
+            <a:r>
+              <a:rPr lang="en-GB" dirty="0"/>
+              <a:t>SLIME (SoUND CreatioN)</a:t>
+            </a:r>
+          </a:p>
+        </p:txBody>
+      </p:sp>
+      <p:sp>
+        <p:nvSpPr>
+          <p:cNvPr id="9" name="Rectangle 8">
+            <a:extLst>
+              <a:ext uri="{FF2B5EF4-FFF2-40B4-BE49-F238E27FC236}">
+                <a16:creationId xmlns:a16="http://schemas.microsoft.com/office/drawing/2014/main" id="{0E334F31-32E0-576F-8B61-343C09363637}"/>
+              </a:ext>
+            </a:extLst>
+          </p:cNvPr>
+          <p:cNvSpPr/>
+          <p:nvPr/>
+        </p:nvSpPr>
+        <p:spPr>
+          <a:xfrm>
+            <a:off x="285534" y="1204111"/>
+            <a:ext cx="3891203" cy="5160475"/>
+          </a:xfrm>
+          <a:prstGeom prst="rect">
+            <a:avLst/>
+          </a:prstGeom>
+          <a:solidFill>
+            <a:schemeClr val="accent2">
+              <a:lumMod val="40000"/>
+              <a:lumOff val="60000"/>
+            </a:schemeClr>
+          </a:solidFill>
+        </p:spPr>
+        <p:style>
+          <a:lnRef idx="2">
+            <a:schemeClr val="accent1">
+              <a:shade val="15000"/>
+            </a:schemeClr>
+          </a:lnRef>
+          <a:fillRef idx="1">
+            <a:schemeClr val="accent1"/>
+          </a:fillRef>
+          <a:effectRef idx="0">
+            <a:schemeClr val="accent1"/>
+          </a:effectRef>
+          <a:fontRef idx="minor">
+            <a:schemeClr val="lt1"/>
+          </a:fontRef>
+        </p:style>
+        <p:txBody>
+          <a:bodyPr rtlCol="0" anchor="t" anchorCtr="0"/>
+          <a:lstStyle/>
+          <a:p>
+            <a:pPr algn="ctr"/>
+            <a:r>
+              <a:rPr lang="en-GB" dirty="0">
+                <a:solidFill>
+                  <a:schemeClr val="tx1"/>
+                </a:solidFill>
+              </a:rPr>
+              <a:t>WATER:</a:t>
+            </a:r>
+          </a:p>
+          <a:p>
+            <a:pPr marL="285750" indent="-285750">
+              <a:buFontTx/>
+              <a:buChar char="-"/>
+            </a:pPr>
+            <a:r>
+              <a:rPr lang="en-GB" dirty="0">
+                <a:solidFill>
+                  <a:schemeClr val="tx1">
+                    <a:lumMod val="75000"/>
+                    <a:lumOff val="25000"/>
+                  </a:schemeClr>
+                </a:solidFill>
+              </a:rPr>
+              <a:t>Trimmed down to ~20s</a:t>
+            </a:r>
+          </a:p>
+          <a:p>
+            <a:pPr marL="285750" indent="-285750">
+              <a:buFontTx/>
+              <a:buChar char="-"/>
+            </a:pPr>
+            <a:r>
+              <a:rPr lang="en-GB" dirty="0">
+                <a:solidFill>
+                  <a:schemeClr val="tx1">
+                    <a:lumMod val="75000"/>
+                    <a:lumOff val="25000"/>
+                  </a:schemeClr>
+                </a:solidFill>
+              </a:rPr>
+              <a:t>Applied Filter Curve EQ to make water sound “slimier”</a:t>
+            </a:r>
+          </a:p>
+          <a:p>
+            <a:pPr marL="285750" indent="-285750">
+              <a:buFontTx/>
+              <a:buChar char="-"/>
+            </a:pPr>
+            <a:endParaRPr lang="en-GB" dirty="0">
+              <a:solidFill>
+                <a:schemeClr val="tx1">
+                  <a:lumMod val="75000"/>
+                  <a:lumOff val="25000"/>
+                </a:schemeClr>
+              </a:solidFill>
+            </a:endParaRPr>
+          </a:p>
+          <a:p>
+            <a:pPr marL="285750" indent="-285750">
+              <a:buFontTx/>
+              <a:buChar char="-"/>
+            </a:pPr>
+            <a:endParaRPr lang="en-GB" dirty="0">
+              <a:solidFill>
+                <a:schemeClr val="tx1">
+                  <a:lumMod val="75000"/>
+                  <a:lumOff val="25000"/>
+                </a:schemeClr>
+              </a:solidFill>
+            </a:endParaRPr>
+          </a:p>
+          <a:p>
+            <a:pPr marL="285750" indent="-285750">
+              <a:buFontTx/>
+              <a:buChar char="-"/>
+            </a:pPr>
+            <a:endParaRPr lang="en-GB" dirty="0">
+              <a:solidFill>
+                <a:schemeClr val="tx1">
+                  <a:lumMod val="75000"/>
+                  <a:lumOff val="25000"/>
+                </a:schemeClr>
+              </a:solidFill>
+            </a:endParaRPr>
+          </a:p>
+          <a:p>
+            <a:pPr marL="285750" indent="-285750">
+              <a:buFontTx/>
+              <a:buChar char="-"/>
+            </a:pPr>
+            <a:endParaRPr lang="en-GB" dirty="0">
+              <a:solidFill>
+                <a:schemeClr val="tx1">
+                  <a:lumMod val="75000"/>
+                  <a:lumOff val="25000"/>
+                </a:schemeClr>
+              </a:solidFill>
+            </a:endParaRPr>
+          </a:p>
+          <a:p>
+            <a:pPr marL="285750" indent="-285750">
+              <a:buFontTx/>
+              <a:buChar char="-"/>
+            </a:pPr>
+            <a:endParaRPr lang="en-GB" dirty="0">
+              <a:solidFill>
+                <a:schemeClr val="tx1">
+                  <a:lumMod val="75000"/>
+                  <a:lumOff val="25000"/>
+                </a:schemeClr>
+              </a:solidFill>
+            </a:endParaRPr>
+          </a:p>
+          <a:p>
+            <a:pPr marL="285750" indent="-285750">
+              <a:buFontTx/>
+              <a:buChar char="-"/>
+            </a:pPr>
+            <a:endParaRPr lang="en-GB" dirty="0">
+              <a:solidFill>
+                <a:schemeClr val="tx1">
+                  <a:lumMod val="75000"/>
+                  <a:lumOff val="25000"/>
+                </a:schemeClr>
+              </a:solidFill>
+            </a:endParaRPr>
+          </a:p>
+          <a:p>
+            <a:pPr marL="285750" indent="-285750">
+              <a:buFontTx/>
+              <a:buChar char="-"/>
+            </a:pPr>
+            <a:r>
+              <a:rPr lang="en-GB" dirty="0">
+                <a:solidFill>
+                  <a:schemeClr val="tx1">
+                    <a:lumMod val="75000"/>
+                    <a:lumOff val="25000"/>
+                  </a:schemeClr>
+                </a:solidFill>
+              </a:rPr>
+              <a:t>Amplified by 2 dB</a:t>
+            </a:r>
+          </a:p>
+          <a:p>
+            <a:pPr marL="285750" indent="-285750">
+              <a:buFontTx/>
+              <a:buChar char="-"/>
+            </a:pPr>
+            <a:r>
+              <a:rPr lang="en-GB" dirty="0">
+                <a:solidFill>
+                  <a:schemeClr val="tx1">
+                    <a:lumMod val="75000"/>
+                    <a:lumOff val="25000"/>
+                  </a:schemeClr>
+                </a:solidFill>
+              </a:rPr>
+              <a:t>Positioned in a way so that on average the water ripples peak after the flannel peaks</a:t>
+            </a:r>
+          </a:p>
+          <a:p>
+            <a:pPr marL="285750" indent="-285750">
+              <a:buFontTx/>
+              <a:buChar char="-"/>
+            </a:pPr>
+            <a:endParaRPr lang="en-GB" dirty="0">
+              <a:solidFill>
+                <a:schemeClr val="tx1">
+                  <a:lumMod val="75000"/>
+                  <a:lumOff val="25000"/>
+                </a:schemeClr>
+              </a:solidFill>
+            </a:endParaRPr>
+          </a:p>
+          <a:p>
+            <a:pPr marL="285750" indent="-285750">
+              <a:buFontTx/>
+              <a:buChar char="-"/>
+            </a:pPr>
+            <a:endParaRPr lang="en-GB" dirty="0">
+              <a:solidFill>
+                <a:schemeClr val="tx1">
+                  <a:lumMod val="75000"/>
+                  <a:lumOff val="25000"/>
+                </a:schemeClr>
+              </a:solidFill>
+            </a:endParaRPr>
+          </a:p>
+          <a:p>
+            <a:endParaRPr lang="en-GB" dirty="0">
+              <a:solidFill>
+                <a:schemeClr val="tx1"/>
+              </a:solidFill>
+            </a:endParaRPr>
+          </a:p>
+        </p:txBody>
+      </p:sp>
+      <p:pic>
+        <p:nvPicPr>
+          <p:cNvPr id="3" name="Picture 2">
+            <a:extLst>
+              <a:ext uri="{FF2B5EF4-FFF2-40B4-BE49-F238E27FC236}">
+                <a16:creationId xmlns:a16="http://schemas.microsoft.com/office/drawing/2014/main" id="{50C05404-C95B-E993-32B0-660000F02E30}"/>
+              </a:ext>
+            </a:extLst>
+          </p:cNvPr>
+          <p:cNvPicPr>
+            <a:picLocks noChangeAspect="1"/>
+          </p:cNvPicPr>
+          <p:nvPr/>
+        </p:nvPicPr>
+        <p:blipFill>
+          <a:blip r:embed="rId3"/>
+          <a:srcRect l="-510" t="11466" r="510" b="15625"/>
+          <a:stretch>
+            <a:fillRect/>
+          </a:stretch>
+        </p:blipFill>
+        <p:spPr>
+          <a:xfrm>
+            <a:off x="285534" y="2417276"/>
+            <a:ext cx="3773557" cy="1475714"/>
+          </a:xfrm>
+          <a:prstGeom prst="rect">
+            <a:avLst/>
+          </a:prstGeom>
+        </p:spPr>
+      </p:pic>
+      <p:sp>
+        <p:nvSpPr>
+          <p:cNvPr id="4" name="Rectangle 3">
+            <a:extLst>
+              <a:ext uri="{FF2B5EF4-FFF2-40B4-BE49-F238E27FC236}">
+                <a16:creationId xmlns:a16="http://schemas.microsoft.com/office/drawing/2014/main" id="{AFBA9846-DE4C-6953-B2D7-BBBE2CEAD3E3}"/>
+              </a:ext>
+            </a:extLst>
+          </p:cNvPr>
+          <p:cNvSpPr/>
+          <p:nvPr/>
+        </p:nvSpPr>
+        <p:spPr>
+          <a:xfrm>
+            <a:off x="7916097" y="1195058"/>
+            <a:ext cx="3891203" cy="5160475"/>
+          </a:xfrm>
+          <a:prstGeom prst="rect">
+            <a:avLst/>
+          </a:prstGeom>
+          <a:solidFill>
+            <a:schemeClr val="accent2">
+              <a:lumMod val="40000"/>
+              <a:lumOff val="60000"/>
+            </a:schemeClr>
+          </a:solidFill>
+        </p:spPr>
+        <p:style>
+          <a:lnRef idx="2">
+            <a:schemeClr val="accent1">
+              <a:shade val="15000"/>
+            </a:schemeClr>
+          </a:lnRef>
+          <a:fillRef idx="1">
+            <a:schemeClr val="accent1"/>
+          </a:fillRef>
+          <a:effectRef idx="0">
+            <a:schemeClr val="accent1"/>
+          </a:effectRef>
+          <a:fontRef idx="minor">
+            <a:schemeClr val="lt1"/>
+          </a:fontRef>
+        </p:style>
+        <p:txBody>
+          <a:bodyPr rtlCol="0" anchor="t" anchorCtr="0"/>
+          <a:lstStyle/>
+          <a:p>
+            <a:pPr algn="ctr"/>
+            <a:r>
+              <a:rPr lang="en-GB" dirty="0">
+                <a:solidFill>
+                  <a:schemeClr val="tx1"/>
+                </a:solidFill>
+              </a:rPr>
+              <a:t>LAUGH:</a:t>
+            </a:r>
+          </a:p>
+          <a:p>
+            <a:pPr marL="285750" indent="-285750">
+              <a:buFontTx/>
+              <a:buChar char="-"/>
+            </a:pPr>
+            <a:r>
+              <a:rPr lang="en-GB" dirty="0">
+                <a:solidFill>
+                  <a:schemeClr val="tx1">
+                    <a:lumMod val="75000"/>
+                    <a:lumOff val="25000"/>
+                  </a:schemeClr>
+                </a:solidFill>
+              </a:rPr>
+              <a:t>Slowed tempo down by 30%</a:t>
+            </a:r>
+          </a:p>
+          <a:p>
+            <a:pPr marL="285750" indent="-285750">
+              <a:buFontTx/>
+              <a:buChar char="-"/>
+            </a:pPr>
+            <a:r>
+              <a:rPr lang="en-GB" dirty="0">
+                <a:solidFill>
+                  <a:schemeClr val="tx1">
+                    <a:lumMod val="75000"/>
+                    <a:lumOff val="25000"/>
+                  </a:schemeClr>
+                </a:solidFill>
+              </a:rPr>
+              <a:t>Filter Curve EQ to boost middling pitches</a:t>
+            </a:r>
+          </a:p>
+          <a:p>
+            <a:pPr marL="285750" indent="-285750">
+              <a:buFontTx/>
+              <a:buChar char="-"/>
+            </a:pPr>
+            <a:endParaRPr lang="en-GB" dirty="0">
+              <a:solidFill>
+                <a:schemeClr val="tx1">
+                  <a:lumMod val="75000"/>
+                  <a:lumOff val="25000"/>
+                </a:schemeClr>
+              </a:solidFill>
+            </a:endParaRPr>
+          </a:p>
+          <a:p>
+            <a:pPr marL="285750" indent="-285750">
+              <a:buFontTx/>
+              <a:buChar char="-"/>
+            </a:pPr>
+            <a:endParaRPr lang="en-GB" dirty="0">
+              <a:solidFill>
+                <a:schemeClr val="tx1">
+                  <a:lumMod val="75000"/>
+                  <a:lumOff val="25000"/>
+                </a:schemeClr>
+              </a:solidFill>
+            </a:endParaRPr>
+          </a:p>
+          <a:p>
+            <a:pPr marL="285750" indent="-285750">
+              <a:buFontTx/>
+              <a:buChar char="-"/>
+            </a:pPr>
+            <a:endParaRPr lang="en-GB" dirty="0">
+              <a:solidFill>
+                <a:schemeClr val="tx1">
+                  <a:lumMod val="75000"/>
+                  <a:lumOff val="25000"/>
+                </a:schemeClr>
+              </a:solidFill>
+            </a:endParaRPr>
+          </a:p>
+          <a:p>
+            <a:pPr marL="285750" indent="-285750">
+              <a:buFontTx/>
+              <a:buChar char="-"/>
+            </a:pPr>
+            <a:endParaRPr lang="en-GB" dirty="0">
+              <a:solidFill>
+                <a:schemeClr val="tx1">
+                  <a:lumMod val="75000"/>
+                  <a:lumOff val="25000"/>
+                </a:schemeClr>
+              </a:solidFill>
+            </a:endParaRPr>
+          </a:p>
+          <a:p>
+            <a:pPr marL="285750" indent="-285750">
+              <a:buFontTx/>
+              <a:buChar char="-"/>
+            </a:pPr>
+            <a:endParaRPr lang="en-GB" dirty="0">
+              <a:solidFill>
+                <a:schemeClr val="tx1">
+                  <a:lumMod val="75000"/>
+                  <a:lumOff val="25000"/>
+                </a:schemeClr>
+              </a:solidFill>
+            </a:endParaRPr>
+          </a:p>
+          <a:p>
+            <a:pPr marL="285750" indent="-285750">
+              <a:buFontTx/>
+              <a:buChar char="-"/>
+            </a:pPr>
+            <a:endParaRPr lang="en-GB" dirty="0">
+              <a:solidFill>
+                <a:schemeClr val="tx1">
+                  <a:lumMod val="75000"/>
+                  <a:lumOff val="25000"/>
+                </a:schemeClr>
+              </a:solidFill>
+            </a:endParaRPr>
+          </a:p>
+          <a:p>
+            <a:pPr marL="285750" indent="-285750">
+              <a:buFontTx/>
+              <a:buChar char="-"/>
+            </a:pPr>
+            <a:endParaRPr lang="en-GB" dirty="0">
+              <a:solidFill>
+                <a:schemeClr val="tx1">
+                  <a:lumMod val="75000"/>
+                  <a:lumOff val="25000"/>
+                </a:schemeClr>
+              </a:solidFill>
+            </a:endParaRPr>
+          </a:p>
+          <a:p>
+            <a:pPr marL="285750" indent="-285750">
+              <a:buFontTx/>
+              <a:buChar char="-"/>
+            </a:pPr>
+            <a:r>
+              <a:rPr lang="en-GB" dirty="0">
+                <a:solidFill>
+                  <a:schemeClr val="tx1">
+                    <a:lumMod val="75000"/>
+                    <a:lumOff val="25000"/>
+                  </a:schemeClr>
+                </a:solidFill>
+              </a:rPr>
+              <a:t>Duplicated audio clip, reverse and trimmed to add giggle variation</a:t>
+            </a:r>
+          </a:p>
+          <a:p>
+            <a:pPr marL="285750" indent="-285750">
+              <a:buFontTx/>
+              <a:buChar char="-"/>
+            </a:pPr>
+            <a:r>
+              <a:rPr lang="en-GB" dirty="0">
+                <a:solidFill>
+                  <a:schemeClr val="tx1">
+                    <a:lumMod val="75000"/>
+                    <a:lumOff val="25000"/>
+                  </a:schemeClr>
+                </a:solidFill>
+              </a:rPr>
+              <a:t>Lowered pitch by a semitone</a:t>
+            </a:r>
+          </a:p>
+          <a:p>
+            <a:pPr marL="285750" indent="-285750">
+              <a:buFontTx/>
+              <a:buChar char="-"/>
+            </a:pPr>
+            <a:r>
+              <a:rPr lang="en-GB" dirty="0">
+                <a:solidFill>
+                  <a:schemeClr val="tx1">
+                    <a:lumMod val="75000"/>
+                    <a:lumOff val="25000"/>
+                  </a:schemeClr>
+                </a:solidFill>
+              </a:rPr>
+              <a:t>Inverted and pitched up by ½ a semitone for another laugh</a:t>
+            </a:r>
+          </a:p>
+          <a:p>
+            <a:pPr marL="285750" indent="-285750">
+              <a:buFontTx/>
+              <a:buChar char="-"/>
+            </a:pPr>
+            <a:r>
+              <a:rPr lang="en-GB" dirty="0">
+                <a:solidFill>
+                  <a:schemeClr val="tx1">
+                    <a:lumMod val="75000"/>
+                    <a:lumOff val="25000"/>
+                  </a:schemeClr>
+                </a:solidFill>
+              </a:rPr>
+              <a:t>Enveloped one of he laughs which sounded too harsh</a:t>
+            </a:r>
+          </a:p>
+          <a:p>
+            <a:pPr marL="285750" indent="-285750">
+              <a:buFontTx/>
+              <a:buChar char="-"/>
+            </a:pPr>
+            <a:endParaRPr lang="en-GB" dirty="0">
+              <a:solidFill>
+                <a:schemeClr val="tx1">
+                  <a:lumMod val="75000"/>
+                  <a:lumOff val="25000"/>
+                </a:schemeClr>
+              </a:solidFill>
+            </a:endParaRPr>
+          </a:p>
+          <a:p>
+            <a:pPr marL="285750" indent="-285750">
+              <a:buFontTx/>
+              <a:buChar char="-"/>
+            </a:pPr>
+            <a:endParaRPr lang="en-GB" dirty="0">
+              <a:solidFill>
+                <a:schemeClr val="tx1">
+                  <a:lumMod val="75000"/>
+                  <a:lumOff val="25000"/>
+                </a:schemeClr>
+              </a:solidFill>
+            </a:endParaRPr>
+          </a:p>
+          <a:p>
+            <a:pPr marL="285750" indent="-285750">
+              <a:buFontTx/>
+              <a:buChar char="-"/>
+            </a:pPr>
+            <a:endParaRPr lang="en-GB" dirty="0">
+              <a:solidFill>
+                <a:schemeClr val="tx1">
+                  <a:lumMod val="75000"/>
+                  <a:lumOff val="25000"/>
+                </a:schemeClr>
+              </a:solidFill>
+            </a:endParaRPr>
+          </a:p>
+          <a:p>
+            <a:pPr marL="285750" indent="-285750">
+              <a:buFontTx/>
+              <a:buChar char="-"/>
+            </a:pPr>
+            <a:endParaRPr lang="en-GB" dirty="0">
+              <a:solidFill>
+                <a:schemeClr val="tx1">
+                  <a:lumMod val="75000"/>
+                  <a:lumOff val="25000"/>
+                </a:schemeClr>
+              </a:solidFill>
+            </a:endParaRPr>
+          </a:p>
+          <a:p>
+            <a:pPr marL="285750" indent="-285750">
+              <a:buFontTx/>
+              <a:buChar char="-"/>
+            </a:pPr>
+            <a:endParaRPr lang="en-GB" dirty="0">
+              <a:solidFill>
+                <a:schemeClr val="tx1">
+                  <a:lumMod val="75000"/>
+                  <a:lumOff val="25000"/>
+                </a:schemeClr>
+              </a:solidFill>
+            </a:endParaRPr>
+          </a:p>
+          <a:p>
+            <a:pPr marL="285750" indent="-285750">
+              <a:buFontTx/>
+              <a:buChar char="-"/>
+            </a:pPr>
+            <a:endParaRPr lang="en-GB" dirty="0">
+              <a:solidFill>
+                <a:schemeClr val="tx1">
+                  <a:lumMod val="75000"/>
+                  <a:lumOff val="25000"/>
+                </a:schemeClr>
+              </a:solidFill>
+            </a:endParaRPr>
+          </a:p>
+          <a:p>
+            <a:pPr marL="285750" indent="-285750">
+              <a:buFontTx/>
+              <a:buChar char="-"/>
+            </a:pPr>
+            <a:endParaRPr lang="en-GB" dirty="0">
+              <a:solidFill>
+                <a:schemeClr val="tx1">
+                  <a:lumMod val="75000"/>
+                  <a:lumOff val="25000"/>
+                </a:schemeClr>
+              </a:solidFill>
+            </a:endParaRPr>
+          </a:p>
+          <a:p>
+            <a:endParaRPr lang="en-GB" dirty="0">
+              <a:solidFill>
+                <a:schemeClr val="tx1"/>
+              </a:solidFill>
+            </a:endParaRPr>
+          </a:p>
+        </p:txBody>
+      </p:sp>
+      <p:pic>
+        <p:nvPicPr>
+          <p:cNvPr id="5" name="Picture 4">
+            <a:extLst>
+              <a:ext uri="{FF2B5EF4-FFF2-40B4-BE49-F238E27FC236}">
+                <a16:creationId xmlns:a16="http://schemas.microsoft.com/office/drawing/2014/main" id="{91498FAA-743D-B5E0-5E16-F37EF748E8C3}"/>
+              </a:ext>
+            </a:extLst>
+          </p:cNvPr>
+          <p:cNvPicPr>
+            <a:picLocks noChangeAspect="1"/>
+          </p:cNvPicPr>
+          <p:nvPr/>
+        </p:nvPicPr>
+        <p:blipFill>
+          <a:blip r:embed="rId4"/>
+          <a:srcRect t="12950" b="4870"/>
+          <a:stretch>
+            <a:fillRect/>
+          </a:stretch>
+        </p:blipFill>
+        <p:spPr>
+          <a:xfrm>
+            <a:off x="8039399" y="2390114"/>
+            <a:ext cx="3666732" cy="1626335"/>
+          </a:xfrm>
+          <a:prstGeom prst="rect">
+            <a:avLst/>
+          </a:prstGeom>
+        </p:spPr>
+      </p:pic>
+      <p:pic>
+        <p:nvPicPr>
+          <p:cNvPr id="7" name="Picture 6">
+            <a:extLst>
+              <a:ext uri="{FF2B5EF4-FFF2-40B4-BE49-F238E27FC236}">
+                <a16:creationId xmlns:a16="http://schemas.microsoft.com/office/drawing/2014/main" id="{103F65CC-5239-CB02-AC47-B7D0D8877DC4}"/>
+              </a:ext>
+            </a:extLst>
+          </p:cNvPr>
+          <p:cNvPicPr>
+            <a:picLocks noChangeAspect="1"/>
+          </p:cNvPicPr>
+          <p:nvPr/>
+        </p:nvPicPr>
+        <p:blipFill>
+          <a:blip r:embed="rId5"/>
+          <a:stretch>
+            <a:fillRect/>
+          </a:stretch>
+        </p:blipFill>
+        <p:spPr>
+          <a:xfrm>
+            <a:off x="4360762" y="1920088"/>
+            <a:ext cx="3371309" cy="3371309"/>
+          </a:xfrm>
+          <a:prstGeom prst="rect">
+            <a:avLst/>
+          </a:prstGeom>
+        </p:spPr>
+      </p:pic>
+    </p:spTree>
+    <p:extLst>
+      <p:ext uri="{BB962C8B-B14F-4D97-AF65-F5344CB8AC3E}">
+        <p14:creationId xmlns:p14="http://schemas.microsoft.com/office/powerpoint/2010/main" val="840521472"/>
+      </p:ext>
+    </p:extLst>
+  </p:cSld>
+  <p:clrMapOvr>
+    <a:masterClrMapping/>
+  </p:clrMapOvr>
+</p:sld>
+</file>
+
+<file path=ppt/slides/slide11.xml><?xml version="1.0" encoding="utf-8"?>
+<p:sld xmlns:a="http://schemas.openxmlformats.org/drawingml/2006/main" xmlns:r="http://schemas.openxmlformats.org/officeDocument/2006/relationships" xmlns:p="http://schemas.openxmlformats.org/presentationml/2006/main">
+  <p:cSld>
+    <p:spTree>
+      <p:nvGrpSpPr>
+        <p:cNvPr id="1" name="">
+          <a:extLst>
+            <a:ext uri="{FF2B5EF4-FFF2-40B4-BE49-F238E27FC236}">
+              <a16:creationId xmlns:a16="http://schemas.microsoft.com/office/drawing/2014/main" id="{1B84DAD7-3DDD-FD30-263B-846057909140}"/>
+            </a:ext>
+          </a:extLst>
+        </p:cNvPr>
+        <p:cNvGrpSpPr/>
+        <p:nvPr/>
+      </p:nvGrpSpPr>
+      <p:grpSpPr>
+        <a:xfrm>
+          <a:off x="0" y="0"/>
+          <a:ext cx="0" cy="0"/>
+          <a:chOff x="0" y="0"/>
+          <a:chExt cx="0" cy="0"/>
+        </a:xfrm>
+      </p:grpSpPr>
+      <p:sp>
+        <p:nvSpPr>
+          <p:cNvPr id="2" name="Title 1">
+            <a:extLst>
+              <a:ext uri="{FF2B5EF4-FFF2-40B4-BE49-F238E27FC236}">
+                <a16:creationId xmlns:a16="http://schemas.microsoft.com/office/drawing/2014/main" id="{263531BA-1B24-AD65-3D00-E6B350940144}"/>
+              </a:ext>
+            </a:extLst>
+          </p:cNvPr>
+          <p:cNvSpPr>
+            <a:spLocks noGrp="1"/>
+          </p:cNvSpPr>
+          <p:nvPr>
+            <p:ph type="title"/>
+          </p:nvPr>
+        </p:nvSpPr>
+        <p:spPr>
+          <a:xfrm>
+            <a:off x="2231136" y="162963"/>
+            <a:ext cx="7729728" cy="680121"/>
+          </a:xfrm>
+        </p:spPr>
+        <p:txBody>
+          <a:bodyPr>
+            <a:normAutofit fontScale="90000"/>
+          </a:bodyPr>
+          <a:lstStyle/>
+          <a:p>
+            <a:r>
+              <a:rPr lang="en-GB" dirty="0"/>
+              <a:t>SLIME (IMPLEMENTATION)</a:t>
+            </a:r>
+          </a:p>
+        </p:txBody>
+      </p:sp>
+      <p:pic>
+        <p:nvPicPr>
+          <p:cNvPr id="8" name="Picture 7">
+            <a:extLst>
+              <a:ext uri="{FF2B5EF4-FFF2-40B4-BE49-F238E27FC236}">
+                <a16:creationId xmlns:a16="http://schemas.microsoft.com/office/drawing/2014/main" id="{E28F3E2C-70FC-C549-43C1-006D1E6D590E}"/>
+              </a:ext>
+            </a:extLst>
+          </p:cNvPr>
+          <p:cNvPicPr>
+            <a:picLocks noChangeAspect="1"/>
+          </p:cNvPicPr>
+          <p:nvPr/>
+        </p:nvPicPr>
+        <p:blipFill>
+          <a:blip r:embed="rId3"/>
+          <a:stretch>
+            <a:fillRect/>
+          </a:stretch>
+        </p:blipFill>
+        <p:spPr>
+          <a:xfrm>
+            <a:off x="9267258" y="983192"/>
+            <a:ext cx="2393606" cy="5711845"/>
+          </a:xfrm>
+          <a:prstGeom prst="rect">
+            <a:avLst/>
+          </a:prstGeom>
+        </p:spPr>
+      </p:pic>
+      <p:pic>
+        <p:nvPicPr>
+          <p:cNvPr id="11" name="Picture 10">
+            <a:extLst>
+              <a:ext uri="{FF2B5EF4-FFF2-40B4-BE49-F238E27FC236}">
+                <a16:creationId xmlns:a16="http://schemas.microsoft.com/office/drawing/2014/main" id="{30AF7ABB-2900-FCE2-3985-D4726217222E}"/>
+              </a:ext>
+            </a:extLst>
+          </p:cNvPr>
+          <p:cNvPicPr>
+            <a:picLocks noChangeAspect="1"/>
+          </p:cNvPicPr>
+          <p:nvPr/>
+        </p:nvPicPr>
+        <p:blipFill>
+          <a:blip r:embed="rId4"/>
+          <a:stretch>
+            <a:fillRect/>
+          </a:stretch>
+        </p:blipFill>
+        <p:spPr>
+          <a:xfrm>
+            <a:off x="181070" y="1303697"/>
+            <a:ext cx="4901662" cy="4123853"/>
+          </a:xfrm>
+          <a:prstGeom prst="rect">
+            <a:avLst/>
+          </a:prstGeom>
+        </p:spPr>
+      </p:pic>
+      <p:sp>
+        <p:nvSpPr>
+          <p:cNvPr id="12" name="Rectangle 11">
+            <a:extLst>
+              <a:ext uri="{FF2B5EF4-FFF2-40B4-BE49-F238E27FC236}">
+                <a16:creationId xmlns:a16="http://schemas.microsoft.com/office/drawing/2014/main" id="{0B7AA62F-EBA8-2DBB-0506-FA9F7850784C}"/>
+              </a:ext>
+            </a:extLst>
+          </p:cNvPr>
+          <p:cNvSpPr/>
+          <p:nvPr/>
+        </p:nvSpPr>
+        <p:spPr>
+          <a:xfrm>
+            <a:off x="181070" y="5427550"/>
+            <a:ext cx="4901662" cy="1267487"/>
+          </a:xfrm>
+          <a:prstGeom prst="rect">
+            <a:avLst/>
+          </a:prstGeom>
+          <a:solidFill>
+            <a:srgbClr val="92D050"/>
+          </a:solidFill>
+        </p:spPr>
+        <p:style>
+          <a:lnRef idx="2">
+            <a:schemeClr val="accent1">
+              <a:shade val="15000"/>
+            </a:schemeClr>
+          </a:lnRef>
+          <a:fillRef idx="1">
+            <a:schemeClr val="accent1"/>
+          </a:fillRef>
+          <a:effectRef idx="0">
+            <a:schemeClr val="accent1"/>
+          </a:effectRef>
+          <a:fontRef idx="minor">
+            <a:schemeClr val="lt1"/>
+          </a:fontRef>
+        </p:style>
+        <p:txBody>
+          <a:bodyPr rtlCol="0" anchor="ctr"/>
+          <a:lstStyle/>
+          <a:p>
+            <a:pPr algn="ctr"/>
+            <a:r>
+              <a:rPr lang="en-GB" sz="2000" dirty="0"/>
+              <a:t>Range which the Slime SFX can be heard from</a:t>
+            </a:r>
+          </a:p>
+        </p:txBody>
+      </p:sp>
+      <p:sp>
+        <p:nvSpPr>
+          <p:cNvPr id="13" name="Rectangle 12">
+            <a:extLst>
+              <a:ext uri="{FF2B5EF4-FFF2-40B4-BE49-F238E27FC236}">
+                <a16:creationId xmlns:a16="http://schemas.microsoft.com/office/drawing/2014/main" id="{6BD104AA-E148-1D74-84DA-D84F192940DC}"/>
+              </a:ext>
+            </a:extLst>
+          </p:cNvPr>
+          <p:cNvSpPr/>
+          <p:nvPr/>
+        </p:nvSpPr>
+        <p:spPr>
+          <a:xfrm>
+            <a:off x="5347039" y="1403287"/>
+            <a:ext cx="3655911" cy="2833735"/>
+          </a:xfrm>
+          <a:prstGeom prst="rect">
+            <a:avLst/>
+          </a:prstGeom>
+          <a:solidFill>
+            <a:schemeClr val="accent2">
+              <a:lumMod val="40000"/>
+              <a:lumOff val="60000"/>
+            </a:schemeClr>
+          </a:solidFill>
+        </p:spPr>
+        <p:style>
+          <a:lnRef idx="2">
+            <a:schemeClr val="accent1">
+              <a:shade val="15000"/>
+            </a:schemeClr>
+          </a:lnRef>
+          <a:fillRef idx="1">
+            <a:schemeClr val="accent1"/>
+          </a:fillRef>
+          <a:effectRef idx="0">
+            <a:schemeClr val="accent1"/>
+          </a:effectRef>
+          <a:fontRef idx="minor">
+            <a:schemeClr val="lt1"/>
+          </a:fontRef>
+        </p:style>
+        <p:txBody>
+          <a:bodyPr rtlCol="0" anchor="t" anchorCtr="0"/>
+          <a:lstStyle/>
+          <a:p>
+            <a:pPr marL="285750" indent="-285750">
+              <a:buFontTx/>
+              <a:buChar char="-"/>
+            </a:pPr>
+            <a:r>
+              <a:rPr lang="en-GB" dirty="0">
+                <a:solidFill>
+                  <a:schemeClr val="tx1"/>
+                </a:solidFill>
+              </a:rPr>
+              <a:t>Sound effect constantly loops in 3D space</a:t>
+            </a:r>
+          </a:p>
+          <a:p>
+            <a:pPr marL="285750" indent="-285750">
+              <a:buFontTx/>
+              <a:buChar char="-"/>
+            </a:pPr>
+            <a:endParaRPr lang="en-GB" dirty="0">
+              <a:solidFill>
+                <a:schemeClr val="tx1"/>
+              </a:solidFill>
+            </a:endParaRPr>
+          </a:p>
+          <a:p>
+            <a:pPr marL="285750" indent="-285750">
+              <a:buFontTx/>
+              <a:buChar char="-"/>
+            </a:pPr>
+            <a:r>
+              <a:rPr lang="en-GB" dirty="0">
+                <a:solidFill>
+                  <a:schemeClr val="tx1"/>
+                </a:solidFill>
+              </a:rPr>
+              <a:t>Audio gets quieter the further away the player is to the slime</a:t>
+            </a:r>
+          </a:p>
+          <a:p>
+            <a:pPr marL="285750" indent="-285750">
+              <a:buFontTx/>
+              <a:buChar char="-"/>
+            </a:pPr>
+            <a:endParaRPr lang="en-GB" dirty="0">
+              <a:solidFill>
+                <a:schemeClr val="tx1"/>
+              </a:solidFill>
+            </a:endParaRPr>
+          </a:p>
+          <a:p>
+            <a:pPr marL="285750" indent="-285750">
+              <a:buFontTx/>
+              <a:buChar char="-"/>
+            </a:pPr>
+            <a:r>
+              <a:rPr lang="en-GB" dirty="0">
+                <a:solidFill>
+                  <a:schemeClr val="tx1"/>
+                </a:solidFill>
+              </a:rPr>
+              <a:t>Roll off rapidly decreases volume after player gets a certain distance away from the slime</a:t>
+            </a:r>
+          </a:p>
+        </p:txBody>
+      </p:sp>
+    </p:spTree>
+    <p:extLst>
+      <p:ext uri="{BB962C8B-B14F-4D97-AF65-F5344CB8AC3E}">
+        <p14:creationId xmlns:p14="http://schemas.microsoft.com/office/powerpoint/2010/main" val="1825219199"/>
+      </p:ext>
+    </p:extLst>
+  </p:cSld>
+  <p:clrMapOvr>
+    <a:masterClrMapping/>
+  </p:clrMapOvr>
+</p:sld>
+</file>
+
+<file path=ppt/slides/slide12.xml><?xml version="1.0" encoding="utf-8"?>
+<p:sld xmlns:a="http://schemas.openxmlformats.org/drawingml/2006/main" xmlns:r="http://schemas.openxmlformats.org/officeDocument/2006/relationships" xmlns:p="http://schemas.openxmlformats.org/presentationml/2006/main">
+  <p:cSld>
+    <p:spTree>
+      <p:nvGrpSpPr>
+        <p:cNvPr id="1" name="">
+          <a:extLst>
+            <a:ext uri="{FF2B5EF4-FFF2-40B4-BE49-F238E27FC236}">
+              <a16:creationId xmlns:a16="http://schemas.microsoft.com/office/drawing/2014/main" id="{FF169A0C-022E-063D-D6A5-7A99C9E786B8}"/>
+            </a:ext>
+          </a:extLst>
+        </p:cNvPr>
+        <p:cNvGrpSpPr/>
+        <p:nvPr/>
+      </p:nvGrpSpPr>
+      <p:grpSpPr>
+        <a:xfrm>
+          <a:off x="0" y="0"/>
+          <a:ext cx="0" cy="0"/>
+          <a:chOff x="0" y="0"/>
+          <a:chExt cx="0" cy="0"/>
+        </a:xfrm>
+      </p:grpSpPr>
+      <p:sp>
+        <p:nvSpPr>
+          <p:cNvPr id="2" name="Title 1">
+            <a:extLst>
+              <a:ext uri="{FF2B5EF4-FFF2-40B4-BE49-F238E27FC236}">
+                <a16:creationId xmlns:a16="http://schemas.microsoft.com/office/drawing/2014/main" id="{FB473CC9-B331-AD09-7D92-574BC294DBCA}"/>
+              </a:ext>
+            </a:extLst>
+          </p:cNvPr>
+          <p:cNvSpPr>
+            <a:spLocks noGrp="1"/>
+          </p:cNvSpPr>
+          <p:nvPr>
+            <p:ph type="title"/>
+          </p:nvPr>
+        </p:nvSpPr>
+        <p:spPr>
+          <a:xfrm>
+            <a:off x="2231136" y="243332"/>
+            <a:ext cx="7729728" cy="883826"/>
+          </a:xfrm>
+        </p:spPr>
+        <p:txBody>
+          <a:bodyPr>
+            <a:normAutofit/>
+          </a:bodyPr>
+          <a:lstStyle/>
+          <a:p>
+            <a:r>
+              <a:rPr lang="en-GB" dirty="0"/>
+              <a:t>AMBIENCE (SoUND CreatioN)</a:t>
+            </a:r>
+          </a:p>
+        </p:txBody>
+      </p:sp>
+      <p:pic>
+        <p:nvPicPr>
+          <p:cNvPr id="4" name="Picture 3">
+            <a:extLst>
+              <a:ext uri="{FF2B5EF4-FFF2-40B4-BE49-F238E27FC236}">
+                <a16:creationId xmlns:a16="http://schemas.microsoft.com/office/drawing/2014/main" id="{66E24DA4-F5B7-91D2-D65E-91F0F0EE5FF8}"/>
+              </a:ext>
+            </a:extLst>
+          </p:cNvPr>
+          <p:cNvPicPr>
+            <a:picLocks noChangeAspect="1"/>
+          </p:cNvPicPr>
+          <p:nvPr/>
+        </p:nvPicPr>
+        <p:blipFill>
+          <a:blip r:embed="rId3">
+            <a:extLst>
+              <a:ext uri="{28A0092B-C50C-407E-A947-70E740481C1C}">
+                <a14:useLocalDpi xmlns:a14="http://schemas.microsoft.com/office/drawing/2010/main" val="0"/>
+              </a:ext>
+            </a:extLst>
+          </a:blip>
+          <a:srcRect t="9228" r="15495" b="5360"/>
+          <a:stretch>
+            <a:fillRect/>
+          </a:stretch>
+        </p:blipFill>
+        <p:spPr>
+          <a:xfrm>
+            <a:off x="725230" y="1300533"/>
+            <a:ext cx="10741539" cy="5314135"/>
+          </a:xfrm>
+          <a:prstGeom prst="rect">
+            <a:avLst/>
+          </a:prstGeom>
+        </p:spPr>
+      </p:pic>
+    </p:spTree>
+    <p:extLst>
+      <p:ext uri="{BB962C8B-B14F-4D97-AF65-F5344CB8AC3E}">
+        <p14:creationId xmlns:p14="http://schemas.microsoft.com/office/powerpoint/2010/main" val="2723584884"/>
+      </p:ext>
+    </p:extLst>
+  </p:cSld>
+  <p:clrMapOvr>
+    <a:masterClrMapping/>
+  </p:clrMapOvr>
+</p:sld>
+</file>
+
+<file path=ppt/slides/slide13.xml><?xml version="1.0" encoding="utf-8"?>
+<p:sld xmlns:a="http://schemas.openxmlformats.org/drawingml/2006/main" xmlns:r="http://schemas.openxmlformats.org/officeDocument/2006/relationships" xmlns:p="http://schemas.openxmlformats.org/presentationml/2006/main">
+  <p:cSld>
+    <p:spTree>
+      <p:nvGrpSpPr>
+        <p:cNvPr id="1" name="">
+          <a:extLst>
+            <a:ext uri="{FF2B5EF4-FFF2-40B4-BE49-F238E27FC236}">
+              <a16:creationId xmlns:a16="http://schemas.microsoft.com/office/drawing/2014/main" id="{DB0F2827-5DC9-51E0-D23B-23E21CB128C3}"/>
+            </a:ext>
+          </a:extLst>
+        </p:cNvPr>
+        <p:cNvGrpSpPr/>
+        <p:nvPr/>
+      </p:nvGrpSpPr>
+      <p:grpSpPr>
+        <a:xfrm>
+          <a:off x="0" y="0"/>
+          <a:ext cx="0" cy="0"/>
+          <a:chOff x="0" y="0"/>
+          <a:chExt cx="0" cy="0"/>
+        </a:xfrm>
+      </p:grpSpPr>
+      <p:sp>
+        <p:nvSpPr>
+          <p:cNvPr id="2" name="Title 1">
+            <a:extLst>
+              <a:ext uri="{FF2B5EF4-FFF2-40B4-BE49-F238E27FC236}">
+                <a16:creationId xmlns:a16="http://schemas.microsoft.com/office/drawing/2014/main" id="{AE00C932-D317-9144-BF27-C57C6B25EA43}"/>
+              </a:ext>
+            </a:extLst>
+          </p:cNvPr>
+          <p:cNvSpPr>
+            <a:spLocks noGrp="1"/>
+          </p:cNvSpPr>
+          <p:nvPr>
+            <p:ph type="title"/>
+          </p:nvPr>
+        </p:nvSpPr>
+        <p:spPr>
+          <a:xfrm>
+            <a:off x="2231136" y="89424"/>
+            <a:ext cx="7729728" cy="535265"/>
+          </a:xfrm>
+        </p:spPr>
+        <p:txBody>
+          <a:bodyPr>
+            <a:normAutofit fontScale="90000"/>
+          </a:bodyPr>
+          <a:lstStyle/>
+          <a:p>
+            <a:r>
+              <a:rPr lang="en-GB" dirty="0"/>
+              <a:t>AMBIENCE (SoUND CreatioN)</a:t>
+            </a:r>
+          </a:p>
+        </p:txBody>
+      </p:sp>
+      <p:graphicFrame>
+        <p:nvGraphicFramePr>
+          <p:cNvPr id="3" name="Table 2">
+            <a:extLst>
+              <a:ext uri="{FF2B5EF4-FFF2-40B4-BE49-F238E27FC236}">
+                <a16:creationId xmlns:a16="http://schemas.microsoft.com/office/drawing/2014/main" id="{86B52941-2254-ADED-CB7D-F35F1A2DAED5}"/>
+              </a:ext>
+            </a:extLst>
+          </p:cNvPr>
+          <p:cNvGraphicFramePr>
+            <a:graphicFrameLocks noGrp="1"/>
+          </p:cNvGraphicFramePr>
+          <p:nvPr>
+            <p:extLst>
+              <p:ext uri="{D42A27DB-BD31-4B8C-83A1-F6EECF244321}">
+                <p14:modId xmlns:p14="http://schemas.microsoft.com/office/powerpoint/2010/main" val="3858021791"/>
+              </p:ext>
+            </p:extLst>
+          </p:nvPr>
+        </p:nvGraphicFramePr>
+        <p:xfrm>
+          <a:off x="506995" y="697754"/>
+          <a:ext cx="11497900" cy="5988876"/>
+        </p:xfrm>
+        <a:graphic>
+          <a:graphicData uri="http://schemas.openxmlformats.org/drawingml/2006/table">
+            <a:tbl>
+              <a:tblPr firstRow="1" bandRow="1">
+                <a:tableStyleId>{00A15C55-8517-42AA-B614-E9B94910E393}</a:tableStyleId>
+              </a:tblPr>
+              <a:tblGrid>
+                <a:gridCol w="2211868">
+                  <a:extLst>
+                    <a:ext uri="{9D8B030D-6E8A-4147-A177-3AD203B41FA5}">
+                      <a16:colId xmlns:a16="http://schemas.microsoft.com/office/drawing/2014/main" val="4109676152"/>
+                    </a:ext>
+                  </a:extLst>
+                </a:gridCol>
+                <a:gridCol w="9286032">
+                  <a:extLst>
+                    <a:ext uri="{9D8B030D-6E8A-4147-A177-3AD203B41FA5}">
+                      <a16:colId xmlns:a16="http://schemas.microsoft.com/office/drawing/2014/main" val="1061097691"/>
+                    </a:ext>
+                  </a:extLst>
+                </a:gridCol>
+              </a:tblGrid>
+              <a:tr h="343207">
+                <a:tc>
+                  <a:txBody>
+                    <a:bodyPr/>
+                    <a:lstStyle/>
+                    <a:p>
+                      <a:r>
+                        <a:rPr lang="en-GB" dirty="0"/>
+                        <a:t>SOUND EFFECT</a:t>
+                      </a:r>
+                    </a:p>
+                  </a:txBody>
+                  <a:tcPr/>
+                </a:tc>
+                <a:tc>
+                  <a:txBody>
+                    <a:bodyPr/>
+                    <a:lstStyle/>
+                    <a:p>
+                      <a:r>
+                        <a:rPr lang="en-GB" dirty="0"/>
+                        <a:t>MODIFICATIONS</a:t>
+                      </a:r>
+                    </a:p>
+                  </a:txBody>
+                  <a:tcPr/>
+                </a:tc>
+                <a:extLst>
+                  <a:ext uri="{0D108BD9-81ED-4DB2-BD59-A6C34878D82A}">
+                    <a16:rowId xmlns:a16="http://schemas.microsoft.com/office/drawing/2014/main" val="1941205918"/>
+                  </a:ext>
+                </a:extLst>
+              </a:tr>
+              <a:tr h="1630236">
+                <a:tc>
+                  <a:txBody>
+                    <a:bodyPr/>
+                    <a:lstStyle/>
+                    <a:p>
+                      <a:pPr algn="ctr"/>
+                      <a:r>
+                        <a:rPr lang="en-GB" dirty="0"/>
+                        <a:t>LEAVES 1</a:t>
+                      </a:r>
+                    </a:p>
+                  </a:txBody>
+                  <a:tcPr/>
+                </a:tc>
+                <a:tc>
+                  <a:txBody>
+                    <a:bodyPr/>
+                    <a:lstStyle/>
+                    <a:p>
+                      <a:pPr marL="285750" indent="-285750">
+                        <a:buFontTx/>
+                        <a:buChar char="-"/>
+                      </a:pPr>
+                      <a:r>
+                        <a:rPr lang="en-GB" sz="1600" dirty="0"/>
+                        <a:t>High pass filter to remove any low rumbling (120 Hz cutoff, 12 dB)</a:t>
+                      </a:r>
+                    </a:p>
+                    <a:p>
+                      <a:pPr marL="285750" indent="-285750">
+                        <a:buFontTx/>
+                        <a:buChar char="-"/>
+                      </a:pPr>
+                      <a:r>
+                        <a:rPr lang="en-GB" sz="1600" dirty="0"/>
+                        <a:t>Graphic EQ to slightly boost audio between 3 and 6 </a:t>
+                      </a:r>
+                      <a:r>
+                        <a:rPr lang="en-GB" sz="1600" dirty="0" err="1"/>
+                        <a:t>KHz</a:t>
+                      </a:r>
+                      <a:endParaRPr lang="en-GB" sz="1600" dirty="0"/>
+                    </a:p>
+                    <a:p>
+                      <a:pPr marL="285750" indent="-285750">
+                        <a:buFontTx/>
+                        <a:buChar char="-"/>
+                      </a:pPr>
+                      <a:r>
+                        <a:rPr lang="en-GB" sz="1600" dirty="0"/>
+                        <a:t>Normalised volume to -1</a:t>
+                      </a:r>
+                    </a:p>
+                    <a:p>
+                      <a:pPr marL="285750" indent="-285750">
+                        <a:buFontTx/>
+                        <a:buChar char="-"/>
+                      </a:pPr>
+                      <a:r>
+                        <a:rPr lang="en-GB" sz="1600" dirty="0"/>
+                        <a:t>Duplicated clip (40% left + 40% right) and combined clips into a stereo file</a:t>
+                      </a:r>
+                    </a:p>
+                    <a:p>
+                      <a:pPr marL="285750" indent="-285750">
+                        <a:buFontTx/>
+                        <a:buChar char="-"/>
+                      </a:pPr>
+                      <a:r>
+                        <a:rPr lang="en-GB" sz="1600" dirty="0"/>
+                        <a:t>Used envelope tool to mimic wind bursts</a:t>
+                      </a:r>
+                    </a:p>
+                    <a:p>
+                      <a:pPr marL="0" indent="0">
+                        <a:buFontTx/>
+                        <a:buNone/>
+                      </a:pPr>
+                      <a:endParaRPr lang="en-GB" sz="1600" dirty="0"/>
+                    </a:p>
+                  </a:txBody>
+                  <a:tcPr/>
+                </a:tc>
+                <a:extLst>
+                  <a:ext uri="{0D108BD9-81ED-4DB2-BD59-A6C34878D82A}">
+                    <a16:rowId xmlns:a16="http://schemas.microsoft.com/office/drawing/2014/main" val="4178226506"/>
+                  </a:ext>
+                </a:extLst>
+              </a:tr>
+              <a:tr h="3946886">
+                <a:tc>
+                  <a:txBody>
+                    <a:bodyPr/>
+                    <a:lstStyle/>
+                    <a:p>
+                      <a:pPr algn="ctr"/>
+                      <a:r>
+                        <a:rPr lang="en-GB" dirty="0"/>
+                        <a:t>WOOD CREAKS</a:t>
+                      </a:r>
+                    </a:p>
+                  </a:txBody>
+                  <a:tcPr/>
+                </a:tc>
+                <a:tc>
+                  <a:txBody>
+                    <a:bodyPr/>
+                    <a:lstStyle/>
+                    <a:p>
+                      <a:pPr marL="285750" indent="-285750">
+                        <a:buFontTx/>
+                        <a:buChar char="-"/>
+                      </a:pPr>
+                      <a:r>
+                        <a:rPr lang="en-GB" sz="1600" dirty="0"/>
+                        <a:t>Compressed audio to reduce sound difference</a:t>
+                      </a:r>
+                    </a:p>
+                    <a:p>
+                      <a:pPr marL="285750" indent="-285750">
+                        <a:buFontTx/>
+                        <a:buChar char="-"/>
+                      </a:pPr>
+                      <a:endParaRPr lang="en-GB" sz="1600" dirty="0"/>
+                    </a:p>
+                    <a:p>
+                      <a:pPr marL="285750" indent="-285750">
+                        <a:buFontTx/>
+                        <a:buChar char="-"/>
+                      </a:pPr>
+                      <a:endParaRPr lang="en-GB" sz="1600" dirty="0"/>
+                    </a:p>
+                    <a:p>
+                      <a:pPr marL="285750" indent="-285750">
+                        <a:buFontTx/>
+                        <a:buChar char="-"/>
+                      </a:pPr>
+                      <a:endParaRPr lang="en-GB" sz="1600" dirty="0"/>
+                    </a:p>
+                    <a:p>
+                      <a:pPr marL="285750" indent="-285750">
+                        <a:buFontTx/>
+                        <a:buChar char="-"/>
+                      </a:pPr>
+                      <a:endParaRPr lang="en-GB" sz="1600" dirty="0"/>
+                    </a:p>
+                    <a:p>
+                      <a:pPr marL="285750" indent="-285750">
+                        <a:buFontTx/>
+                        <a:buChar char="-"/>
+                      </a:pPr>
+                      <a:endParaRPr lang="en-GB" sz="1600" dirty="0"/>
+                    </a:p>
+                    <a:p>
+                      <a:pPr marL="0" indent="0">
+                        <a:buFontTx/>
+                        <a:buNone/>
+                      </a:pPr>
+                      <a:endParaRPr lang="en-GB" sz="1600" dirty="0"/>
+                    </a:p>
+                    <a:p>
+                      <a:pPr marL="285750" indent="-285750">
+                        <a:buFontTx/>
+                        <a:buChar char="-"/>
+                      </a:pPr>
+                      <a:r>
+                        <a:rPr lang="en-GB" sz="1600" dirty="0"/>
+                        <a:t>High pass at 120 Hz to remove low rumbling</a:t>
+                      </a:r>
+                    </a:p>
+                    <a:p>
+                      <a:pPr marL="285750" indent="-285750">
+                        <a:buFontTx/>
+                        <a:buChar char="-"/>
+                      </a:pPr>
+                      <a:r>
+                        <a:rPr lang="en-GB" sz="1600" dirty="0"/>
+                        <a:t>Filter Curve EQ to boost wood creaking pitch</a:t>
+                      </a:r>
+                    </a:p>
+                    <a:p>
+                      <a:pPr marL="285750" indent="-285750">
+                        <a:buFontTx/>
+                        <a:buChar char="-"/>
+                      </a:pPr>
+                      <a:r>
+                        <a:rPr lang="en-GB" sz="1600" dirty="0"/>
+                        <a:t>Added Subtle Reverb</a:t>
+                      </a:r>
+                    </a:p>
+                    <a:p>
+                      <a:pPr marL="285750" indent="-285750">
+                        <a:buFontTx/>
+                        <a:buChar char="-"/>
+                      </a:pPr>
+                      <a:r>
+                        <a:rPr lang="en-GB" sz="1600" dirty="0"/>
+                        <a:t>Noise Reduction to remove cars passing</a:t>
+                      </a:r>
+                    </a:p>
+                    <a:p>
+                      <a:pPr marL="285750" indent="-285750">
+                        <a:buFontTx/>
+                        <a:buChar char="-"/>
+                      </a:pPr>
+                      <a:r>
+                        <a:rPr lang="en-GB" sz="1600" dirty="0"/>
+                        <a:t>Pitch Lowered by 1 semitone</a:t>
+                      </a:r>
+                    </a:p>
+                    <a:p>
+                      <a:pPr marL="285750" indent="-285750">
+                        <a:buFontTx/>
+                        <a:buChar char="-"/>
+                      </a:pPr>
+                      <a:r>
+                        <a:rPr lang="en-GB" sz="1600" dirty="0"/>
+                        <a:t>Converted clip to stereo file</a:t>
+                      </a:r>
+                    </a:p>
+                    <a:p>
+                      <a:pPr marL="285750" indent="-285750">
+                        <a:buFontTx/>
+                        <a:buChar char="-"/>
+                      </a:pPr>
+                      <a:r>
+                        <a:rPr lang="en-GB" sz="1600" dirty="0"/>
+                        <a:t>Place clips so they didn’t peak at the same time as leaves</a:t>
+                      </a:r>
+                    </a:p>
+                    <a:p>
+                      <a:pPr marL="285750" indent="-285750">
+                        <a:buFontTx/>
+                        <a:buChar char="-"/>
+                      </a:pPr>
+                      <a:r>
+                        <a:rPr lang="en-GB" sz="1600" dirty="0"/>
+                        <a:t>Enveloped wood creak (natural feel)</a:t>
+                      </a:r>
+                    </a:p>
+                    <a:p>
+                      <a:pPr marL="285750" indent="-285750">
+                        <a:buFontTx/>
+                        <a:buChar char="-"/>
+                      </a:pPr>
+                      <a:endParaRPr lang="en-GB" sz="1600" dirty="0"/>
+                    </a:p>
+                  </a:txBody>
+                  <a:tcPr/>
+                </a:tc>
+                <a:extLst>
+                  <a:ext uri="{0D108BD9-81ED-4DB2-BD59-A6C34878D82A}">
+                    <a16:rowId xmlns:a16="http://schemas.microsoft.com/office/drawing/2014/main" val="2688770750"/>
+                  </a:ext>
+                </a:extLst>
+              </a:tr>
+            </a:tbl>
+          </a:graphicData>
+        </a:graphic>
+      </p:graphicFrame>
+      <p:pic>
+        <p:nvPicPr>
+          <p:cNvPr id="5" name="Picture 4">
+            <a:extLst>
+              <a:ext uri="{FF2B5EF4-FFF2-40B4-BE49-F238E27FC236}">
+                <a16:creationId xmlns:a16="http://schemas.microsoft.com/office/drawing/2014/main" id="{FA61759E-B0F5-057F-219F-9798399DF138}"/>
+              </a:ext>
+            </a:extLst>
+          </p:cNvPr>
+          <p:cNvPicPr>
+            <a:picLocks noChangeAspect="1"/>
+          </p:cNvPicPr>
+          <p:nvPr/>
+        </p:nvPicPr>
+        <p:blipFill>
+          <a:blip r:embed="rId3"/>
+          <a:srcRect t="59052" b="6464"/>
+          <a:stretch>
+            <a:fillRect/>
+          </a:stretch>
+        </p:blipFill>
+        <p:spPr>
+          <a:xfrm>
+            <a:off x="3072402" y="3038690"/>
+            <a:ext cx="2739923" cy="1110626"/>
+          </a:xfrm>
+          <a:prstGeom prst="rect">
+            <a:avLst/>
+          </a:prstGeom>
+        </p:spPr>
+      </p:pic>
+      <p:pic>
+        <p:nvPicPr>
+          <p:cNvPr id="6" name="Picture 5">
+            <a:extLst>
+              <a:ext uri="{FF2B5EF4-FFF2-40B4-BE49-F238E27FC236}">
+                <a16:creationId xmlns:a16="http://schemas.microsoft.com/office/drawing/2014/main" id="{DABBAD4E-F043-9E23-EC9D-9D0CF320B57D}"/>
+              </a:ext>
+            </a:extLst>
+          </p:cNvPr>
+          <p:cNvPicPr>
+            <a:picLocks noChangeAspect="1"/>
+          </p:cNvPicPr>
+          <p:nvPr/>
+        </p:nvPicPr>
+        <p:blipFill>
+          <a:blip r:embed="rId4"/>
+          <a:srcRect t="28204"/>
+          <a:stretch>
+            <a:fillRect/>
+          </a:stretch>
+        </p:blipFill>
+        <p:spPr>
+          <a:xfrm>
+            <a:off x="7415785" y="2825610"/>
+            <a:ext cx="4481865" cy="1687169"/>
+          </a:xfrm>
+          <a:prstGeom prst="rect">
+            <a:avLst/>
+          </a:prstGeom>
+        </p:spPr>
+      </p:pic>
+      <p:pic>
+        <p:nvPicPr>
+          <p:cNvPr id="7" name="Picture 6">
+            <a:extLst>
+              <a:ext uri="{FF2B5EF4-FFF2-40B4-BE49-F238E27FC236}">
+                <a16:creationId xmlns:a16="http://schemas.microsoft.com/office/drawing/2014/main" id="{0A21C8A0-2329-73F9-F972-189813D14B9C}"/>
+              </a:ext>
+            </a:extLst>
+          </p:cNvPr>
+          <p:cNvPicPr>
+            <a:picLocks noChangeAspect="1"/>
+          </p:cNvPicPr>
+          <p:nvPr/>
+        </p:nvPicPr>
+        <p:blipFill>
+          <a:blip r:embed="rId5"/>
+          <a:srcRect t="18757"/>
+          <a:stretch>
+            <a:fillRect/>
+          </a:stretch>
+        </p:blipFill>
+        <p:spPr>
+          <a:xfrm>
+            <a:off x="8552443" y="4594872"/>
+            <a:ext cx="2022005" cy="2118829"/>
+          </a:xfrm>
+          <a:prstGeom prst="rect">
+            <a:avLst/>
+          </a:prstGeom>
+        </p:spPr>
+      </p:pic>
+    </p:spTree>
+    <p:extLst>
+      <p:ext uri="{BB962C8B-B14F-4D97-AF65-F5344CB8AC3E}">
+        <p14:creationId xmlns:p14="http://schemas.microsoft.com/office/powerpoint/2010/main" val="2519963963"/>
+      </p:ext>
+    </p:extLst>
+  </p:cSld>
+  <p:clrMapOvr>
+    <a:masterClrMapping/>
+  </p:clrMapOvr>
+</p:sld>
+</file>
+
+<file path=ppt/slides/slide14.xml><?xml version="1.0" encoding="utf-8"?>
+<p:sld xmlns:a="http://schemas.openxmlformats.org/drawingml/2006/main" xmlns:r="http://schemas.openxmlformats.org/officeDocument/2006/relationships" xmlns:p="http://schemas.openxmlformats.org/presentationml/2006/main">
+  <p:cSld>
+    <p:spTree>
+      <p:nvGrpSpPr>
+        <p:cNvPr id="1" name="">
+          <a:extLst>
+            <a:ext uri="{FF2B5EF4-FFF2-40B4-BE49-F238E27FC236}">
+              <a16:creationId xmlns:a16="http://schemas.microsoft.com/office/drawing/2014/main" id="{B95F47A2-FC6F-13D4-0C39-201B61ECA6FA}"/>
+            </a:ext>
+          </a:extLst>
+        </p:cNvPr>
+        <p:cNvGrpSpPr/>
+        <p:nvPr/>
+      </p:nvGrpSpPr>
+      <p:grpSpPr>
+        <a:xfrm>
+          <a:off x="0" y="0"/>
+          <a:ext cx="0" cy="0"/>
+          <a:chOff x="0" y="0"/>
+          <a:chExt cx="0" cy="0"/>
+        </a:xfrm>
+      </p:grpSpPr>
+      <p:sp>
+        <p:nvSpPr>
+          <p:cNvPr id="2" name="Title 1">
+            <a:extLst>
+              <a:ext uri="{FF2B5EF4-FFF2-40B4-BE49-F238E27FC236}">
+                <a16:creationId xmlns:a16="http://schemas.microsoft.com/office/drawing/2014/main" id="{E9E88D5B-5984-5ACE-9302-5BB24B763FC0}"/>
+              </a:ext>
+            </a:extLst>
+          </p:cNvPr>
+          <p:cNvSpPr>
+            <a:spLocks noGrp="1"/>
+          </p:cNvSpPr>
+          <p:nvPr>
+            <p:ph type="title"/>
+          </p:nvPr>
+        </p:nvSpPr>
+        <p:spPr>
+          <a:xfrm>
+            <a:off x="2231135" y="243332"/>
+            <a:ext cx="9103803" cy="652961"/>
+          </a:xfrm>
+        </p:spPr>
+        <p:txBody>
+          <a:bodyPr>
+            <a:normAutofit fontScale="90000"/>
+          </a:bodyPr>
+          <a:lstStyle/>
+          <a:p>
+            <a:r>
+              <a:rPr lang="en-GB" dirty="0"/>
+              <a:t>AMBIENCE (Sound Creation + IMPLEMENTATION)</a:t>
+            </a:r>
+          </a:p>
+        </p:txBody>
+      </p:sp>
+      <p:graphicFrame>
+        <p:nvGraphicFramePr>
+          <p:cNvPr id="3" name="Table 2">
+            <a:extLst>
+              <a:ext uri="{FF2B5EF4-FFF2-40B4-BE49-F238E27FC236}">
+                <a16:creationId xmlns:a16="http://schemas.microsoft.com/office/drawing/2014/main" id="{8EE16B58-9CEC-EE1A-1048-3FBDC47EE673}"/>
+              </a:ext>
+            </a:extLst>
+          </p:cNvPr>
+          <p:cNvGraphicFramePr>
+            <a:graphicFrameLocks noGrp="1"/>
+          </p:cNvGraphicFramePr>
+          <p:nvPr>
+            <p:extLst>
+              <p:ext uri="{D42A27DB-BD31-4B8C-83A1-F6EECF244321}">
+                <p14:modId xmlns:p14="http://schemas.microsoft.com/office/powerpoint/2010/main" val="1070574293"/>
+              </p:ext>
+            </p:extLst>
+          </p:nvPr>
+        </p:nvGraphicFramePr>
+        <p:xfrm>
+          <a:off x="543209" y="1059892"/>
+          <a:ext cx="11497900" cy="1513397"/>
+        </p:xfrm>
+        <a:graphic>
+          <a:graphicData uri="http://schemas.openxmlformats.org/drawingml/2006/table">
+            <a:tbl>
+              <a:tblPr firstRow="1" bandRow="1">
+                <a:tableStyleId>{00A15C55-8517-42AA-B614-E9B94910E393}</a:tableStyleId>
+              </a:tblPr>
+              <a:tblGrid>
+                <a:gridCol w="2211868">
+                  <a:extLst>
+                    <a:ext uri="{9D8B030D-6E8A-4147-A177-3AD203B41FA5}">
+                      <a16:colId xmlns:a16="http://schemas.microsoft.com/office/drawing/2014/main" val="4109676152"/>
+                    </a:ext>
+                  </a:extLst>
+                </a:gridCol>
+                <a:gridCol w="9286032">
+                  <a:extLst>
+                    <a:ext uri="{9D8B030D-6E8A-4147-A177-3AD203B41FA5}">
+                      <a16:colId xmlns:a16="http://schemas.microsoft.com/office/drawing/2014/main" val="1061097691"/>
+                    </a:ext>
+                  </a:extLst>
+                </a:gridCol>
+              </a:tblGrid>
+              <a:tr h="318388">
+                <a:tc>
+                  <a:txBody>
+                    <a:bodyPr/>
+                    <a:lstStyle/>
+                    <a:p>
+                      <a:r>
+                        <a:rPr lang="en-GB" dirty="0"/>
+                        <a:t>SOUND EFFECT</a:t>
+                      </a:r>
+                    </a:p>
+                  </a:txBody>
+                  <a:tcPr/>
+                </a:tc>
+                <a:tc>
+                  <a:txBody>
+                    <a:bodyPr/>
+                    <a:lstStyle/>
+                    <a:p>
+                      <a:r>
+                        <a:rPr lang="en-GB" dirty="0"/>
+                        <a:t>MODIFICATIONS</a:t>
+                      </a:r>
+                    </a:p>
+                  </a:txBody>
+                  <a:tcPr/>
+                </a:tc>
+                <a:extLst>
+                  <a:ext uri="{0D108BD9-81ED-4DB2-BD59-A6C34878D82A}">
+                    <a16:rowId xmlns:a16="http://schemas.microsoft.com/office/drawing/2014/main" val="1941205918"/>
+                  </a:ext>
+                </a:extLst>
+              </a:tr>
+              <a:tr h="1147637">
+                <a:tc>
+                  <a:txBody>
+                    <a:bodyPr/>
+                    <a:lstStyle/>
+                    <a:p>
+                      <a:pPr algn="ctr"/>
+                      <a:r>
+                        <a:rPr lang="en-GB" dirty="0"/>
+                        <a:t>SNAPS 2</a:t>
+                      </a:r>
+                    </a:p>
+                  </a:txBody>
+                  <a:tcPr/>
+                </a:tc>
+                <a:tc>
+                  <a:txBody>
+                    <a:bodyPr/>
+                    <a:lstStyle/>
+                    <a:p>
+                      <a:pPr marL="285750" indent="-285750">
+                        <a:buFontTx/>
+                        <a:buChar char="-"/>
+                      </a:pPr>
+                      <a:r>
+                        <a:rPr lang="en-GB" dirty="0"/>
+                        <a:t>Trimmed down clip, duplicated and split into multiple parts</a:t>
+                      </a:r>
+                    </a:p>
+                    <a:p>
+                      <a:pPr marL="285750" indent="-285750">
+                        <a:buFontTx/>
+                        <a:buChar char="-"/>
+                      </a:pPr>
+                      <a:r>
+                        <a:rPr lang="en-GB" dirty="0"/>
+                        <a:t>High Pass Filter at 120 Hz</a:t>
+                      </a:r>
+                    </a:p>
+                    <a:p>
+                      <a:pPr marL="285750" indent="-285750">
+                        <a:buFontTx/>
+                        <a:buChar char="-"/>
+                      </a:pPr>
+                      <a:r>
+                        <a:rPr lang="en-GB" dirty="0"/>
+                        <a:t>Noise Reduction to remove background static</a:t>
+                      </a:r>
+                    </a:p>
+                  </a:txBody>
+                  <a:tcPr/>
+                </a:tc>
+                <a:extLst>
+                  <a:ext uri="{0D108BD9-81ED-4DB2-BD59-A6C34878D82A}">
+                    <a16:rowId xmlns:a16="http://schemas.microsoft.com/office/drawing/2014/main" val="4178226506"/>
+                  </a:ext>
+                </a:extLst>
+              </a:tr>
+            </a:tbl>
+          </a:graphicData>
+        </a:graphic>
+      </p:graphicFrame>
+      <p:pic>
+        <p:nvPicPr>
+          <p:cNvPr id="7" name="Picture 6">
+            <a:extLst>
+              <a:ext uri="{FF2B5EF4-FFF2-40B4-BE49-F238E27FC236}">
+                <a16:creationId xmlns:a16="http://schemas.microsoft.com/office/drawing/2014/main" id="{F79F9D03-8845-0BC9-6D89-B07C7AC8D2EB}"/>
+              </a:ext>
+            </a:extLst>
+          </p:cNvPr>
+          <p:cNvPicPr>
+            <a:picLocks noChangeAspect="1"/>
+          </p:cNvPicPr>
+          <p:nvPr/>
+        </p:nvPicPr>
+        <p:blipFill>
+          <a:blip r:embed="rId3"/>
+          <a:stretch>
+            <a:fillRect/>
+          </a:stretch>
+        </p:blipFill>
+        <p:spPr>
+          <a:xfrm>
+            <a:off x="543209" y="2921785"/>
+            <a:ext cx="3001517" cy="2341609"/>
+          </a:xfrm>
+          <a:prstGeom prst="rect">
+            <a:avLst/>
+          </a:prstGeom>
+        </p:spPr>
+      </p:pic>
+      <p:sp>
+        <p:nvSpPr>
+          <p:cNvPr id="8" name="Rectangle 7">
+            <a:extLst>
+              <a:ext uri="{FF2B5EF4-FFF2-40B4-BE49-F238E27FC236}">
+                <a16:creationId xmlns:a16="http://schemas.microsoft.com/office/drawing/2014/main" id="{6B846E72-B4A8-6347-76E1-8090AB56E8B1}"/>
+              </a:ext>
+            </a:extLst>
+          </p:cNvPr>
+          <p:cNvSpPr/>
+          <p:nvPr/>
+        </p:nvSpPr>
+        <p:spPr>
+          <a:xfrm>
+            <a:off x="543209" y="5263394"/>
+            <a:ext cx="3001517" cy="1267487"/>
+          </a:xfrm>
+          <a:prstGeom prst="rect">
+            <a:avLst/>
+          </a:prstGeom>
+          <a:solidFill>
+            <a:srgbClr val="92D050"/>
+          </a:solidFill>
+        </p:spPr>
+        <p:style>
+          <a:lnRef idx="2">
+            <a:schemeClr val="accent1">
+              <a:shade val="15000"/>
+            </a:schemeClr>
+          </a:lnRef>
+          <a:fillRef idx="1">
+            <a:schemeClr val="accent1"/>
+          </a:fillRef>
+          <a:effectRef idx="0">
+            <a:schemeClr val="accent1"/>
+          </a:effectRef>
+          <a:fontRef idx="minor">
+            <a:schemeClr val="lt1"/>
+          </a:fontRef>
+        </p:style>
+        <p:txBody>
+          <a:bodyPr rtlCol="0" anchor="ctr"/>
+          <a:lstStyle/>
+          <a:p>
+            <a:pPr algn="ctr"/>
+            <a:r>
+              <a:rPr lang="en-GB" sz="2000" dirty="0"/>
+              <a:t>Empty Game Object which holds the Ambience Audio Source</a:t>
+            </a:r>
+          </a:p>
+        </p:txBody>
+      </p:sp>
+      <p:sp>
+        <p:nvSpPr>
+          <p:cNvPr id="9" name="Rectangle 8">
+            <a:extLst>
+              <a:ext uri="{FF2B5EF4-FFF2-40B4-BE49-F238E27FC236}">
+                <a16:creationId xmlns:a16="http://schemas.microsoft.com/office/drawing/2014/main" id="{6DD9FA26-3F1E-2FA8-F113-185F3721376F}"/>
+              </a:ext>
+            </a:extLst>
+          </p:cNvPr>
+          <p:cNvSpPr/>
+          <p:nvPr/>
+        </p:nvSpPr>
+        <p:spPr>
+          <a:xfrm>
+            <a:off x="3880378" y="2921785"/>
+            <a:ext cx="4892430" cy="3534184"/>
+          </a:xfrm>
+          <a:prstGeom prst="rect">
+            <a:avLst/>
+          </a:prstGeom>
+          <a:solidFill>
+            <a:schemeClr val="accent2">
+              <a:lumMod val="40000"/>
+              <a:lumOff val="60000"/>
+            </a:schemeClr>
+          </a:solidFill>
+        </p:spPr>
+        <p:style>
+          <a:lnRef idx="2">
+            <a:schemeClr val="accent1">
+              <a:shade val="15000"/>
+            </a:schemeClr>
+          </a:lnRef>
+          <a:fillRef idx="1">
+            <a:schemeClr val="accent1"/>
+          </a:fillRef>
+          <a:effectRef idx="0">
+            <a:schemeClr val="accent1"/>
+          </a:effectRef>
+          <a:fontRef idx="minor">
+            <a:schemeClr val="lt1"/>
+          </a:fontRef>
+        </p:style>
+        <p:txBody>
+          <a:bodyPr rtlCol="0" anchor="t" anchorCtr="0"/>
+          <a:lstStyle/>
+          <a:p>
+            <a:pPr marL="285750" indent="-285750">
+              <a:buFontTx/>
+              <a:buChar char="-"/>
+            </a:pPr>
+            <a:r>
+              <a:rPr lang="en-GB" sz="2400" dirty="0">
+                <a:solidFill>
+                  <a:schemeClr val="tx1"/>
+                </a:solidFill>
+              </a:rPr>
+              <a:t>Constantly loops</a:t>
+            </a:r>
+          </a:p>
+          <a:p>
+            <a:pPr marL="285750" indent="-285750">
+              <a:buFontTx/>
+              <a:buChar char="-"/>
+            </a:pPr>
+            <a:endParaRPr lang="en-GB" sz="2400" dirty="0">
+              <a:solidFill>
+                <a:schemeClr val="tx1"/>
+              </a:solidFill>
+            </a:endParaRPr>
+          </a:p>
+          <a:p>
+            <a:pPr marL="285750" indent="-285750">
+              <a:buFontTx/>
+              <a:buChar char="-"/>
+            </a:pPr>
+            <a:r>
+              <a:rPr lang="en-GB" sz="2400" dirty="0">
+                <a:solidFill>
+                  <a:schemeClr val="tx1"/>
+                </a:solidFill>
+              </a:rPr>
+              <a:t>Uses 2D space so that the volume remains at the same level throughout the game space</a:t>
+            </a:r>
+          </a:p>
+          <a:p>
+            <a:pPr marL="285750" indent="-285750">
+              <a:buFontTx/>
+              <a:buChar char="-"/>
+            </a:pPr>
+            <a:endParaRPr lang="en-GB" sz="2400" dirty="0">
+              <a:solidFill>
+                <a:schemeClr val="tx1"/>
+              </a:solidFill>
+            </a:endParaRPr>
+          </a:p>
+          <a:p>
+            <a:pPr marL="285750" indent="-285750">
+              <a:buFontTx/>
+              <a:buChar char="-"/>
+            </a:pPr>
+            <a:r>
+              <a:rPr lang="en-GB" sz="2400" dirty="0">
+                <a:solidFill>
+                  <a:schemeClr val="tx1"/>
+                </a:solidFill>
+              </a:rPr>
+              <a:t>Lowered volume so that other sound effects aren’t drowned out</a:t>
+            </a:r>
+          </a:p>
+        </p:txBody>
+      </p:sp>
+      <p:pic>
+        <p:nvPicPr>
+          <p:cNvPr id="11" name="Picture 10">
+            <a:extLst>
+              <a:ext uri="{FF2B5EF4-FFF2-40B4-BE49-F238E27FC236}">
+                <a16:creationId xmlns:a16="http://schemas.microsoft.com/office/drawing/2014/main" id="{1EF80D14-8B75-B7E2-7E70-A9C62DAAF724}"/>
+              </a:ext>
+            </a:extLst>
+          </p:cNvPr>
+          <p:cNvPicPr>
+            <a:picLocks noChangeAspect="1"/>
+          </p:cNvPicPr>
+          <p:nvPr/>
+        </p:nvPicPr>
+        <p:blipFill>
+          <a:blip r:embed="rId4"/>
+          <a:stretch>
+            <a:fillRect/>
+          </a:stretch>
+        </p:blipFill>
+        <p:spPr>
+          <a:xfrm>
+            <a:off x="8911315" y="2907349"/>
+            <a:ext cx="3010320" cy="3515216"/>
+          </a:xfrm>
+          <a:prstGeom prst="rect">
+            <a:avLst/>
+          </a:prstGeom>
+        </p:spPr>
+      </p:pic>
+    </p:spTree>
+    <p:extLst>
+      <p:ext uri="{BB962C8B-B14F-4D97-AF65-F5344CB8AC3E}">
+        <p14:creationId xmlns:p14="http://schemas.microsoft.com/office/powerpoint/2010/main" val="1672206042"/>
+      </p:ext>
+    </p:extLst>
+  </p:cSld>
+  <p:clrMapOvr>
+    <a:masterClrMapping/>
+  </p:clrMapOvr>
+</p:sld>
+</file>
+
+<file path=ppt/slides/slide15.xml><?xml version="1.0" encoding="utf-8"?>
+<p:sld xmlns:a="http://schemas.openxmlformats.org/drawingml/2006/main" xmlns:r="http://schemas.openxmlformats.org/officeDocument/2006/relationships" xmlns:p="http://schemas.openxmlformats.org/presentationml/2006/main">
+  <p:cSld>
+    <p:spTree>
+      <p:nvGrpSpPr>
+        <p:cNvPr id="1" name="">
+          <a:extLst>
+            <a:ext uri="{FF2B5EF4-FFF2-40B4-BE49-F238E27FC236}">
+              <a16:creationId xmlns:a16="http://schemas.microsoft.com/office/drawing/2014/main" id="{C0ABD988-1C30-2EF4-6FA6-6B3AD1DC2BF1}"/>
+            </a:ext>
+          </a:extLst>
+        </p:cNvPr>
+        <p:cNvGrpSpPr/>
+        <p:nvPr/>
+      </p:nvGrpSpPr>
+      <p:grpSpPr>
+        <a:xfrm>
+          <a:off x="0" y="0"/>
+          <a:ext cx="0" cy="0"/>
+          <a:chOff x="0" y="0"/>
+          <a:chExt cx="0" cy="0"/>
+        </a:xfrm>
+      </p:grpSpPr>
+      <p:sp>
+        <p:nvSpPr>
+          <p:cNvPr id="2" name="Title 1">
+            <a:extLst>
+              <a:ext uri="{FF2B5EF4-FFF2-40B4-BE49-F238E27FC236}">
+                <a16:creationId xmlns:a16="http://schemas.microsoft.com/office/drawing/2014/main" id="{3BC2012D-D316-FDF5-B7BB-C55E0389A950}"/>
+              </a:ext>
+            </a:extLst>
+          </p:cNvPr>
+          <p:cNvSpPr>
+            <a:spLocks noGrp="1"/>
+          </p:cNvSpPr>
+          <p:nvPr>
+            <p:ph type="title"/>
+          </p:nvPr>
+        </p:nvSpPr>
+        <p:spPr>
+          <a:xfrm>
+            <a:off x="2294510" y="243332"/>
+            <a:ext cx="7729728" cy="883826"/>
+          </a:xfrm>
+        </p:spPr>
+        <p:txBody>
+          <a:bodyPr>
+            <a:normAutofit/>
+          </a:bodyPr>
+          <a:lstStyle/>
+          <a:p>
+            <a:r>
+              <a:rPr lang="en-GB" dirty="0"/>
+              <a:t>Dialogue </a:t>
+            </a:r>
+          </a:p>
+        </p:txBody>
+      </p:sp>
+      <p:pic>
+        <p:nvPicPr>
+          <p:cNvPr id="5" name="Picture 4">
+            <a:extLst>
+              <a:ext uri="{FF2B5EF4-FFF2-40B4-BE49-F238E27FC236}">
+                <a16:creationId xmlns:a16="http://schemas.microsoft.com/office/drawing/2014/main" id="{3538C109-313D-339C-0961-7F34E2D8C1DE}"/>
+              </a:ext>
+            </a:extLst>
+          </p:cNvPr>
+          <p:cNvPicPr>
+            <a:picLocks noChangeAspect="1"/>
+          </p:cNvPicPr>
+          <p:nvPr/>
+        </p:nvPicPr>
+        <p:blipFill>
+          <a:blip r:embed="rId3">
+            <a:extLst>
+              <a:ext uri="{28A0092B-C50C-407E-A947-70E740481C1C}">
+                <a14:useLocalDpi xmlns:a14="http://schemas.microsoft.com/office/drawing/2010/main" val="0"/>
+              </a:ext>
+            </a:extLst>
+          </a:blip>
+          <a:srcRect t="11671"/>
+          <a:stretch>
+            <a:fillRect/>
+          </a:stretch>
+        </p:blipFill>
+        <p:spPr>
+          <a:xfrm>
+            <a:off x="814811" y="1162549"/>
+            <a:ext cx="10239469" cy="3735021"/>
+          </a:xfrm>
+          <a:prstGeom prst="rect">
+            <a:avLst/>
+          </a:prstGeom>
+        </p:spPr>
+      </p:pic>
+      <p:pic>
+        <p:nvPicPr>
+          <p:cNvPr id="6" name="Picture 5">
+            <a:extLst>
+              <a:ext uri="{FF2B5EF4-FFF2-40B4-BE49-F238E27FC236}">
+                <a16:creationId xmlns:a16="http://schemas.microsoft.com/office/drawing/2014/main" id="{3E983985-7F27-95C1-6C93-F8553174D477}"/>
+              </a:ext>
+            </a:extLst>
+          </p:cNvPr>
+          <p:cNvPicPr>
+            <a:picLocks noChangeAspect="1"/>
+          </p:cNvPicPr>
+          <p:nvPr/>
+        </p:nvPicPr>
+        <p:blipFill>
+          <a:blip r:embed="rId4"/>
+          <a:stretch>
+            <a:fillRect/>
+          </a:stretch>
+        </p:blipFill>
+        <p:spPr>
+          <a:xfrm>
+            <a:off x="326807" y="4932960"/>
+            <a:ext cx="3714259" cy="1780682"/>
+          </a:xfrm>
+          <a:prstGeom prst="rect">
+            <a:avLst/>
+          </a:prstGeom>
+        </p:spPr>
+      </p:pic>
+      <p:sp>
+        <p:nvSpPr>
+          <p:cNvPr id="7" name="TextBox 6">
+            <a:extLst>
+              <a:ext uri="{FF2B5EF4-FFF2-40B4-BE49-F238E27FC236}">
+                <a16:creationId xmlns:a16="http://schemas.microsoft.com/office/drawing/2014/main" id="{C079CF21-DB54-C8EC-0DCC-EF1F1BB5BE7A}"/>
+              </a:ext>
+            </a:extLst>
+          </p:cNvPr>
+          <p:cNvSpPr txBox="1"/>
+          <p:nvPr/>
+        </p:nvSpPr>
+        <p:spPr>
+          <a:xfrm>
+            <a:off x="4318502" y="5161582"/>
+            <a:ext cx="6980222" cy="1323439"/>
+          </a:xfrm>
+          <a:prstGeom prst="rect">
+            <a:avLst/>
+          </a:prstGeom>
+          <a:noFill/>
+        </p:spPr>
+        <p:txBody>
+          <a:bodyPr wrap="square" rtlCol="0">
+            <a:spAutoFit/>
+          </a:bodyPr>
+          <a:lstStyle/>
+          <a:p>
+            <a:pPr marL="285750" indent="-285750">
+              <a:buFontTx/>
+              <a:buChar char="-"/>
+            </a:pPr>
+            <a:r>
+              <a:rPr lang="en-GB" sz="2000" dirty="0"/>
+              <a:t>Cut off any unnecessary audio</a:t>
+            </a:r>
+          </a:p>
+          <a:p>
+            <a:pPr marL="285750" indent="-285750">
+              <a:buFontTx/>
+              <a:buChar char="-"/>
+            </a:pPr>
+            <a:r>
+              <a:rPr lang="en-GB" sz="2000" dirty="0"/>
+              <a:t>Applied Voice Isolation to lower background noise and switched to mono</a:t>
+            </a:r>
+          </a:p>
+          <a:p>
+            <a:pPr marL="285750" indent="-285750">
+              <a:buFontTx/>
+              <a:buChar char="-"/>
+            </a:pPr>
+            <a:r>
+              <a:rPr lang="en-GB" sz="2000" dirty="0"/>
+              <a:t>Split audio for characters into two separate audio files</a:t>
+            </a:r>
+          </a:p>
+        </p:txBody>
+      </p:sp>
+    </p:spTree>
+    <p:extLst>
+      <p:ext uri="{BB962C8B-B14F-4D97-AF65-F5344CB8AC3E}">
+        <p14:creationId xmlns:p14="http://schemas.microsoft.com/office/powerpoint/2010/main" val="1464115969"/>
+      </p:ext>
+    </p:extLst>
+  </p:cSld>
+  <p:clrMapOvr>
+    <a:masterClrMapping/>
+  </p:clrMapOvr>
+</p:sld>
+</file>
+
+<file path=ppt/slides/slide16.xml><?xml version="1.0" encoding="utf-8"?>
+<p:sld xmlns:a="http://schemas.openxmlformats.org/drawingml/2006/main" xmlns:r="http://schemas.openxmlformats.org/officeDocument/2006/relationships" xmlns:p="http://schemas.openxmlformats.org/presentationml/2006/main">
+  <p:cSld>
+    <p:spTree>
+      <p:nvGrpSpPr>
+        <p:cNvPr id="1" name="">
+          <a:extLst>
+            <a:ext uri="{FF2B5EF4-FFF2-40B4-BE49-F238E27FC236}">
+              <a16:creationId xmlns:a16="http://schemas.microsoft.com/office/drawing/2014/main" id="{A1B8F686-D6CF-D211-7B19-C0B1C0AC30C6}"/>
+            </a:ext>
+          </a:extLst>
+        </p:cNvPr>
+        <p:cNvGrpSpPr/>
+        <p:nvPr/>
+      </p:nvGrpSpPr>
+      <p:grpSpPr>
+        <a:xfrm>
+          <a:off x="0" y="0"/>
+          <a:ext cx="0" cy="0"/>
+          <a:chOff x="0" y="0"/>
+          <a:chExt cx="0" cy="0"/>
+        </a:xfrm>
+      </p:grpSpPr>
+      <p:sp>
+        <p:nvSpPr>
+          <p:cNvPr id="2" name="Title 1">
+            <a:extLst>
+              <a:ext uri="{FF2B5EF4-FFF2-40B4-BE49-F238E27FC236}">
+                <a16:creationId xmlns:a16="http://schemas.microsoft.com/office/drawing/2014/main" id="{694831D6-8F03-C470-A8D8-FE5039E9D89C}"/>
+              </a:ext>
+            </a:extLst>
+          </p:cNvPr>
+          <p:cNvSpPr>
+            <a:spLocks noGrp="1"/>
+          </p:cNvSpPr>
+          <p:nvPr>
+            <p:ph type="title"/>
+          </p:nvPr>
+        </p:nvSpPr>
+        <p:spPr>
+          <a:xfrm>
+            <a:off x="2231136" y="243332"/>
+            <a:ext cx="7729728" cy="883826"/>
+          </a:xfrm>
+        </p:spPr>
+        <p:txBody>
+          <a:bodyPr>
+            <a:normAutofit/>
+          </a:bodyPr>
+          <a:lstStyle/>
+          <a:p>
+            <a:r>
+              <a:rPr lang="en-GB" dirty="0"/>
+              <a:t>Dialogue (TROLL)</a:t>
+            </a:r>
+          </a:p>
+        </p:txBody>
+      </p:sp>
+      <p:pic>
+        <p:nvPicPr>
+          <p:cNvPr id="5" name="Picture 4">
+            <a:extLst>
+              <a:ext uri="{FF2B5EF4-FFF2-40B4-BE49-F238E27FC236}">
+                <a16:creationId xmlns:a16="http://schemas.microsoft.com/office/drawing/2014/main" id="{70ECD4E1-B043-9C36-D0B4-CE7A3E258CD6}"/>
+              </a:ext>
+            </a:extLst>
+          </p:cNvPr>
+          <p:cNvPicPr>
+            <a:picLocks noChangeAspect="1"/>
+          </p:cNvPicPr>
+          <p:nvPr/>
+        </p:nvPicPr>
+        <p:blipFill>
+          <a:blip r:embed="rId3">
+            <a:extLst>
+              <a:ext uri="{28A0092B-C50C-407E-A947-70E740481C1C}">
+                <a14:useLocalDpi xmlns:a14="http://schemas.microsoft.com/office/drawing/2010/main" val="0"/>
+              </a:ext>
+            </a:extLst>
+          </a:blip>
+          <a:srcRect t="56592"/>
+          <a:stretch>
+            <a:fillRect/>
+          </a:stretch>
+        </p:blipFill>
+        <p:spPr>
+          <a:xfrm>
+            <a:off x="144854" y="1221662"/>
+            <a:ext cx="11887201" cy="2274070"/>
+          </a:xfrm>
+          <a:prstGeom prst="rect">
+            <a:avLst/>
+          </a:prstGeom>
+        </p:spPr>
+      </p:pic>
+      <p:sp>
+        <p:nvSpPr>
+          <p:cNvPr id="3" name="TextBox 2">
+            <a:extLst>
+              <a:ext uri="{FF2B5EF4-FFF2-40B4-BE49-F238E27FC236}">
+                <a16:creationId xmlns:a16="http://schemas.microsoft.com/office/drawing/2014/main" id="{4C47FFD0-546F-4AF7-DD29-10B9742BE1D0}"/>
+              </a:ext>
+            </a:extLst>
+          </p:cNvPr>
+          <p:cNvSpPr txBox="1"/>
+          <p:nvPr/>
+        </p:nvSpPr>
+        <p:spPr>
+          <a:xfrm>
+            <a:off x="244444" y="3612333"/>
+            <a:ext cx="11398312" cy="646331"/>
+          </a:xfrm>
+          <a:prstGeom prst="rect">
+            <a:avLst/>
+          </a:prstGeom>
+          <a:noFill/>
+        </p:spPr>
+        <p:txBody>
+          <a:bodyPr wrap="square" rtlCol="0">
+            <a:spAutoFit/>
+          </a:bodyPr>
+          <a:lstStyle/>
+          <a:p>
+            <a:pPr marL="285750" indent="-285750">
+              <a:buFontTx/>
+              <a:buChar char="-"/>
+            </a:pPr>
+            <a:r>
+              <a:rPr lang="en-GB" dirty="0"/>
+              <a:t>Amplified audio by 5 dB to match female voice in volume</a:t>
+            </a:r>
+          </a:p>
+          <a:p>
+            <a:pPr marL="285750" indent="-285750">
+              <a:buFontTx/>
+              <a:buChar char="-"/>
+            </a:pPr>
+            <a:r>
+              <a:rPr lang="en-GB" dirty="0"/>
+              <a:t>Graphic EQ to enhance male voice and reduce background hum</a:t>
+            </a:r>
+          </a:p>
+        </p:txBody>
+      </p:sp>
+      <p:pic>
+        <p:nvPicPr>
+          <p:cNvPr id="4" name="Picture 3">
+            <a:extLst>
+              <a:ext uri="{FF2B5EF4-FFF2-40B4-BE49-F238E27FC236}">
+                <a16:creationId xmlns:a16="http://schemas.microsoft.com/office/drawing/2014/main" id="{D79B33C5-69F3-B5FF-2343-EF7A4717ADBE}"/>
+              </a:ext>
+            </a:extLst>
+          </p:cNvPr>
+          <p:cNvPicPr>
+            <a:picLocks noChangeAspect="1"/>
+          </p:cNvPicPr>
+          <p:nvPr/>
+        </p:nvPicPr>
+        <p:blipFill>
+          <a:blip r:embed="rId4"/>
+          <a:stretch>
+            <a:fillRect/>
+          </a:stretch>
+        </p:blipFill>
+        <p:spPr>
+          <a:xfrm>
+            <a:off x="329868" y="4375264"/>
+            <a:ext cx="4930195" cy="2322623"/>
+          </a:xfrm>
+          <a:prstGeom prst="rect">
+            <a:avLst/>
+          </a:prstGeom>
+        </p:spPr>
+      </p:pic>
+    </p:spTree>
+    <p:extLst>
+      <p:ext uri="{BB962C8B-B14F-4D97-AF65-F5344CB8AC3E}">
+        <p14:creationId xmlns:p14="http://schemas.microsoft.com/office/powerpoint/2010/main" val="988189382"/>
+      </p:ext>
+    </p:extLst>
+  </p:cSld>
+  <p:clrMapOvr>
+    <a:masterClrMapping/>
+  </p:clrMapOvr>
+</p:sld>
+</file>
+
+<file path=ppt/slides/slide17.xml><?xml version="1.0" encoding="utf-8"?>
+<p:sld xmlns:a="http://schemas.openxmlformats.org/drawingml/2006/main" xmlns:r="http://schemas.openxmlformats.org/officeDocument/2006/relationships" xmlns:p="http://schemas.openxmlformats.org/presentationml/2006/main">
+  <p:cSld>
+    <p:spTree>
+      <p:nvGrpSpPr>
+        <p:cNvPr id="1" name="">
+          <a:extLst>
+            <a:ext uri="{FF2B5EF4-FFF2-40B4-BE49-F238E27FC236}">
+              <a16:creationId xmlns:a16="http://schemas.microsoft.com/office/drawing/2014/main" id="{2B0A6F53-275F-4B5B-4575-23F3ACFECBA8}"/>
+            </a:ext>
+          </a:extLst>
+        </p:cNvPr>
+        <p:cNvGrpSpPr/>
+        <p:nvPr/>
+      </p:nvGrpSpPr>
+      <p:grpSpPr>
+        <a:xfrm>
+          <a:off x="0" y="0"/>
+          <a:ext cx="0" cy="0"/>
+          <a:chOff x="0" y="0"/>
+          <a:chExt cx="0" cy="0"/>
+        </a:xfrm>
+      </p:grpSpPr>
+      <p:sp>
+        <p:nvSpPr>
+          <p:cNvPr id="2" name="Title 1">
+            <a:extLst>
+              <a:ext uri="{FF2B5EF4-FFF2-40B4-BE49-F238E27FC236}">
+                <a16:creationId xmlns:a16="http://schemas.microsoft.com/office/drawing/2014/main" id="{9964B691-BABE-7788-AA7C-DD24950522BF}"/>
+              </a:ext>
+            </a:extLst>
+          </p:cNvPr>
+          <p:cNvSpPr>
+            <a:spLocks noGrp="1"/>
+          </p:cNvSpPr>
+          <p:nvPr>
+            <p:ph type="title"/>
+          </p:nvPr>
+        </p:nvSpPr>
+        <p:spPr>
+          <a:xfrm>
+            <a:off x="2231136" y="243332"/>
+            <a:ext cx="7729728" cy="883826"/>
+          </a:xfrm>
+        </p:spPr>
+        <p:txBody>
+          <a:bodyPr>
+            <a:normAutofit/>
+          </a:bodyPr>
+          <a:lstStyle/>
+          <a:p>
+            <a:r>
+              <a:rPr lang="en-GB" dirty="0"/>
+              <a:t>Dialogue (QUEEN)</a:t>
+            </a:r>
+          </a:p>
+        </p:txBody>
+      </p:sp>
+      <p:pic>
+        <p:nvPicPr>
+          <p:cNvPr id="4" name="Picture 3">
+            <a:extLst>
+              <a:ext uri="{FF2B5EF4-FFF2-40B4-BE49-F238E27FC236}">
+                <a16:creationId xmlns:a16="http://schemas.microsoft.com/office/drawing/2014/main" id="{BA47DE7A-B407-B19C-9748-C6CE4BC69F30}"/>
+              </a:ext>
+            </a:extLst>
+          </p:cNvPr>
+          <p:cNvPicPr>
+            <a:picLocks noChangeAspect="1"/>
+          </p:cNvPicPr>
+          <p:nvPr/>
+        </p:nvPicPr>
+        <p:blipFill>
+          <a:blip r:embed="rId3">
+            <a:extLst>
+              <a:ext uri="{28A0092B-C50C-407E-A947-70E740481C1C}">
+                <a14:useLocalDpi xmlns:a14="http://schemas.microsoft.com/office/drawing/2010/main" val="0"/>
+              </a:ext>
+            </a:extLst>
+          </a:blip>
+          <a:srcRect t="16175" b="43218"/>
+          <a:stretch>
+            <a:fillRect/>
+          </a:stretch>
+        </p:blipFill>
+        <p:spPr>
+          <a:xfrm>
+            <a:off x="63374" y="1315557"/>
+            <a:ext cx="11751398" cy="2103035"/>
+          </a:xfrm>
+          <a:prstGeom prst="rect">
+            <a:avLst/>
+          </a:prstGeom>
+        </p:spPr>
+      </p:pic>
+      <p:sp>
+        <p:nvSpPr>
+          <p:cNvPr id="6" name="TextBox 5">
+            <a:extLst>
+              <a:ext uri="{FF2B5EF4-FFF2-40B4-BE49-F238E27FC236}">
+                <a16:creationId xmlns:a16="http://schemas.microsoft.com/office/drawing/2014/main" id="{15C53977-F7CC-4352-527C-5750051D8835}"/>
+              </a:ext>
+            </a:extLst>
+          </p:cNvPr>
+          <p:cNvSpPr txBox="1"/>
+          <p:nvPr/>
+        </p:nvSpPr>
+        <p:spPr>
+          <a:xfrm>
+            <a:off x="226337" y="3576119"/>
+            <a:ext cx="11470740" cy="646331"/>
+          </a:xfrm>
+          <a:prstGeom prst="rect">
+            <a:avLst/>
+          </a:prstGeom>
+          <a:noFill/>
+        </p:spPr>
+        <p:txBody>
+          <a:bodyPr wrap="square" rtlCol="0">
+            <a:spAutoFit/>
+          </a:bodyPr>
+          <a:lstStyle/>
+          <a:p>
+            <a:pPr marL="285750" indent="-285750">
+              <a:buFontTx/>
+              <a:buChar char="-"/>
+            </a:pPr>
+            <a:r>
+              <a:rPr lang="en-GB" dirty="0"/>
+              <a:t>Graphic EQ used to enhance female voice and remove background hum</a:t>
+            </a:r>
+          </a:p>
+          <a:p>
+            <a:pPr marL="285750" indent="-285750">
+              <a:buFontTx/>
+              <a:buChar char="-"/>
+            </a:pPr>
+            <a:r>
+              <a:rPr lang="en-GB" dirty="0"/>
+              <a:t>Compressed volume of the loud parts to remove peaking of the microphone</a:t>
+            </a:r>
+          </a:p>
+        </p:txBody>
+      </p:sp>
+      <p:pic>
+        <p:nvPicPr>
+          <p:cNvPr id="7" name="Picture 6">
+            <a:extLst>
+              <a:ext uri="{FF2B5EF4-FFF2-40B4-BE49-F238E27FC236}">
+                <a16:creationId xmlns:a16="http://schemas.microsoft.com/office/drawing/2014/main" id="{2221E637-EE8E-D42E-4972-C3F141B86A08}"/>
+              </a:ext>
+            </a:extLst>
+          </p:cNvPr>
+          <p:cNvPicPr>
+            <a:picLocks noChangeAspect="1"/>
+          </p:cNvPicPr>
+          <p:nvPr/>
+        </p:nvPicPr>
+        <p:blipFill>
+          <a:blip r:embed="rId4"/>
+          <a:stretch>
+            <a:fillRect/>
+          </a:stretch>
+        </p:blipFill>
+        <p:spPr>
+          <a:xfrm>
+            <a:off x="516048" y="4363678"/>
+            <a:ext cx="4572000" cy="2188096"/>
+          </a:xfrm>
+          <a:prstGeom prst="rect">
+            <a:avLst/>
+          </a:prstGeom>
+        </p:spPr>
+      </p:pic>
+      <p:pic>
+        <p:nvPicPr>
+          <p:cNvPr id="8" name="Picture 7">
+            <a:extLst>
+              <a:ext uri="{FF2B5EF4-FFF2-40B4-BE49-F238E27FC236}">
+                <a16:creationId xmlns:a16="http://schemas.microsoft.com/office/drawing/2014/main" id="{85B388AF-321F-0713-D6F4-3FDD5C51A6AA}"/>
+              </a:ext>
+            </a:extLst>
+          </p:cNvPr>
+          <p:cNvPicPr>
+            <a:picLocks noChangeAspect="1"/>
+          </p:cNvPicPr>
+          <p:nvPr/>
+        </p:nvPicPr>
+        <p:blipFill>
+          <a:blip r:embed="rId5"/>
+          <a:srcRect t="59747"/>
+          <a:stretch>
+            <a:fillRect/>
+          </a:stretch>
+        </p:blipFill>
+        <p:spPr>
+          <a:xfrm>
+            <a:off x="6563683" y="4454305"/>
+            <a:ext cx="4423458" cy="2097469"/>
+          </a:xfrm>
+          <a:prstGeom prst="rect">
+            <a:avLst/>
+          </a:prstGeom>
+        </p:spPr>
+      </p:pic>
+    </p:spTree>
+    <p:extLst>
+      <p:ext uri="{BB962C8B-B14F-4D97-AF65-F5344CB8AC3E}">
+        <p14:creationId xmlns:p14="http://schemas.microsoft.com/office/powerpoint/2010/main" val="2370671851"/>
+      </p:ext>
+    </p:extLst>
+  </p:cSld>
+  <p:clrMapOvr>
+    <a:masterClrMapping/>
+  </p:clrMapOvr>
+</p:sld>
+</file>
+
+<file path=ppt/slides/slide18.xml><?xml version="1.0" encoding="utf-8"?>
+<p:sld xmlns:a="http://schemas.openxmlformats.org/drawingml/2006/main" xmlns:r="http://schemas.openxmlformats.org/officeDocument/2006/relationships" xmlns:p="http://schemas.openxmlformats.org/presentationml/2006/main">
+  <p:cSld>
+    <p:spTree>
+      <p:nvGrpSpPr>
+        <p:cNvPr id="1" name="">
+          <a:extLst>
+            <a:ext uri="{FF2B5EF4-FFF2-40B4-BE49-F238E27FC236}">
+              <a16:creationId xmlns:a16="http://schemas.microsoft.com/office/drawing/2014/main" id="{05A3A668-FF23-09A6-A7D0-A5473BEB5B9D}"/>
+            </a:ext>
+          </a:extLst>
+        </p:cNvPr>
+        <p:cNvGrpSpPr/>
+        <p:nvPr/>
+      </p:nvGrpSpPr>
+      <p:grpSpPr>
+        <a:xfrm>
+          <a:off x="0" y="0"/>
+          <a:ext cx="0" cy="0"/>
+          <a:chOff x="0" y="0"/>
+          <a:chExt cx="0" cy="0"/>
+        </a:xfrm>
+      </p:grpSpPr>
+      <p:sp>
+        <p:nvSpPr>
+          <p:cNvPr id="2" name="Title 1">
+            <a:extLst>
+              <a:ext uri="{FF2B5EF4-FFF2-40B4-BE49-F238E27FC236}">
+                <a16:creationId xmlns:a16="http://schemas.microsoft.com/office/drawing/2014/main" id="{9A4743DD-B790-21AF-296B-BFCFE87ABC4C}"/>
+              </a:ext>
+            </a:extLst>
+          </p:cNvPr>
+          <p:cNvSpPr>
+            <a:spLocks noGrp="1"/>
+          </p:cNvSpPr>
+          <p:nvPr>
+            <p:ph type="title"/>
+          </p:nvPr>
+        </p:nvSpPr>
+        <p:spPr>
+          <a:xfrm>
+            <a:off x="2231136" y="243332"/>
+            <a:ext cx="7729728" cy="883826"/>
+          </a:xfrm>
+        </p:spPr>
+        <p:txBody>
+          <a:bodyPr>
+            <a:normAutofit/>
+          </a:bodyPr>
+          <a:lstStyle/>
+          <a:p>
+            <a:r>
+              <a:rPr lang="en-GB" dirty="0"/>
+              <a:t>Dialogue (IMPLEMENTATION)</a:t>
+            </a:r>
+          </a:p>
+        </p:txBody>
+      </p:sp>
+      <p:pic>
+        <p:nvPicPr>
+          <p:cNvPr id="5" name="Picture 4">
+            <a:extLst>
+              <a:ext uri="{FF2B5EF4-FFF2-40B4-BE49-F238E27FC236}">
+                <a16:creationId xmlns:a16="http://schemas.microsoft.com/office/drawing/2014/main" id="{E3BCC425-F57E-01F5-9A34-81A6076F84E5}"/>
+              </a:ext>
+            </a:extLst>
+          </p:cNvPr>
+          <p:cNvPicPr>
+            <a:picLocks noChangeAspect="1"/>
+          </p:cNvPicPr>
+          <p:nvPr/>
+        </p:nvPicPr>
+        <p:blipFill>
+          <a:blip r:embed="rId3"/>
+          <a:srcRect t="3548" b="12211"/>
+          <a:stretch>
+            <a:fillRect/>
+          </a:stretch>
+        </p:blipFill>
+        <p:spPr>
+          <a:xfrm>
+            <a:off x="306677" y="1294646"/>
+            <a:ext cx="3553703" cy="2451782"/>
+          </a:xfrm>
+          <a:prstGeom prst="rect">
+            <a:avLst/>
+          </a:prstGeom>
+        </p:spPr>
+      </p:pic>
+      <p:pic>
+        <p:nvPicPr>
+          <p:cNvPr id="10" name="Picture 9">
+            <a:extLst>
+              <a:ext uri="{FF2B5EF4-FFF2-40B4-BE49-F238E27FC236}">
+                <a16:creationId xmlns:a16="http://schemas.microsoft.com/office/drawing/2014/main" id="{0A7679F6-9358-04D4-6909-BBFD248CDFC7}"/>
+              </a:ext>
+            </a:extLst>
+          </p:cNvPr>
+          <p:cNvPicPr>
+            <a:picLocks noChangeAspect="1"/>
+          </p:cNvPicPr>
+          <p:nvPr/>
+        </p:nvPicPr>
+        <p:blipFill>
+          <a:blip r:embed="rId4"/>
+          <a:stretch>
+            <a:fillRect/>
+          </a:stretch>
+        </p:blipFill>
+        <p:spPr>
+          <a:xfrm>
+            <a:off x="9617118" y="1294646"/>
+            <a:ext cx="2268205" cy="5436606"/>
+          </a:xfrm>
+          <a:prstGeom prst="rect">
+            <a:avLst/>
+          </a:prstGeom>
+        </p:spPr>
+      </p:pic>
+      <p:pic>
+        <p:nvPicPr>
+          <p:cNvPr id="12" name="Picture 11">
+            <a:extLst>
+              <a:ext uri="{FF2B5EF4-FFF2-40B4-BE49-F238E27FC236}">
+                <a16:creationId xmlns:a16="http://schemas.microsoft.com/office/drawing/2014/main" id="{72555D5E-E503-24EF-FC53-251C0B1776B5}"/>
+              </a:ext>
+            </a:extLst>
+          </p:cNvPr>
+          <p:cNvPicPr>
+            <a:picLocks noChangeAspect="1"/>
+          </p:cNvPicPr>
+          <p:nvPr/>
+        </p:nvPicPr>
+        <p:blipFill>
+          <a:blip r:embed="rId5"/>
+          <a:stretch>
+            <a:fillRect/>
+          </a:stretch>
+        </p:blipFill>
+        <p:spPr>
+          <a:xfrm>
+            <a:off x="7348912" y="1294646"/>
+            <a:ext cx="2268206" cy="5419669"/>
+          </a:xfrm>
+          <a:prstGeom prst="rect">
+            <a:avLst/>
+          </a:prstGeom>
+        </p:spPr>
+      </p:pic>
+      <p:sp>
+        <p:nvSpPr>
+          <p:cNvPr id="13" name="Rectangle 12">
+            <a:extLst>
+              <a:ext uri="{FF2B5EF4-FFF2-40B4-BE49-F238E27FC236}">
+                <a16:creationId xmlns:a16="http://schemas.microsoft.com/office/drawing/2014/main" id="{F903BD6D-7DCB-12CF-177A-DD1DBB5C83B1}"/>
+              </a:ext>
+            </a:extLst>
+          </p:cNvPr>
+          <p:cNvSpPr/>
+          <p:nvPr/>
+        </p:nvSpPr>
+        <p:spPr>
+          <a:xfrm>
+            <a:off x="3860380" y="1294646"/>
+            <a:ext cx="3001517" cy="2451782"/>
+          </a:xfrm>
+          <a:prstGeom prst="rect">
+            <a:avLst/>
+          </a:prstGeom>
+          <a:solidFill>
+            <a:srgbClr val="92D050"/>
+          </a:solidFill>
+        </p:spPr>
+        <p:style>
+          <a:lnRef idx="2">
+            <a:schemeClr val="accent1">
+              <a:shade val="15000"/>
+            </a:schemeClr>
+          </a:lnRef>
+          <a:fillRef idx="1">
+            <a:schemeClr val="accent1"/>
+          </a:fillRef>
+          <a:effectRef idx="0">
+            <a:schemeClr val="accent1"/>
+          </a:effectRef>
+          <a:fontRef idx="minor">
+            <a:schemeClr val="lt1"/>
+          </a:fontRef>
+        </p:style>
+        <p:txBody>
+          <a:bodyPr rtlCol="0" anchor="ctr"/>
+          <a:lstStyle/>
+          <a:p>
+            <a:pPr algn="ctr"/>
+            <a:r>
+              <a:rPr lang="en-GB" sz="2000" dirty="0"/>
+              <a:t>Range which audio can be heard </a:t>
+            </a:r>
+          </a:p>
+          <a:p>
+            <a:pPr algn="ctr"/>
+            <a:r>
+              <a:rPr lang="en-GB" sz="2000" dirty="0"/>
+              <a:t>(slightly larger than slime range)</a:t>
+            </a:r>
+          </a:p>
+        </p:txBody>
+      </p:sp>
+      <p:sp>
+        <p:nvSpPr>
+          <p:cNvPr id="14" name="TextBox 13">
+            <a:extLst>
+              <a:ext uri="{FF2B5EF4-FFF2-40B4-BE49-F238E27FC236}">
+                <a16:creationId xmlns:a16="http://schemas.microsoft.com/office/drawing/2014/main" id="{E89606A4-CF7D-D8DA-4C5D-52C8091EA262}"/>
+              </a:ext>
+            </a:extLst>
+          </p:cNvPr>
+          <p:cNvSpPr txBox="1"/>
+          <p:nvPr/>
+        </p:nvSpPr>
+        <p:spPr>
+          <a:xfrm>
+            <a:off x="371192" y="4037846"/>
+            <a:ext cx="6490705" cy="1938992"/>
+          </a:xfrm>
+          <a:prstGeom prst="rect">
+            <a:avLst/>
+          </a:prstGeom>
+          <a:noFill/>
+        </p:spPr>
+        <p:txBody>
+          <a:bodyPr wrap="square" rtlCol="0">
+            <a:spAutoFit/>
+          </a:bodyPr>
+          <a:lstStyle/>
+          <a:p>
+            <a:pPr marL="285750" indent="-285750">
+              <a:buFontTx/>
+              <a:buChar char="-"/>
+            </a:pPr>
+            <a:r>
+              <a:rPr lang="en-GB" sz="2000" dirty="0"/>
+              <a:t>2 separate audio sources, one for queen one for king</a:t>
+            </a:r>
+          </a:p>
+          <a:p>
+            <a:pPr marL="285750" indent="-285750">
+              <a:buFontTx/>
+              <a:buChar char="-"/>
+            </a:pPr>
+            <a:endParaRPr lang="en-GB" sz="2000" dirty="0"/>
+          </a:p>
+          <a:p>
+            <a:pPr marL="285750" indent="-285750">
+              <a:buFontTx/>
+              <a:buChar char="-"/>
+            </a:pPr>
+            <a:r>
+              <a:rPr lang="en-GB" sz="2000" dirty="0"/>
+              <a:t>3D spatial blend with custom roll off to create localised sound</a:t>
+            </a:r>
+          </a:p>
+          <a:p>
+            <a:pPr marL="285750" indent="-285750">
+              <a:buFontTx/>
+              <a:buChar char="-"/>
+            </a:pPr>
+            <a:endParaRPr lang="en-GB" sz="2000" dirty="0"/>
+          </a:p>
+          <a:p>
+            <a:pPr marL="285750" indent="-285750">
+              <a:buFontTx/>
+              <a:buChar char="-"/>
+            </a:pPr>
+            <a:r>
+              <a:rPr lang="en-GB" sz="2000" dirty="0"/>
+              <a:t>Queen has lower volume as dialogue ended up louder</a:t>
+            </a:r>
+          </a:p>
+        </p:txBody>
+      </p:sp>
+    </p:spTree>
+    <p:extLst>
+      <p:ext uri="{BB962C8B-B14F-4D97-AF65-F5344CB8AC3E}">
+        <p14:creationId xmlns:p14="http://schemas.microsoft.com/office/powerpoint/2010/main" val="1876149289"/>
+      </p:ext>
+    </p:extLst>
+  </p:cSld>
+  <p:clrMapOvr>
+    <a:masterClrMapping/>
+  </p:clrMapOvr>
+</p:sld>
+</file>
+
+<file path=ppt/slides/slide19.xml><?xml version="1.0" encoding="utf-8"?>
+<p:sld xmlns:a="http://schemas.openxmlformats.org/drawingml/2006/main" xmlns:r="http://schemas.openxmlformats.org/officeDocument/2006/relationships" xmlns:p="http://schemas.openxmlformats.org/presentationml/2006/main">
+  <p:cSld>
+    <p:spTree>
+      <p:nvGrpSpPr>
+        <p:cNvPr id="1" name=""/>
+        <p:cNvGrpSpPr/>
+        <p:nvPr/>
+      </p:nvGrpSpPr>
+      <p:grpSpPr>
+        <a:xfrm>
+          <a:off x="0" y="0"/>
+          <a:ext cx="0" cy="0"/>
+          <a:chOff x="0" y="0"/>
+          <a:chExt cx="0" cy="0"/>
+        </a:xfrm>
+      </p:grpSpPr>
+      <p:sp>
+        <p:nvSpPr>
+          <p:cNvPr id="2" name="Title 1">
+            <a:extLst>
+              <a:ext uri="{FF2B5EF4-FFF2-40B4-BE49-F238E27FC236}">
+                <a16:creationId xmlns:a16="http://schemas.microsoft.com/office/drawing/2014/main" id="{4A669AEC-2DF0-2255-F587-D88A4590DD2B}"/>
+              </a:ext>
+            </a:extLst>
+          </p:cNvPr>
+          <p:cNvSpPr>
+            <a:spLocks noGrp="1"/>
+          </p:cNvSpPr>
+          <p:nvPr>
+            <p:ph type="title"/>
+          </p:nvPr>
+        </p:nvSpPr>
+        <p:spPr>
+          <a:xfrm>
+            <a:off x="2231136" y="123444"/>
+            <a:ext cx="7729728" cy="994529"/>
+          </a:xfrm>
+        </p:spPr>
+        <p:txBody>
+          <a:bodyPr/>
+          <a:lstStyle/>
+          <a:p>
+            <a:r>
+              <a:rPr lang="en-GB" dirty="0"/>
+              <a:t>Sound ORIGINS</a:t>
+            </a:r>
+          </a:p>
+        </p:txBody>
+      </p:sp>
+      <p:sp>
+        <p:nvSpPr>
+          <p:cNvPr id="3" name="Content Placeholder 2">
+            <a:extLst>
+              <a:ext uri="{FF2B5EF4-FFF2-40B4-BE49-F238E27FC236}">
+                <a16:creationId xmlns:a16="http://schemas.microsoft.com/office/drawing/2014/main" id="{077BADC9-E785-AB9C-2915-D6DE1879AC85}"/>
+              </a:ext>
+            </a:extLst>
+          </p:cNvPr>
+          <p:cNvSpPr>
+            <a:spLocks noGrp="1"/>
+          </p:cNvSpPr>
+          <p:nvPr>
+            <p:ph idx="1"/>
+          </p:nvPr>
+        </p:nvSpPr>
+        <p:spPr>
+          <a:xfrm>
+            <a:off x="2093976" y="1405771"/>
+            <a:ext cx="7729728" cy="3101983"/>
+          </a:xfrm>
+        </p:spPr>
+        <p:txBody>
+          <a:bodyPr/>
+          <a:lstStyle/>
+          <a:p>
+            <a:r>
+              <a:rPr lang="en-GB" sz="2400" dirty="0"/>
+              <a:t>Most sounds were recorded by me and are listed on the Recording Details Template</a:t>
+            </a:r>
+          </a:p>
+          <a:p>
+            <a:pPr marL="0" indent="0">
+              <a:buNone/>
+            </a:pPr>
+            <a:endParaRPr lang="en-GB" sz="2400" dirty="0"/>
+          </a:p>
+          <a:p>
+            <a:r>
+              <a:rPr lang="en-GB" sz="2400" dirty="0"/>
+              <a:t>The Laugh.ogg Sound Effect used for the slime laughing can be found here: </a:t>
+            </a:r>
+            <a:r>
+              <a:rPr lang="en-GB" sz="2400" u="sng" dirty="0">
+                <a:hlinkClick r:id="rId2"/>
+              </a:rPr>
+              <a:t>https://opengameart.org/content/tiny-creatures-sounds</a:t>
+            </a:r>
+            <a:endParaRPr lang="en-GB" sz="2400" dirty="0"/>
+          </a:p>
+          <a:p>
+            <a:endParaRPr lang="en-GB" dirty="0"/>
+          </a:p>
+        </p:txBody>
+      </p:sp>
+    </p:spTree>
+    <p:extLst>
+      <p:ext uri="{BB962C8B-B14F-4D97-AF65-F5344CB8AC3E}">
+        <p14:creationId xmlns:p14="http://schemas.microsoft.com/office/powerpoint/2010/main" val="984374411"/>
+      </p:ext>
+    </p:extLst>
+  </p:cSld>
+  <p:clrMapOvr>
+    <a:masterClrMapping/>
+  </p:clrMapOvr>
+</p:sld>
+</file>
+
 <file path=ppt/slides/slide2.xml><?xml version="1.0" encoding="utf-8"?>
 <p:sld xmlns:a="http://schemas.openxmlformats.org/drawingml/2006/main" xmlns:r="http://schemas.openxmlformats.org/officeDocument/2006/relationships" xmlns:p="http://schemas.openxmlformats.org/presentationml/2006/main">
   <p:cSld>
@@ -4547,6 +8958,565 @@
     <p:extLst>
       <p:ext uri="{BB962C8B-B14F-4D97-AF65-F5344CB8AC3E}">
         <p14:creationId xmlns:p14="http://schemas.microsoft.com/office/powerpoint/2010/main" val="203525063"/>
+      </p:ext>
+    </p:extLst>
+  </p:cSld>
+  <p:clrMapOvr>
+    <a:masterClrMapping/>
+  </p:clrMapOvr>
+</p:sld>
+</file>
+
+<file path=ppt/slides/slide20.xml><?xml version="1.0" encoding="utf-8"?>
+<p:sld xmlns:a="http://schemas.openxmlformats.org/drawingml/2006/main" xmlns:r="http://schemas.openxmlformats.org/officeDocument/2006/relationships" xmlns:p="http://schemas.openxmlformats.org/presentationml/2006/main">
+  <p:cSld>
+    <p:spTree>
+      <p:nvGrpSpPr>
+        <p:cNvPr id="1" name="">
+          <a:extLst>
+            <a:ext uri="{FF2B5EF4-FFF2-40B4-BE49-F238E27FC236}">
+              <a16:creationId xmlns:a16="http://schemas.microsoft.com/office/drawing/2014/main" id="{7C03BD2E-B010-879D-7CDC-F403EDB89F5B}"/>
+            </a:ext>
+          </a:extLst>
+        </p:cNvPr>
+        <p:cNvGrpSpPr/>
+        <p:nvPr/>
+      </p:nvGrpSpPr>
+      <p:grpSpPr>
+        <a:xfrm>
+          <a:off x="0" y="0"/>
+          <a:ext cx="0" cy="0"/>
+          <a:chOff x="0" y="0"/>
+          <a:chExt cx="0" cy="0"/>
+        </a:xfrm>
+      </p:grpSpPr>
+      <p:sp>
+        <p:nvSpPr>
+          <p:cNvPr id="2" name="Title 1">
+            <a:extLst>
+              <a:ext uri="{FF2B5EF4-FFF2-40B4-BE49-F238E27FC236}">
+                <a16:creationId xmlns:a16="http://schemas.microsoft.com/office/drawing/2014/main" id="{A22BAA2A-442E-3E81-F11C-F674141CAC4E}"/>
+              </a:ext>
+            </a:extLst>
+          </p:cNvPr>
+          <p:cNvSpPr>
+            <a:spLocks noGrp="1"/>
+          </p:cNvSpPr>
+          <p:nvPr>
+            <p:ph type="title"/>
+          </p:nvPr>
+        </p:nvSpPr>
+        <p:spPr>
+          <a:xfrm>
+            <a:off x="2231136" y="123444"/>
+            <a:ext cx="7729728" cy="994529"/>
+          </a:xfrm>
+        </p:spPr>
+        <p:txBody>
+          <a:bodyPr/>
+          <a:lstStyle/>
+          <a:p>
+            <a:r>
+              <a:rPr lang="en-GB" dirty="0"/>
+              <a:t>Hand-MADE Sounds</a:t>
+            </a:r>
+          </a:p>
+        </p:txBody>
+      </p:sp>
+      <p:graphicFrame>
+        <p:nvGraphicFramePr>
+          <p:cNvPr id="3" name="Table 2">
+            <a:extLst>
+              <a:ext uri="{FF2B5EF4-FFF2-40B4-BE49-F238E27FC236}">
+                <a16:creationId xmlns:a16="http://schemas.microsoft.com/office/drawing/2014/main" id="{C8D99F40-09B5-1ABF-60F3-D26EF71F028B}"/>
+              </a:ext>
+            </a:extLst>
+          </p:cNvPr>
+          <p:cNvGraphicFramePr>
+            <a:graphicFrameLocks noGrp="1"/>
+          </p:cNvGraphicFramePr>
+          <p:nvPr>
+            <p:extLst>
+              <p:ext uri="{D42A27DB-BD31-4B8C-83A1-F6EECF244321}">
+                <p14:modId xmlns:p14="http://schemas.microsoft.com/office/powerpoint/2010/main" val="3219516698"/>
+              </p:ext>
+            </p:extLst>
+          </p:nvPr>
+        </p:nvGraphicFramePr>
+        <p:xfrm>
+          <a:off x="540191" y="1398719"/>
+          <a:ext cx="5429062" cy="4481590"/>
+        </p:xfrm>
+        <a:graphic>
+          <a:graphicData uri="http://schemas.openxmlformats.org/drawingml/2006/table">
+            <a:tbl>
+              <a:tblPr firstRow="1" bandRow="1">
+                <a:tableStyleId>{7DF18680-E054-41AD-8BC1-D1AEF772440D}</a:tableStyleId>
+              </a:tblPr>
+              <a:tblGrid>
+                <a:gridCol w="2692736">
+                  <a:extLst>
+                    <a:ext uri="{9D8B030D-6E8A-4147-A177-3AD203B41FA5}">
+                      <a16:colId xmlns:a16="http://schemas.microsoft.com/office/drawing/2014/main" val="181970994"/>
+                    </a:ext>
+                  </a:extLst>
+                </a:gridCol>
+                <a:gridCol w="2736326">
+                  <a:extLst>
+                    <a:ext uri="{9D8B030D-6E8A-4147-A177-3AD203B41FA5}">
+                      <a16:colId xmlns:a16="http://schemas.microsoft.com/office/drawing/2014/main" val="628041768"/>
+                    </a:ext>
+                  </a:extLst>
+                </a:gridCol>
+              </a:tblGrid>
+              <a:tr h="384814">
+                <a:tc>
+                  <a:txBody>
+                    <a:bodyPr/>
+                    <a:lstStyle/>
+                    <a:p>
+                      <a:r>
+                        <a:rPr lang="en-GB" dirty="0"/>
+                        <a:t>File Name</a:t>
+                      </a:r>
+                    </a:p>
+                  </a:txBody>
+                  <a:tcPr/>
+                </a:tc>
+                <a:tc>
+                  <a:txBody>
+                    <a:bodyPr/>
+                    <a:lstStyle/>
+                    <a:p>
+                      <a:r>
+                        <a:rPr lang="en-GB" dirty="0"/>
+                        <a:t>How sound was created</a:t>
+                      </a:r>
+                    </a:p>
+                  </a:txBody>
+                  <a:tcPr/>
+                </a:tc>
+                <a:extLst>
+                  <a:ext uri="{0D108BD9-81ED-4DB2-BD59-A6C34878D82A}">
+                    <a16:rowId xmlns:a16="http://schemas.microsoft.com/office/drawing/2014/main" val="1037850769"/>
+                  </a:ext>
+                </a:extLst>
+              </a:tr>
+              <a:tr h="682796">
+                <a:tc>
+                  <a:txBody>
+                    <a:bodyPr/>
+                    <a:lstStyle/>
+                    <a:p>
+                      <a:endParaRPr lang="en-GB" dirty="0"/>
+                    </a:p>
+                  </a:txBody>
+                  <a:tcPr/>
+                </a:tc>
+                <a:tc>
+                  <a:txBody>
+                    <a:bodyPr/>
+                    <a:lstStyle/>
+                    <a:p>
+                      <a:endParaRPr lang="en-GB"/>
+                    </a:p>
+                  </a:txBody>
+                  <a:tcPr/>
+                </a:tc>
+                <a:extLst>
+                  <a:ext uri="{0D108BD9-81ED-4DB2-BD59-A6C34878D82A}">
+                    <a16:rowId xmlns:a16="http://schemas.microsoft.com/office/drawing/2014/main" val="1982520596"/>
+                  </a:ext>
+                </a:extLst>
+              </a:tr>
+              <a:tr h="682796">
+                <a:tc>
+                  <a:txBody>
+                    <a:bodyPr/>
+                    <a:lstStyle/>
+                    <a:p>
+                      <a:endParaRPr lang="en-GB" dirty="0"/>
+                    </a:p>
+                  </a:txBody>
+                  <a:tcPr/>
+                </a:tc>
+                <a:tc>
+                  <a:txBody>
+                    <a:bodyPr/>
+                    <a:lstStyle/>
+                    <a:p>
+                      <a:endParaRPr lang="en-GB"/>
+                    </a:p>
+                  </a:txBody>
+                  <a:tcPr/>
+                </a:tc>
+                <a:extLst>
+                  <a:ext uri="{0D108BD9-81ED-4DB2-BD59-A6C34878D82A}">
+                    <a16:rowId xmlns:a16="http://schemas.microsoft.com/office/drawing/2014/main" val="1544250371"/>
+                  </a:ext>
+                </a:extLst>
+              </a:tr>
+              <a:tr h="682796">
+                <a:tc>
+                  <a:txBody>
+                    <a:bodyPr/>
+                    <a:lstStyle/>
+                    <a:p>
+                      <a:endParaRPr lang="en-GB"/>
+                    </a:p>
+                  </a:txBody>
+                  <a:tcPr/>
+                </a:tc>
+                <a:tc>
+                  <a:txBody>
+                    <a:bodyPr/>
+                    <a:lstStyle/>
+                    <a:p>
+                      <a:endParaRPr lang="en-GB" dirty="0"/>
+                    </a:p>
+                  </a:txBody>
+                  <a:tcPr/>
+                </a:tc>
+                <a:extLst>
+                  <a:ext uri="{0D108BD9-81ED-4DB2-BD59-A6C34878D82A}">
+                    <a16:rowId xmlns:a16="http://schemas.microsoft.com/office/drawing/2014/main" val="336221061"/>
+                  </a:ext>
+                </a:extLst>
+              </a:tr>
+              <a:tr h="682796">
+                <a:tc>
+                  <a:txBody>
+                    <a:bodyPr/>
+                    <a:lstStyle/>
+                    <a:p>
+                      <a:endParaRPr lang="en-GB"/>
+                    </a:p>
+                  </a:txBody>
+                  <a:tcPr/>
+                </a:tc>
+                <a:tc>
+                  <a:txBody>
+                    <a:bodyPr/>
+                    <a:lstStyle/>
+                    <a:p>
+                      <a:endParaRPr lang="en-GB"/>
+                    </a:p>
+                  </a:txBody>
+                  <a:tcPr/>
+                </a:tc>
+                <a:extLst>
+                  <a:ext uri="{0D108BD9-81ED-4DB2-BD59-A6C34878D82A}">
+                    <a16:rowId xmlns:a16="http://schemas.microsoft.com/office/drawing/2014/main" val="2088809235"/>
+                  </a:ext>
+                </a:extLst>
+              </a:tr>
+              <a:tr h="682796">
+                <a:tc>
+                  <a:txBody>
+                    <a:bodyPr/>
+                    <a:lstStyle/>
+                    <a:p>
+                      <a:endParaRPr lang="en-GB" dirty="0"/>
+                    </a:p>
+                  </a:txBody>
+                  <a:tcPr/>
+                </a:tc>
+                <a:tc>
+                  <a:txBody>
+                    <a:bodyPr/>
+                    <a:lstStyle/>
+                    <a:p>
+                      <a:endParaRPr lang="en-GB" dirty="0"/>
+                    </a:p>
+                  </a:txBody>
+                  <a:tcPr/>
+                </a:tc>
+                <a:extLst>
+                  <a:ext uri="{0D108BD9-81ED-4DB2-BD59-A6C34878D82A}">
+                    <a16:rowId xmlns:a16="http://schemas.microsoft.com/office/drawing/2014/main" val="3040528228"/>
+                  </a:ext>
+                </a:extLst>
+              </a:tr>
+              <a:tr h="682796">
+                <a:tc>
+                  <a:txBody>
+                    <a:bodyPr/>
+                    <a:lstStyle/>
+                    <a:p>
+                      <a:endParaRPr lang="en-GB" dirty="0"/>
+                    </a:p>
+                  </a:txBody>
+                  <a:tcPr/>
+                </a:tc>
+                <a:tc>
+                  <a:txBody>
+                    <a:bodyPr/>
+                    <a:lstStyle/>
+                    <a:p>
+                      <a:endParaRPr lang="en-GB" dirty="0"/>
+                    </a:p>
+                  </a:txBody>
+                  <a:tcPr/>
+                </a:tc>
+                <a:extLst>
+                  <a:ext uri="{0D108BD9-81ED-4DB2-BD59-A6C34878D82A}">
+                    <a16:rowId xmlns:a16="http://schemas.microsoft.com/office/drawing/2014/main" val="305773528"/>
+                  </a:ext>
+                </a:extLst>
+              </a:tr>
+            </a:tbl>
+          </a:graphicData>
+        </a:graphic>
+      </p:graphicFrame>
+      <p:graphicFrame>
+        <p:nvGraphicFramePr>
+          <p:cNvPr id="4" name="Table 3">
+            <a:extLst>
+              <a:ext uri="{FF2B5EF4-FFF2-40B4-BE49-F238E27FC236}">
+                <a16:creationId xmlns:a16="http://schemas.microsoft.com/office/drawing/2014/main" id="{393C45D4-BFD8-41B4-B981-0F6CE0CDFA7D}"/>
+              </a:ext>
+            </a:extLst>
+          </p:cNvPr>
+          <p:cNvGraphicFramePr>
+            <a:graphicFrameLocks noGrp="1"/>
+          </p:cNvGraphicFramePr>
+          <p:nvPr>
+            <p:extLst>
+              <p:ext uri="{D42A27DB-BD31-4B8C-83A1-F6EECF244321}">
+                <p14:modId xmlns:p14="http://schemas.microsoft.com/office/powerpoint/2010/main" val="2694835298"/>
+              </p:ext>
+            </p:extLst>
+          </p:nvPr>
+        </p:nvGraphicFramePr>
+        <p:xfrm>
+          <a:off x="6095999" y="1420077"/>
+          <a:ext cx="5429062" cy="4462536"/>
+        </p:xfrm>
+        <a:graphic>
+          <a:graphicData uri="http://schemas.openxmlformats.org/drawingml/2006/table">
+            <a:tbl>
+              <a:tblPr firstRow="1" bandRow="1">
+                <a:tableStyleId>{7DF18680-E054-41AD-8BC1-D1AEF772440D}</a:tableStyleId>
+              </a:tblPr>
+              <a:tblGrid>
+                <a:gridCol w="2714531">
+                  <a:extLst>
+                    <a:ext uri="{9D8B030D-6E8A-4147-A177-3AD203B41FA5}">
+                      <a16:colId xmlns:a16="http://schemas.microsoft.com/office/drawing/2014/main" val="181970994"/>
+                    </a:ext>
+                  </a:extLst>
+                </a:gridCol>
+                <a:gridCol w="2714531">
+                  <a:extLst>
+                    <a:ext uri="{9D8B030D-6E8A-4147-A177-3AD203B41FA5}">
+                      <a16:colId xmlns:a16="http://schemas.microsoft.com/office/drawing/2014/main" val="628041768"/>
+                    </a:ext>
+                  </a:extLst>
+                </a:gridCol>
+              </a:tblGrid>
+              <a:tr h="160671">
+                <a:tc>
+                  <a:txBody>
+                    <a:bodyPr/>
+                    <a:lstStyle/>
+                    <a:p>
+                      <a:r>
+                        <a:rPr lang="en-GB" dirty="0"/>
+                        <a:t>File Name</a:t>
+                      </a:r>
+                    </a:p>
+                  </a:txBody>
+                  <a:tcPr/>
+                </a:tc>
+                <a:tc>
+                  <a:txBody>
+                    <a:bodyPr/>
+                    <a:lstStyle/>
+                    <a:p>
+                      <a:r>
+                        <a:rPr lang="en-GB" dirty="0"/>
+                        <a:t>How sound was created</a:t>
+                      </a:r>
+                    </a:p>
+                  </a:txBody>
+                  <a:tcPr/>
+                </a:tc>
+                <a:extLst>
+                  <a:ext uri="{0D108BD9-81ED-4DB2-BD59-A6C34878D82A}">
+                    <a16:rowId xmlns:a16="http://schemas.microsoft.com/office/drawing/2014/main" val="1037850769"/>
+                  </a:ext>
+                </a:extLst>
+              </a:tr>
+              <a:tr h="682796">
+                <a:tc>
+                  <a:txBody>
+                    <a:bodyPr/>
+                    <a:lstStyle/>
+                    <a:p>
+                      <a:endParaRPr lang="en-GB" dirty="0"/>
+                    </a:p>
+                  </a:txBody>
+                  <a:tcPr/>
+                </a:tc>
+                <a:tc>
+                  <a:txBody>
+                    <a:bodyPr/>
+                    <a:lstStyle/>
+                    <a:p>
+                      <a:endParaRPr lang="en-GB" dirty="0"/>
+                    </a:p>
+                  </a:txBody>
+                  <a:tcPr/>
+                </a:tc>
+                <a:extLst>
+                  <a:ext uri="{0D108BD9-81ED-4DB2-BD59-A6C34878D82A}">
+                    <a16:rowId xmlns:a16="http://schemas.microsoft.com/office/drawing/2014/main" val="1982520596"/>
+                  </a:ext>
+                </a:extLst>
+              </a:tr>
+              <a:tr h="682796">
+                <a:tc>
+                  <a:txBody>
+                    <a:bodyPr/>
+                    <a:lstStyle/>
+                    <a:p>
+                      <a:endParaRPr lang="en-GB"/>
+                    </a:p>
+                  </a:txBody>
+                  <a:tcPr/>
+                </a:tc>
+                <a:tc>
+                  <a:txBody>
+                    <a:bodyPr/>
+                    <a:lstStyle/>
+                    <a:p>
+                      <a:endParaRPr lang="en-GB"/>
+                    </a:p>
+                  </a:txBody>
+                  <a:tcPr/>
+                </a:tc>
+                <a:extLst>
+                  <a:ext uri="{0D108BD9-81ED-4DB2-BD59-A6C34878D82A}">
+                    <a16:rowId xmlns:a16="http://schemas.microsoft.com/office/drawing/2014/main" val="1544250371"/>
+                  </a:ext>
+                </a:extLst>
+              </a:tr>
+              <a:tr h="682796">
+                <a:tc>
+                  <a:txBody>
+                    <a:bodyPr/>
+                    <a:lstStyle/>
+                    <a:p>
+                      <a:endParaRPr lang="en-GB" dirty="0"/>
+                    </a:p>
+                  </a:txBody>
+                  <a:tcPr/>
+                </a:tc>
+                <a:tc>
+                  <a:txBody>
+                    <a:bodyPr/>
+                    <a:lstStyle/>
+                    <a:p>
+                      <a:endParaRPr lang="en-GB" dirty="0"/>
+                    </a:p>
+                  </a:txBody>
+                  <a:tcPr/>
+                </a:tc>
+                <a:extLst>
+                  <a:ext uri="{0D108BD9-81ED-4DB2-BD59-A6C34878D82A}">
+                    <a16:rowId xmlns:a16="http://schemas.microsoft.com/office/drawing/2014/main" val="336221061"/>
+                  </a:ext>
+                </a:extLst>
+              </a:tr>
+              <a:tr h="682796">
+                <a:tc>
+                  <a:txBody>
+                    <a:bodyPr/>
+                    <a:lstStyle/>
+                    <a:p>
+                      <a:endParaRPr lang="en-GB"/>
+                    </a:p>
+                  </a:txBody>
+                  <a:tcPr/>
+                </a:tc>
+                <a:tc>
+                  <a:txBody>
+                    <a:bodyPr/>
+                    <a:lstStyle/>
+                    <a:p>
+                      <a:endParaRPr lang="en-GB"/>
+                    </a:p>
+                  </a:txBody>
+                  <a:tcPr/>
+                </a:tc>
+                <a:extLst>
+                  <a:ext uri="{0D108BD9-81ED-4DB2-BD59-A6C34878D82A}">
+                    <a16:rowId xmlns:a16="http://schemas.microsoft.com/office/drawing/2014/main" val="2088809235"/>
+                  </a:ext>
+                </a:extLst>
+              </a:tr>
+              <a:tr h="682796">
+                <a:tc>
+                  <a:txBody>
+                    <a:bodyPr/>
+                    <a:lstStyle/>
+                    <a:p>
+                      <a:endParaRPr lang="en-GB" dirty="0"/>
+                    </a:p>
+                  </a:txBody>
+                  <a:tcPr/>
+                </a:tc>
+                <a:tc>
+                  <a:txBody>
+                    <a:bodyPr/>
+                    <a:lstStyle/>
+                    <a:p>
+                      <a:endParaRPr lang="en-GB" dirty="0"/>
+                    </a:p>
+                  </a:txBody>
+                  <a:tcPr/>
+                </a:tc>
+                <a:extLst>
+                  <a:ext uri="{0D108BD9-81ED-4DB2-BD59-A6C34878D82A}">
+                    <a16:rowId xmlns:a16="http://schemas.microsoft.com/office/drawing/2014/main" val="3040528228"/>
+                  </a:ext>
+                </a:extLst>
+              </a:tr>
+              <a:tr h="682796">
+                <a:tc>
+                  <a:txBody>
+                    <a:bodyPr/>
+                    <a:lstStyle/>
+                    <a:p>
+                      <a:endParaRPr lang="en-GB" dirty="0"/>
+                    </a:p>
+                  </a:txBody>
+                  <a:tcPr/>
+                </a:tc>
+                <a:tc>
+                  <a:txBody>
+                    <a:bodyPr/>
+                    <a:lstStyle/>
+                    <a:p>
+                      <a:endParaRPr lang="en-GB" dirty="0"/>
+                    </a:p>
+                  </a:txBody>
+                  <a:tcPr/>
+                </a:tc>
+                <a:extLst>
+                  <a:ext uri="{0D108BD9-81ED-4DB2-BD59-A6C34878D82A}">
+                    <a16:rowId xmlns:a16="http://schemas.microsoft.com/office/drawing/2014/main" val="305773528"/>
+                  </a:ext>
+                </a:extLst>
+              </a:tr>
+            </a:tbl>
+          </a:graphicData>
+        </a:graphic>
+      </p:graphicFrame>
+    </p:spTree>
+    <p:extLst>
+      <p:ext uri="{BB962C8B-B14F-4D97-AF65-F5344CB8AC3E}">
+        <p14:creationId xmlns:p14="http://schemas.microsoft.com/office/powerpoint/2010/main" val="3032562648"/>
       </p:ext>
     </p:extLst>
   </p:cSld>
@@ -6060,15 +11030,7 @@
             <a:pPr algn="ctr"/>
             <a:r>
               <a:rPr lang="en-GB" sz="1600" dirty="0"/>
-              <a:t>Overlap Sphere hitbox visible in Editor using </a:t>
-            </a:r>
-            <a:r>
-              <a:rPr lang="en-GB" sz="1600" dirty="0" err="1"/>
-              <a:t>ShowGizmos</a:t>
-            </a:r>
-            <a:r>
-              <a:rPr lang="en-GB" sz="1600" dirty="0"/>
-              <a:t>()</a:t>
+              <a:t>Overlap Sphere hitbox visible in Editor using ShowGizmos()</a:t>
             </a:r>
           </a:p>
         </p:txBody>
@@ -6187,15 +11149,7 @@
             <a:pPr algn="ctr"/>
             <a:r>
               <a:rPr lang="en-GB" sz="1600" dirty="0"/>
-              <a:t>Logic used to check if player is moving in </a:t>
-            </a:r>
-            <a:r>
-              <a:rPr lang="en-GB" sz="1600" dirty="0" err="1"/>
-              <a:t>PlayerController</a:t>
-            </a:r>
-            <a:r>
-              <a:rPr lang="en-GB" sz="1600" dirty="0"/>
-              <a:t> Update()</a:t>
+              <a:t>Logic used to check if player is moving in PlayerController Update()</a:t>
             </a:r>
           </a:p>
         </p:txBody>
@@ -6257,23 +11211,7 @@
                   <a:schemeClr val="tx1"/>
                 </a:solidFill>
               </a:rPr>
-              <a:t>Uses </a:t>
-            </a:r>
-            <a:r>
-              <a:rPr lang="en-GB" dirty="0" err="1">
-                <a:solidFill>
-                  <a:schemeClr val="tx1"/>
-                </a:solidFill>
-              </a:rPr>
-              <a:t>Physics.OverlapSphere</a:t>
-            </a:r>
-            <a:r>
-              <a:rPr lang="en-GB" dirty="0">
-                <a:solidFill>
-                  <a:schemeClr val="tx1"/>
-                </a:solidFill>
-              </a:rPr>
-              <a:t> to check what material the player is standing on (using Layer Masks)</a:t>
+              <a:t>Uses Physics.OverlapSphere to check what material the player is standing on (using Layer Masks)</a:t>
             </a:r>
           </a:p>
           <a:p>
@@ -6794,7 +11732,13 @@
   <p:cSld>
     <p:spTree>
       <p:nvGrpSpPr>
-        <p:cNvPr id="1" name=""/>
+        <p:cNvPr id="1" name="">
+          <a:extLst>
+            <a:ext uri="{FF2B5EF4-FFF2-40B4-BE49-F238E27FC236}">
+              <a16:creationId xmlns:a16="http://schemas.microsoft.com/office/drawing/2014/main" id="{785A6F35-D8AE-06A1-3FE3-B157EE8380CC}"/>
+            </a:ext>
+          </a:extLst>
+        </p:cNvPr>
         <p:cNvGrpSpPr/>
         <p:nvPr/>
       </p:nvGrpSpPr>
@@ -6811,7 +11755,7 @@
           <p:cNvPr id="2" name="Title 1">
             <a:extLst>
               <a:ext uri="{FF2B5EF4-FFF2-40B4-BE49-F238E27FC236}">
-                <a16:creationId xmlns:a16="http://schemas.microsoft.com/office/drawing/2014/main" id="{4A669AEC-2DF0-2255-F587-D88A4590DD2B}"/>
+                <a16:creationId xmlns:a16="http://schemas.microsoft.com/office/drawing/2014/main" id="{671F1F2C-94B8-2D7F-F659-C7C06A033F01}"/>
               </a:ext>
             </a:extLst>
           </p:cNvPr>
@@ -6824,80 +11768,492 @@
         </p:nvSpPr>
         <p:spPr>
           <a:xfrm>
-            <a:off x="2231136" y="123444"/>
-            <a:ext cx="7729728" cy="994529"/>
+            <a:off x="483616" y="231810"/>
+            <a:ext cx="5543039" cy="956910"/>
           </a:xfrm>
         </p:spPr>
         <p:txBody>
           <a:bodyPr/>
           <a:lstStyle/>
           <a:p>
+            <a:pPr algn="l"/>
             <a:r>
               <a:rPr lang="en-GB" dirty="0"/>
-              <a:t>Sound ORIGINS</a:t>
-            </a:r>
-          </a:p>
-        </p:txBody>
-      </p:sp>
-      <p:sp>
-        <p:nvSpPr>
-          <p:cNvPr id="3" name="Content Placeholder 2">
-            <a:extLst>
-              <a:ext uri="{FF2B5EF4-FFF2-40B4-BE49-F238E27FC236}">
-                <a16:creationId xmlns:a16="http://schemas.microsoft.com/office/drawing/2014/main" id="{077BADC9-E785-AB9C-2915-D6DE1879AC85}"/>
-              </a:ext>
-            </a:extLst>
-          </p:cNvPr>
-          <p:cNvSpPr>
-            <a:spLocks noGrp="1"/>
-          </p:cNvSpPr>
-          <p:nvPr>
-            <p:ph idx="1"/>
-          </p:nvPr>
-        </p:nvSpPr>
+              <a:t>PICK UPS (Heart SFX)</a:t>
+            </a:r>
+          </a:p>
+        </p:txBody>
+      </p:sp>
+      <p:pic>
+        <p:nvPicPr>
+          <p:cNvPr id="5" name="Picture 4">
+            <a:extLst>
+              <a:ext uri="{FF2B5EF4-FFF2-40B4-BE49-F238E27FC236}">
+                <a16:creationId xmlns:a16="http://schemas.microsoft.com/office/drawing/2014/main" id="{CDA47971-CA15-18C9-7323-B8DDBBA8ADB9}"/>
+              </a:ext>
+            </a:extLst>
+          </p:cNvPr>
+          <p:cNvPicPr>
+            <a:picLocks noChangeAspect="1"/>
+          </p:cNvPicPr>
+          <p:nvPr/>
+        </p:nvPicPr>
+        <p:blipFill>
+          <a:blip r:embed="rId3"/>
+          <a:srcRect l="17074" t="8540" r="13602" b="11806"/>
+          <a:stretch>
+            <a:fillRect/>
+          </a:stretch>
+        </p:blipFill>
         <p:spPr>
           <a:xfrm>
-            <a:off x="2093976" y="1405771"/>
-            <a:ext cx="7729728" cy="3101983"/>
+            <a:off x="4852658" y="276156"/>
+            <a:ext cx="959667" cy="851535"/>
           </a:xfrm>
+          <a:prstGeom prst="ellipse">
+            <a:avLst/>
+          </a:prstGeom>
+          <a:ln w="63500" cap="rnd">
+            <a:solidFill>
+              <a:srgbClr val="333333"/>
+            </a:solidFill>
+          </a:ln>
+          <a:effectLst>
+            <a:outerShdw blurRad="381000" dist="292100" dir="5400000" sx="-80000" sy="-18000" rotWithShape="0">
+              <a:srgbClr val="000000">
+                <a:alpha val="22000"/>
+              </a:srgbClr>
+            </a:outerShdw>
+          </a:effectLst>
+          <a:scene3d>
+            <a:camera prst="orthographicFront"/>
+            <a:lightRig rig="contrasting" dir="t">
+              <a:rot lat="0" lon="0" rev="3000000"/>
+            </a:lightRig>
+          </a:scene3d>
+          <a:sp3d contourW="7620">
+            <a:bevelT w="95250" h="31750"/>
+            <a:contourClr>
+              <a:srgbClr val="333333"/>
+            </a:contourClr>
+          </a:sp3d>
         </p:spPr>
-        <p:txBody>
-          <a:bodyPr/>
-          <a:lstStyle/>
-          <a:p>
-            <a:r>
-              <a:rPr lang="en-GB" sz="2400" dirty="0"/>
-              <a:t>Most sounds were recorded by me and are listed on the Recording Details Template</a:t>
-            </a:r>
-          </a:p>
-          <a:p>
-            <a:pPr marL="0" indent="0">
-              <a:buNone/>
+      </p:pic>
+      <p:pic>
+        <p:nvPicPr>
+          <p:cNvPr id="10" name="Picture 9">
+            <a:extLst>
+              <a:ext uri="{FF2B5EF4-FFF2-40B4-BE49-F238E27FC236}">
+                <a16:creationId xmlns:a16="http://schemas.microsoft.com/office/drawing/2014/main" id="{2FEB17C3-B19F-682F-49D9-41D771FAA14B}"/>
+              </a:ext>
+            </a:extLst>
+          </p:cNvPr>
+          <p:cNvPicPr>
+            <a:picLocks noChangeAspect="1"/>
+          </p:cNvPicPr>
+          <p:nvPr/>
+        </p:nvPicPr>
+        <p:blipFill>
+          <a:blip r:embed="rId4"/>
+          <a:stretch>
+            <a:fillRect/>
+          </a:stretch>
+        </p:blipFill>
+        <p:spPr>
+          <a:xfrm>
+            <a:off x="528883" y="1250326"/>
+            <a:ext cx="5044196" cy="2410136"/>
+          </a:xfrm>
+          <a:prstGeom prst="rect">
+            <a:avLst/>
+          </a:prstGeom>
+        </p:spPr>
+      </p:pic>
+      <p:sp>
+        <p:nvSpPr>
+          <p:cNvPr id="17" name="Rectangle 16">
+            <a:extLst>
+              <a:ext uri="{FF2B5EF4-FFF2-40B4-BE49-F238E27FC236}">
+                <a16:creationId xmlns:a16="http://schemas.microsoft.com/office/drawing/2014/main" id="{DD4C802C-A882-FCE7-F592-F02E8DA0CB60}"/>
+              </a:ext>
+            </a:extLst>
+          </p:cNvPr>
+          <p:cNvSpPr/>
+          <p:nvPr/>
+        </p:nvSpPr>
+        <p:spPr>
+          <a:xfrm>
+            <a:off x="528883" y="3766788"/>
+            <a:ext cx="4477683" cy="1427586"/>
+          </a:xfrm>
+          <a:prstGeom prst="rect">
+            <a:avLst/>
+          </a:prstGeom>
+          <a:solidFill>
+            <a:schemeClr val="accent2">
+              <a:lumMod val="40000"/>
+              <a:lumOff val="60000"/>
+            </a:schemeClr>
+          </a:solidFill>
+        </p:spPr>
+        <p:style>
+          <a:lnRef idx="2">
+            <a:schemeClr val="accent1">
+              <a:shade val="15000"/>
+            </a:schemeClr>
+          </a:lnRef>
+          <a:fillRef idx="1">
+            <a:schemeClr val="accent1"/>
+          </a:fillRef>
+          <a:effectRef idx="0">
+            <a:schemeClr val="accent1"/>
+          </a:effectRef>
+          <a:fontRef idx="minor">
+            <a:schemeClr val="lt1"/>
+          </a:fontRef>
+        </p:style>
+        <p:txBody>
+          <a:bodyPr rtlCol="0" anchor="t" anchorCtr="0"/>
+          <a:lstStyle/>
+          <a:p>
+            <a:pPr algn="ctr"/>
+            <a:r>
+              <a:rPr lang="en-GB" dirty="0">
+                <a:solidFill>
+                  <a:schemeClr val="tx1"/>
+                </a:solidFill>
+              </a:rPr>
+              <a:t>BELL CHIME </a:t>
+            </a:r>
+          </a:p>
+          <a:p>
+            <a:pPr marL="285750" indent="-285750">
+              <a:buFontTx/>
+              <a:buChar char="-"/>
             </a:pPr>
-            <a:endParaRPr lang="en-GB" sz="2400" dirty="0"/>
-          </a:p>
-          <a:p>
-            <a:r>
-              <a:rPr lang="en-GB" sz="2400" dirty="0"/>
-              <a:t>The Laugh.ogg Sound Effect used for the slime laughing can be found here: </a:t>
-            </a:r>
-            <a:r>
-              <a:rPr lang="en-GB" sz="2400" u="sng" dirty="0">
-                <a:hlinkClick r:id="rId2"/>
+            <a:r>
+              <a:rPr lang="en-GB" dirty="0">
+                <a:solidFill>
+                  <a:schemeClr val="tx1">
+                    <a:lumMod val="75000"/>
+                    <a:lumOff val="25000"/>
+                  </a:schemeClr>
+                </a:solidFill>
               </a:rPr>
-              <a:t>https://opengameart.org/content/tiny-creatures-sounds</a:t>
-            </a:r>
-            <a:endParaRPr lang="en-GB" sz="2400" dirty="0"/>
-          </a:p>
-          <a:p>
-            <a:endParaRPr lang="en-GB" dirty="0"/>
+              <a:t>Trimmed clip to one chime</a:t>
+            </a:r>
+          </a:p>
+          <a:p>
+            <a:pPr marL="285750" indent="-285750">
+              <a:buFontTx/>
+              <a:buChar char="-"/>
+            </a:pPr>
+            <a:r>
+              <a:rPr lang="en-GB" dirty="0">
+                <a:solidFill>
+                  <a:schemeClr val="tx1">
+                    <a:lumMod val="75000"/>
+                    <a:lumOff val="25000"/>
+                  </a:schemeClr>
+                </a:solidFill>
+              </a:rPr>
+              <a:t>Amplified by 4 dB</a:t>
+            </a:r>
+          </a:p>
+          <a:p>
+            <a:pPr marL="285750" indent="-285750">
+              <a:buFontTx/>
+              <a:buChar char="-"/>
+            </a:pPr>
+            <a:r>
+              <a:rPr lang="en-GB" dirty="0">
+                <a:solidFill>
+                  <a:schemeClr val="tx1">
+                    <a:lumMod val="75000"/>
+                    <a:lumOff val="25000"/>
+                  </a:schemeClr>
+                </a:solidFill>
+              </a:rPr>
+              <a:t>Enveloped start  to lower attack time of clip </a:t>
+            </a:r>
+          </a:p>
+          <a:p>
+            <a:pPr marL="285750" indent="-285750">
+              <a:buFontTx/>
+              <a:buChar char="-"/>
+            </a:pPr>
+            <a:endParaRPr lang="en-GB" dirty="0">
+              <a:solidFill>
+                <a:schemeClr val="tx1">
+                  <a:lumMod val="75000"/>
+                  <a:lumOff val="25000"/>
+                </a:schemeClr>
+              </a:solidFill>
+            </a:endParaRPr>
+          </a:p>
+          <a:p>
+            <a:pPr marL="285750" indent="-285750">
+              <a:buFontTx/>
+              <a:buChar char="-"/>
+            </a:pPr>
+            <a:endParaRPr lang="en-GB" dirty="0">
+              <a:solidFill>
+                <a:schemeClr val="tx1">
+                  <a:lumMod val="75000"/>
+                  <a:lumOff val="25000"/>
+                </a:schemeClr>
+              </a:solidFill>
+            </a:endParaRPr>
+          </a:p>
+        </p:txBody>
+      </p:sp>
+      <p:sp>
+        <p:nvSpPr>
+          <p:cNvPr id="18" name="Rectangle 17">
+            <a:extLst>
+              <a:ext uri="{FF2B5EF4-FFF2-40B4-BE49-F238E27FC236}">
+                <a16:creationId xmlns:a16="http://schemas.microsoft.com/office/drawing/2014/main" id="{D815F6C3-3929-9218-2341-470E3611FFA0}"/>
+              </a:ext>
+            </a:extLst>
+          </p:cNvPr>
+          <p:cNvSpPr/>
+          <p:nvPr/>
+        </p:nvSpPr>
+        <p:spPr>
+          <a:xfrm>
+            <a:off x="528883" y="5300701"/>
+            <a:ext cx="4477683" cy="1427586"/>
+          </a:xfrm>
+          <a:prstGeom prst="rect">
+            <a:avLst/>
+          </a:prstGeom>
+          <a:solidFill>
+            <a:schemeClr val="accent2">
+              <a:lumMod val="40000"/>
+              <a:lumOff val="60000"/>
+            </a:schemeClr>
+          </a:solidFill>
+        </p:spPr>
+        <p:style>
+          <a:lnRef idx="2">
+            <a:schemeClr val="accent1">
+              <a:shade val="15000"/>
+            </a:schemeClr>
+          </a:lnRef>
+          <a:fillRef idx="1">
+            <a:schemeClr val="accent1"/>
+          </a:fillRef>
+          <a:effectRef idx="0">
+            <a:schemeClr val="accent1"/>
+          </a:effectRef>
+          <a:fontRef idx="minor">
+            <a:schemeClr val="lt1"/>
+          </a:fontRef>
+        </p:style>
+        <p:txBody>
+          <a:bodyPr rtlCol="0" anchor="t" anchorCtr="0"/>
+          <a:lstStyle/>
+          <a:p>
+            <a:pPr algn="ctr"/>
+            <a:r>
+              <a:rPr lang="en-GB" dirty="0">
+                <a:solidFill>
+                  <a:schemeClr val="tx1"/>
+                </a:solidFill>
+              </a:rPr>
+              <a:t>KEY JINGLES </a:t>
+            </a:r>
+          </a:p>
+          <a:p>
+            <a:pPr marL="285750" indent="-285750">
+              <a:buFontTx/>
+              <a:buChar char="-"/>
+            </a:pPr>
+            <a:r>
+              <a:rPr lang="en-GB" dirty="0">
+                <a:solidFill>
+                  <a:schemeClr val="tx1">
+                    <a:lumMod val="75000"/>
+                    <a:lumOff val="25000"/>
+                  </a:schemeClr>
+                </a:solidFill>
+              </a:rPr>
+              <a:t>Trimmed clip</a:t>
+            </a:r>
+          </a:p>
+          <a:p>
+            <a:pPr marL="285750" indent="-285750">
+              <a:buFontTx/>
+              <a:buChar char="-"/>
+            </a:pPr>
+            <a:r>
+              <a:rPr lang="en-GB" dirty="0">
+                <a:solidFill>
+                  <a:schemeClr val="tx1">
+                    <a:lumMod val="75000"/>
+                    <a:lumOff val="25000"/>
+                  </a:schemeClr>
+                </a:solidFill>
+              </a:rPr>
+              <a:t> Applied fade out to end of clip</a:t>
+            </a:r>
+          </a:p>
+          <a:p>
+            <a:pPr marL="285750" indent="-285750">
+              <a:buFontTx/>
+              <a:buChar char="-"/>
+            </a:pPr>
+            <a:r>
+              <a:rPr lang="en-GB" dirty="0">
+                <a:solidFill>
+                  <a:schemeClr val="tx1">
+                    <a:lumMod val="75000"/>
+                    <a:lumOff val="25000"/>
+                  </a:schemeClr>
+                </a:solidFill>
+              </a:rPr>
+              <a:t>Filter Curve EQ to remove harsh key sounds</a:t>
+            </a:r>
+          </a:p>
+          <a:p>
+            <a:pPr marL="285750" indent="-285750">
+              <a:buFontTx/>
+              <a:buChar char="-"/>
+            </a:pPr>
+            <a:endParaRPr lang="en-GB" dirty="0">
+              <a:solidFill>
+                <a:schemeClr val="tx1">
+                  <a:lumMod val="75000"/>
+                  <a:lumOff val="25000"/>
+                </a:schemeClr>
+              </a:solidFill>
+            </a:endParaRPr>
+          </a:p>
+        </p:txBody>
+      </p:sp>
+      <p:pic>
+        <p:nvPicPr>
+          <p:cNvPr id="19" name="Picture 18">
+            <a:extLst>
+              <a:ext uri="{FF2B5EF4-FFF2-40B4-BE49-F238E27FC236}">
+                <a16:creationId xmlns:a16="http://schemas.microsoft.com/office/drawing/2014/main" id="{75F6FF4B-CB60-93C3-9DCE-1FD62A244432}"/>
+              </a:ext>
+            </a:extLst>
+          </p:cNvPr>
+          <p:cNvPicPr>
+            <a:picLocks noChangeAspect="1"/>
+          </p:cNvPicPr>
+          <p:nvPr/>
+        </p:nvPicPr>
+        <p:blipFill>
+          <a:blip r:embed="rId5"/>
+          <a:srcRect l="957" t="38208" b="8311"/>
+          <a:stretch>
+            <a:fillRect/>
+          </a:stretch>
+        </p:blipFill>
+        <p:spPr>
+          <a:xfrm>
+            <a:off x="5178582" y="4725909"/>
+            <a:ext cx="6876158" cy="2002378"/>
+          </a:xfrm>
+          <a:prstGeom prst="rect">
+            <a:avLst/>
+          </a:prstGeom>
+        </p:spPr>
+      </p:pic>
+      <p:pic>
+        <p:nvPicPr>
+          <p:cNvPr id="22" name="Picture 21">
+            <a:extLst>
+              <a:ext uri="{FF2B5EF4-FFF2-40B4-BE49-F238E27FC236}">
+                <a16:creationId xmlns:a16="http://schemas.microsoft.com/office/drawing/2014/main" id="{3ACDA0E6-DE3C-9B41-5EA1-44C15DA3F50A}"/>
+              </a:ext>
+            </a:extLst>
+          </p:cNvPr>
+          <p:cNvPicPr>
+            <a:picLocks noChangeAspect="1"/>
+          </p:cNvPicPr>
+          <p:nvPr/>
+        </p:nvPicPr>
+        <p:blipFill>
+          <a:blip r:embed="rId6"/>
+          <a:stretch>
+            <a:fillRect/>
+          </a:stretch>
+        </p:blipFill>
+        <p:spPr>
+          <a:xfrm>
+            <a:off x="6329107" y="702716"/>
+            <a:ext cx="5634336" cy="2858750"/>
+          </a:xfrm>
+          <a:prstGeom prst="rect">
+            <a:avLst/>
+          </a:prstGeom>
+        </p:spPr>
+      </p:pic>
+      <p:sp>
+        <p:nvSpPr>
+          <p:cNvPr id="23" name="Rectangle 22">
+            <a:extLst>
+              <a:ext uri="{FF2B5EF4-FFF2-40B4-BE49-F238E27FC236}">
+                <a16:creationId xmlns:a16="http://schemas.microsoft.com/office/drawing/2014/main" id="{5F02D18F-B24F-AA3B-55DD-A6588C11DB1B}"/>
+              </a:ext>
+            </a:extLst>
+          </p:cNvPr>
+          <p:cNvSpPr/>
+          <p:nvPr/>
+        </p:nvSpPr>
+        <p:spPr>
+          <a:xfrm>
+            <a:off x="6329107" y="3551486"/>
+            <a:ext cx="5634336" cy="492867"/>
+          </a:xfrm>
+          <a:prstGeom prst="rect">
+            <a:avLst/>
+          </a:prstGeom>
+          <a:solidFill>
+            <a:schemeClr val="accent2">
+              <a:lumMod val="40000"/>
+              <a:lumOff val="60000"/>
+            </a:schemeClr>
+          </a:solidFill>
+        </p:spPr>
+        <p:style>
+          <a:lnRef idx="2">
+            <a:schemeClr val="accent1">
+              <a:shade val="15000"/>
+            </a:schemeClr>
+          </a:lnRef>
+          <a:fillRef idx="1">
+            <a:schemeClr val="accent1"/>
+          </a:fillRef>
+          <a:effectRef idx="0">
+            <a:schemeClr val="accent1"/>
+          </a:effectRef>
+          <a:fontRef idx="minor">
+            <a:schemeClr val="lt1"/>
+          </a:fontRef>
+        </p:style>
+        <p:txBody>
+          <a:bodyPr rtlCol="0" anchor="ctr" anchorCtr="0"/>
+          <a:lstStyle/>
+          <a:p>
+            <a:r>
+              <a:rPr lang="en-GB" dirty="0">
+                <a:solidFill>
+                  <a:schemeClr val="tx1"/>
+                </a:solidFill>
+              </a:rPr>
+              <a:t>Similar C# code to Coin SFX</a:t>
+            </a:r>
           </a:p>
         </p:txBody>
       </p:sp>
     </p:spTree>
     <p:extLst>
       <p:ext uri="{BB962C8B-B14F-4D97-AF65-F5344CB8AC3E}">
-        <p14:creationId xmlns:p14="http://schemas.microsoft.com/office/powerpoint/2010/main" val="984374411"/>
+        <p14:creationId xmlns:p14="http://schemas.microsoft.com/office/powerpoint/2010/main" val="3828297998"/>
       </p:ext>
     </p:extLst>
   </p:cSld>
@@ -6915,7 +12271,7 @@
         <p:cNvPr id="1" name="">
           <a:extLst>
             <a:ext uri="{FF2B5EF4-FFF2-40B4-BE49-F238E27FC236}">
-              <a16:creationId xmlns:a16="http://schemas.microsoft.com/office/drawing/2014/main" id="{7C03BD2E-B010-879D-7CDC-F403EDB89F5B}"/>
+              <a16:creationId xmlns:a16="http://schemas.microsoft.com/office/drawing/2014/main" id="{3C9CBA92-6E03-D0D2-3F0B-BBB5FC9CB270}"/>
             </a:ext>
           </a:extLst>
         </p:cNvPr>
@@ -6935,7 +12291,7 @@
           <p:cNvPr id="2" name="Title 1">
             <a:extLst>
               <a:ext uri="{FF2B5EF4-FFF2-40B4-BE49-F238E27FC236}">
-                <a16:creationId xmlns:a16="http://schemas.microsoft.com/office/drawing/2014/main" id="{A22BAA2A-442E-3E81-F11C-F674141CAC4E}"/>
+                <a16:creationId xmlns:a16="http://schemas.microsoft.com/office/drawing/2014/main" id="{B93C8589-14B8-C663-2598-75F4A755C14C}"/>
               </a:ext>
             </a:extLst>
           </p:cNvPr>
@@ -6948,25 +12304,281 @@
         </p:nvSpPr>
         <p:spPr>
           <a:xfrm>
-            <a:off x="2231136" y="123444"/>
-            <a:ext cx="7729728" cy="994529"/>
+            <a:off x="2231136" y="243332"/>
+            <a:ext cx="7729728" cy="883826"/>
           </a:xfrm>
         </p:spPr>
         <p:txBody>
-          <a:bodyPr/>
+          <a:bodyPr>
+            <a:normAutofit/>
+          </a:bodyPr>
           <a:lstStyle/>
           <a:p>
             <a:r>
               <a:rPr lang="en-GB" dirty="0"/>
-              <a:t>Hand-MADE Sounds</a:t>
-            </a:r>
-          </a:p>
-        </p:txBody>
-      </p:sp>
+              <a:t>SLIME (SoUND CreatioN)</a:t>
+            </a:r>
+          </a:p>
+        </p:txBody>
+      </p:sp>
+      <p:pic>
+        <p:nvPicPr>
+          <p:cNvPr id="8" name="Picture 7">
+            <a:extLst>
+              <a:ext uri="{FF2B5EF4-FFF2-40B4-BE49-F238E27FC236}">
+                <a16:creationId xmlns:a16="http://schemas.microsoft.com/office/drawing/2014/main" id="{BABCF8B4-4128-238E-6829-ADE18CF323CA}"/>
+              </a:ext>
+            </a:extLst>
+          </p:cNvPr>
+          <p:cNvPicPr>
+            <a:picLocks noChangeAspect="1"/>
+          </p:cNvPicPr>
+          <p:nvPr/>
+        </p:nvPicPr>
+        <p:blipFill>
+          <a:blip r:embed="rId3"/>
+          <a:srcRect l="12382"/>
+          <a:stretch>
+            <a:fillRect/>
+          </a:stretch>
+        </p:blipFill>
+        <p:spPr>
+          <a:xfrm>
+            <a:off x="62891" y="1634150"/>
+            <a:ext cx="8239884" cy="5160475"/>
+          </a:xfrm>
+          <a:prstGeom prst="rect">
+            <a:avLst/>
+          </a:prstGeom>
+        </p:spPr>
+      </p:pic>
+      <p:sp>
+        <p:nvSpPr>
+          <p:cNvPr id="9" name="Rectangle 8">
+            <a:extLst>
+              <a:ext uri="{FF2B5EF4-FFF2-40B4-BE49-F238E27FC236}">
+                <a16:creationId xmlns:a16="http://schemas.microsoft.com/office/drawing/2014/main" id="{4C04DEAC-3A77-A44C-68D1-1256B50F337F}"/>
+              </a:ext>
+            </a:extLst>
+          </p:cNvPr>
+          <p:cNvSpPr/>
+          <p:nvPr/>
+        </p:nvSpPr>
+        <p:spPr>
+          <a:xfrm>
+            <a:off x="8428777" y="1493822"/>
+            <a:ext cx="3700332" cy="5300803"/>
+          </a:xfrm>
+          <a:prstGeom prst="rect">
+            <a:avLst/>
+          </a:prstGeom>
+          <a:solidFill>
+            <a:schemeClr val="accent2">
+              <a:lumMod val="40000"/>
+              <a:lumOff val="60000"/>
+            </a:schemeClr>
+          </a:solidFill>
+        </p:spPr>
+        <p:style>
+          <a:lnRef idx="2">
+            <a:schemeClr val="accent1">
+              <a:shade val="15000"/>
+            </a:schemeClr>
+          </a:lnRef>
+          <a:fillRef idx="1">
+            <a:schemeClr val="accent1"/>
+          </a:fillRef>
+          <a:effectRef idx="0">
+            <a:schemeClr val="accent1"/>
+          </a:effectRef>
+          <a:fontRef idx="minor">
+            <a:schemeClr val="lt1"/>
+          </a:fontRef>
+        </p:style>
+        <p:txBody>
+          <a:bodyPr rtlCol="0" anchor="t" anchorCtr="0"/>
+          <a:lstStyle/>
+          <a:p>
+            <a:pPr algn="ctr"/>
+            <a:r>
+              <a:rPr lang="en-GB" dirty="0">
+                <a:solidFill>
+                  <a:schemeClr val="tx1"/>
+                </a:solidFill>
+              </a:rPr>
+              <a:t>FLANNEL:</a:t>
+            </a:r>
+          </a:p>
+          <a:p>
+            <a:pPr marL="285750" indent="-285750">
+              <a:buFontTx/>
+              <a:buChar char="-"/>
+            </a:pPr>
+            <a:r>
+              <a:rPr lang="en-GB" dirty="0">
+                <a:solidFill>
+                  <a:schemeClr val="tx1">
+                    <a:lumMod val="75000"/>
+                    <a:lumOff val="25000"/>
+                  </a:schemeClr>
+                </a:solidFill>
+              </a:rPr>
+              <a:t>Amplified by 7 dB</a:t>
+            </a:r>
+          </a:p>
+          <a:p>
+            <a:pPr marL="285750" indent="-285750">
+              <a:buFontTx/>
+              <a:buChar char="-"/>
+            </a:pPr>
+            <a:r>
+              <a:rPr lang="en-GB" dirty="0">
+                <a:solidFill>
+                  <a:schemeClr val="tx1">
+                    <a:lumMod val="75000"/>
+                    <a:lumOff val="25000"/>
+                  </a:schemeClr>
+                </a:solidFill>
+              </a:rPr>
+              <a:t>Low pass filter to remove high squeaks (7000 Hz cutoff, 24 dB roll off)</a:t>
+            </a:r>
+          </a:p>
+          <a:p>
+            <a:pPr marL="285750" indent="-285750">
+              <a:buFontTx/>
+              <a:buChar char="-"/>
+            </a:pPr>
+            <a:r>
+              <a:rPr lang="en-GB" dirty="0">
+                <a:solidFill>
+                  <a:schemeClr val="tx1">
+                    <a:lumMod val="75000"/>
+                    <a:lumOff val="25000"/>
+                  </a:schemeClr>
+                </a:solidFill>
+              </a:rPr>
+              <a:t>Adjusted tempo by -10% (slimier feel)</a:t>
+            </a:r>
+          </a:p>
+          <a:p>
+            <a:pPr marL="285750" indent="-285750">
+              <a:buFontTx/>
+              <a:buChar char="-"/>
+            </a:pPr>
+            <a:r>
+              <a:rPr lang="en-GB" dirty="0">
+                <a:solidFill>
+                  <a:schemeClr val="tx1">
+                    <a:lumMod val="75000"/>
+                    <a:lumOff val="25000"/>
+                  </a:schemeClr>
+                </a:solidFill>
+              </a:rPr>
+              <a:t>Added subtle reverb:</a:t>
+            </a:r>
+          </a:p>
+          <a:p>
+            <a:pPr marL="285750" indent="-285750">
+              <a:buFontTx/>
+              <a:buChar char="-"/>
+            </a:pPr>
+            <a:endParaRPr lang="en-GB" dirty="0">
+              <a:solidFill>
+                <a:schemeClr val="tx1"/>
+              </a:solidFill>
+            </a:endParaRPr>
+          </a:p>
+        </p:txBody>
+      </p:sp>
+      <p:pic>
+        <p:nvPicPr>
+          <p:cNvPr id="10" name="Picture 9">
+            <a:extLst>
+              <a:ext uri="{FF2B5EF4-FFF2-40B4-BE49-F238E27FC236}">
+                <a16:creationId xmlns:a16="http://schemas.microsoft.com/office/drawing/2014/main" id="{C37D38B0-E252-62EF-2B7C-AF2F67ACA70A}"/>
+              </a:ext>
+            </a:extLst>
+          </p:cNvPr>
+          <p:cNvPicPr>
+            <a:picLocks noChangeAspect="1"/>
+          </p:cNvPicPr>
+          <p:nvPr/>
+        </p:nvPicPr>
+        <p:blipFill>
+          <a:blip r:embed="rId4"/>
+          <a:srcRect t="15774"/>
+          <a:stretch>
+            <a:fillRect/>
+          </a:stretch>
+        </p:blipFill>
+        <p:spPr>
+          <a:xfrm>
+            <a:off x="9040568" y="3748134"/>
+            <a:ext cx="2538814" cy="2679827"/>
+          </a:xfrm>
+          <a:prstGeom prst="rect">
+            <a:avLst/>
+          </a:prstGeom>
+        </p:spPr>
+      </p:pic>
+      <p:pic>
+        <p:nvPicPr>
+          <p:cNvPr id="11" name="Picture 10">
+            <a:extLst>
+              <a:ext uri="{FF2B5EF4-FFF2-40B4-BE49-F238E27FC236}">
+                <a16:creationId xmlns:a16="http://schemas.microsoft.com/office/drawing/2014/main" id="{8BCD9AFF-80BB-C0D4-CA06-4CC5ACDFA5A0}"/>
+              </a:ext>
+            </a:extLst>
+          </p:cNvPr>
+          <p:cNvPicPr>
+            <a:picLocks noChangeAspect="1"/>
+          </p:cNvPicPr>
+          <p:nvPr/>
+        </p:nvPicPr>
+        <p:blipFill>
+          <a:blip r:embed="rId5"/>
+          <a:stretch>
+            <a:fillRect/>
+          </a:stretch>
+        </p:blipFill>
+        <p:spPr>
+          <a:xfrm>
+            <a:off x="10850231" y="162615"/>
+            <a:ext cx="1172771" cy="1172771"/>
+          </a:xfrm>
+          <a:prstGeom prst="ellipse">
+            <a:avLst/>
+          </a:prstGeom>
+          <a:ln w="63500" cap="rnd">
+            <a:solidFill>
+              <a:srgbClr val="333333"/>
+            </a:solidFill>
+          </a:ln>
+          <a:effectLst>
+            <a:outerShdw blurRad="381000" dist="292100" dir="5400000" sx="-80000" sy="-18000" rotWithShape="0">
+              <a:srgbClr val="000000">
+                <a:alpha val="22000"/>
+              </a:srgbClr>
+            </a:outerShdw>
+          </a:effectLst>
+          <a:scene3d>
+            <a:camera prst="orthographicFront"/>
+            <a:lightRig rig="contrasting" dir="t">
+              <a:rot lat="0" lon="0" rev="3000000"/>
+            </a:lightRig>
+          </a:scene3d>
+          <a:sp3d contourW="7620">
+            <a:bevelT w="95250" h="31750"/>
+            <a:contourClr>
+              <a:srgbClr val="333333"/>
+            </a:contourClr>
+          </a:sp3d>
+        </p:spPr>
+      </p:pic>
     </p:spTree>
     <p:extLst>
       <p:ext uri="{BB962C8B-B14F-4D97-AF65-F5344CB8AC3E}">
-        <p14:creationId xmlns:p14="http://schemas.microsoft.com/office/powerpoint/2010/main" val="3032562648"/>
+        <p14:creationId xmlns:p14="http://schemas.microsoft.com/office/powerpoint/2010/main" val="1684279126"/>
       </p:ext>
     </p:extLst>
   </p:cSld>

--- a/Assessment/GAT Slides.pptx
+++ b/Assessment/GAT Slides.pptx
@@ -26,8 +26,8 @@
     <p:sldId id="274" r:id="rId17"/>
     <p:sldId id="273" r:id="rId18"/>
     <p:sldId id="275" r:id="rId19"/>
-    <p:sldId id="261" r:id="rId20"/>
-    <p:sldId id="262" r:id="rId21"/>
+    <p:sldId id="262" r:id="rId20"/>
+    <p:sldId id="261" r:id="rId21"/>
   </p:sldIdLst>
   <p:sldSz cx="12192000" cy="6858000"/>
   <p:notesSz cx="6858000" cy="9144000"/>
@@ -6934,7 +6934,7 @@
           <p:nvPr>
             <p:extLst>
               <p:ext uri="{D42A27DB-BD31-4B8C-83A1-F6EECF244321}">
-                <p14:modId xmlns:p14="http://schemas.microsoft.com/office/powerpoint/2010/main" val="3858021791"/>
+                <p14:modId xmlns:p14="http://schemas.microsoft.com/office/powerpoint/2010/main" val="1609231734"/>
               </p:ext>
             </p:extLst>
           </p:nvPr>
@@ -7073,11 +7073,14 @@
                       </a:r>
                     </a:p>
                     <a:p>
-                      <a:pPr marL="0" indent="0">
+                      <a:pPr marL="285750" indent="-285750">
                         <a:buFontTx/>
-                        <a:buNone/>
+                        <a:buChar char="-"/>
                       </a:pPr>
-                      <a:endParaRPr lang="en-GB" sz="1600" dirty="0"/>
+                      <a:r>
+                        <a:rPr lang="en-GB" sz="1600" dirty="0"/>
+                        <a:t>There are also bird tweets in the background</a:t>
+                      </a:r>
                     </a:p>
                   </a:txBody>
                   <a:tcPr/>
@@ -8645,8 +8648,13 @@
             </a:pPr>
             <a:r>
               <a:rPr lang="en-GB" sz="2000" dirty="0"/>
-              <a:t>2 separate audio sources, one for queen one for king</a:t>
-            </a:r>
+              <a:t>2 separate audio sources, one for queen one </a:t>
+            </a:r>
+            <a:r>
+              <a:rPr lang="en-GB" sz="2000"/>
+              <a:t>for troll</a:t>
+            </a:r>
+            <a:endParaRPr lang="en-GB" sz="2000" dirty="0"/>
           </a:p>
           <a:p>
             <a:pPr marL="285750" indent="-285750">
@@ -8702,7 +8710,13 @@
   <p:cSld>
     <p:spTree>
       <p:nvGrpSpPr>
-        <p:cNvPr id="1" name=""/>
+        <p:cNvPr id="1" name="">
+          <a:extLst>
+            <a:ext uri="{FF2B5EF4-FFF2-40B4-BE49-F238E27FC236}">
+              <a16:creationId xmlns:a16="http://schemas.microsoft.com/office/drawing/2014/main" id="{7C03BD2E-B010-879D-7CDC-F403EDB89F5B}"/>
+            </a:ext>
+          </a:extLst>
+        </p:cNvPr>
         <p:cNvGrpSpPr/>
         <p:nvPr/>
       </p:nvGrpSpPr>
@@ -8719,7 +8733,7 @@
           <p:cNvPr id="2" name="Title 1">
             <a:extLst>
               <a:ext uri="{FF2B5EF4-FFF2-40B4-BE49-F238E27FC236}">
-                <a16:creationId xmlns:a16="http://schemas.microsoft.com/office/drawing/2014/main" id="{4A669AEC-2DF0-2255-F587-D88A4590DD2B}"/>
+                <a16:creationId xmlns:a16="http://schemas.microsoft.com/office/drawing/2014/main" id="{A22BAA2A-442E-3E81-F11C-F674141CAC4E}"/>
               </a:ext>
             </a:extLst>
           </p:cNvPr>
@@ -8742,70 +8756,610 @@
           <a:p>
             <a:r>
               <a:rPr lang="en-GB" dirty="0"/>
-              <a:t>Sound ORIGINS</a:t>
-            </a:r>
-          </a:p>
-        </p:txBody>
-      </p:sp>
-      <p:sp>
-        <p:nvSpPr>
-          <p:cNvPr id="3" name="Content Placeholder 2">
-            <a:extLst>
-              <a:ext uri="{FF2B5EF4-FFF2-40B4-BE49-F238E27FC236}">
-                <a16:creationId xmlns:a16="http://schemas.microsoft.com/office/drawing/2014/main" id="{077BADC9-E785-AB9C-2915-D6DE1879AC85}"/>
-              </a:ext>
-            </a:extLst>
-          </p:cNvPr>
-          <p:cNvSpPr>
-            <a:spLocks noGrp="1"/>
-          </p:cNvSpPr>
-          <p:nvPr>
-            <p:ph idx="1"/>
-          </p:nvPr>
-        </p:nvSpPr>
-        <p:spPr>
-          <a:xfrm>
-            <a:off x="2093976" y="1405771"/>
-            <a:ext cx="7729728" cy="3101983"/>
-          </a:xfrm>
-        </p:spPr>
-        <p:txBody>
-          <a:bodyPr/>
-          <a:lstStyle/>
-          <a:p>
-            <a:r>
-              <a:rPr lang="en-GB" sz="2400" dirty="0"/>
-              <a:t>Most sounds were recorded by me and are listed on the Recording Details Template</a:t>
-            </a:r>
-          </a:p>
-          <a:p>
-            <a:pPr marL="0" indent="0">
-              <a:buNone/>
-            </a:pPr>
-            <a:endParaRPr lang="en-GB" sz="2400" dirty="0"/>
-          </a:p>
-          <a:p>
-            <a:r>
-              <a:rPr lang="en-GB" sz="2400" dirty="0"/>
-              <a:t>The Laugh.ogg Sound Effect used for the slime laughing can be found here: </a:t>
-            </a:r>
-            <a:r>
-              <a:rPr lang="en-GB" sz="2400" u="sng" dirty="0">
-                <a:hlinkClick r:id="rId2"/>
-              </a:rPr>
-              <a:t>https://opengameart.org/content/tiny-creatures-sounds</a:t>
-            </a:r>
-            <a:endParaRPr lang="en-GB" sz="2400" dirty="0"/>
-          </a:p>
-          <a:p>
-            <a:endParaRPr lang="en-GB" dirty="0"/>
-          </a:p>
-        </p:txBody>
-      </p:sp>
+              <a:t>Hand-MADE Sounds</a:t>
+            </a:r>
+          </a:p>
+        </p:txBody>
+      </p:sp>
+      <p:graphicFrame>
+        <p:nvGraphicFramePr>
+          <p:cNvPr id="3" name="Table 2">
+            <a:extLst>
+              <a:ext uri="{FF2B5EF4-FFF2-40B4-BE49-F238E27FC236}">
+                <a16:creationId xmlns:a16="http://schemas.microsoft.com/office/drawing/2014/main" id="{C8D99F40-09B5-1ABF-60F3-D26EF71F028B}"/>
+              </a:ext>
+            </a:extLst>
+          </p:cNvPr>
+          <p:cNvGraphicFramePr>
+            <a:graphicFrameLocks noGrp="1"/>
+          </p:cNvGraphicFramePr>
+          <p:nvPr>
+            <p:extLst>
+              <p:ext uri="{D42A27DB-BD31-4B8C-83A1-F6EECF244321}">
+                <p14:modId xmlns:p14="http://schemas.microsoft.com/office/powerpoint/2010/main" val="1456608312"/>
+              </p:ext>
+            </p:extLst>
+          </p:nvPr>
+        </p:nvGraphicFramePr>
+        <p:xfrm>
+          <a:off x="540191" y="1398719"/>
+          <a:ext cx="5300772" cy="5345739"/>
+        </p:xfrm>
+        <a:graphic>
+          <a:graphicData uri="http://schemas.openxmlformats.org/drawingml/2006/table">
+            <a:tbl>
+              <a:tblPr firstRow="1" bandRow="1">
+                <a:tableStyleId>{7DF18680-E054-41AD-8BC1-D1AEF772440D}</a:tableStyleId>
+              </a:tblPr>
+              <a:tblGrid>
+                <a:gridCol w="2629106">
+                  <a:extLst>
+                    <a:ext uri="{9D8B030D-6E8A-4147-A177-3AD203B41FA5}">
+                      <a16:colId xmlns:a16="http://schemas.microsoft.com/office/drawing/2014/main" val="181970994"/>
+                    </a:ext>
+                  </a:extLst>
+                </a:gridCol>
+                <a:gridCol w="2671666">
+                  <a:extLst>
+                    <a:ext uri="{9D8B030D-6E8A-4147-A177-3AD203B41FA5}">
+                      <a16:colId xmlns:a16="http://schemas.microsoft.com/office/drawing/2014/main" val="628041768"/>
+                    </a:ext>
+                  </a:extLst>
+                </a:gridCol>
+              </a:tblGrid>
+              <a:tr h="630181">
+                <a:tc>
+                  <a:txBody>
+                    <a:bodyPr/>
+                    <a:lstStyle/>
+                    <a:p>
+                      <a:r>
+                        <a:rPr lang="en-GB" dirty="0"/>
+                        <a:t>File Name</a:t>
+                      </a:r>
+                    </a:p>
+                  </a:txBody>
+                  <a:tcPr/>
+                </a:tc>
+                <a:tc>
+                  <a:txBody>
+                    <a:bodyPr/>
+                    <a:lstStyle/>
+                    <a:p>
+                      <a:r>
+                        <a:rPr lang="en-GB" dirty="0"/>
+                        <a:t>How sound was created</a:t>
+                      </a:r>
+                    </a:p>
+                  </a:txBody>
+                  <a:tcPr/>
+                </a:tc>
+                <a:extLst>
+                  <a:ext uri="{0D108BD9-81ED-4DB2-BD59-A6C34878D82A}">
+                    <a16:rowId xmlns:a16="http://schemas.microsoft.com/office/drawing/2014/main" val="1037850769"/>
+                  </a:ext>
+                </a:extLst>
+              </a:tr>
+              <a:tr h="672237">
+                <a:tc>
+                  <a:txBody>
+                    <a:bodyPr/>
+                    <a:lstStyle/>
+                    <a:p>
+                      <a:r>
+                        <a:rPr lang="en-GB" dirty="0"/>
+                        <a:t>Penclick.mp3</a:t>
+                      </a:r>
+                    </a:p>
+                  </a:txBody>
+                  <a:tcPr/>
+                </a:tc>
+                <a:tc>
+                  <a:txBody>
+                    <a:bodyPr/>
+                    <a:lstStyle/>
+                    <a:p>
+                      <a:r>
+                        <a:rPr lang="en-GB" dirty="0"/>
+                        <a:t>By pressing the button on a retractable pen</a:t>
+                      </a:r>
+                    </a:p>
+                  </a:txBody>
+                  <a:tcPr/>
+                </a:tc>
+                <a:extLst>
+                  <a:ext uri="{0D108BD9-81ED-4DB2-BD59-A6C34878D82A}">
+                    <a16:rowId xmlns:a16="http://schemas.microsoft.com/office/drawing/2014/main" val="1982520596"/>
+                  </a:ext>
+                </a:extLst>
+              </a:tr>
+              <a:tr h="672237">
+                <a:tc>
+                  <a:txBody>
+                    <a:bodyPr/>
+                    <a:lstStyle/>
+                    <a:p>
+                      <a:r>
+                        <a:rPr lang="en-GB" dirty="0"/>
+                        <a:t>Gravel.m4a</a:t>
+                      </a:r>
+                    </a:p>
+                  </a:txBody>
+                  <a:tcPr/>
+                </a:tc>
+                <a:tc>
+                  <a:txBody>
+                    <a:bodyPr/>
+                    <a:lstStyle/>
+                    <a:p>
+                      <a:r>
+                        <a:rPr lang="en-GB" dirty="0"/>
+                        <a:t>By walking on loose shingle </a:t>
+                      </a:r>
+                    </a:p>
+                  </a:txBody>
+                  <a:tcPr/>
+                </a:tc>
+                <a:extLst>
+                  <a:ext uri="{0D108BD9-81ED-4DB2-BD59-A6C34878D82A}">
+                    <a16:rowId xmlns:a16="http://schemas.microsoft.com/office/drawing/2014/main" val="1544250371"/>
+                  </a:ext>
+                </a:extLst>
+              </a:tr>
+              <a:tr h="672237">
+                <a:tc>
+                  <a:txBody>
+                    <a:bodyPr/>
+                    <a:lstStyle/>
+                    <a:p>
+                      <a:r>
+                        <a:rPr lang="en-GB" dirty="0"/>
+                        <a:t>Thump.m4a</a:t>
+                      </a:r>
+                    </a:p>
+                  </a:txBody>
+                  <a:tcPr/>
+                </a:tc>
+                <a:tc>
+                  <a:txBody>
+                    <a:bodyPr/>
+                    <a:lstStyle/>
+                    <a:p>
+                      <a:r>
+                        <a:rPr lang="en-GB" dirty="0"/>
+                        <a:t>Banging on the underside of a table</a:t>
+                      </a:r>
+                    </a:p>
+                  </a:txBody>
+                  <a:tcPr/>
+                </a:tc>
+                <a:extLst>
+                  <a:ext uri="{0D108BD9-81ED-4DB2-BD59-A6C34878D82A}">
+                    <a16:rowId xmlns:a16="http://schemas.microsoft.com/office/drawing/2014/main" val="336221061"/>
+                  </a:ext>
+                </a:extLst>
+              </a:tr>
+              <a:tr h="672237">
+                <a:tc>
+                  <a:txBody>
+                    <a:bodyPr/>
+                    <a:lstStyle/>
+                    <a:p>
+                      <a:r>
+                        <a:rPr lang="en-GB" dirty="0"/>
+                        <a:t>GrassWalk.m4a</a:t>
+                      </a:r>
+                    </a:p>
+                  </a:txBody>
+                  <a:tcPr/>
+                </a:tc>
+                <a:tc>
+                  <a:txBody>
+                    <a:bodyPr/>
+                    <a:lstStyle/>
+                    <a:p>
+                      <a:r>
+                        <a:rPr lang="en-GB" dirty="0"/>
+                        <a:t>By walking on long grass</a:t>
+                      </a:r>
+                    </a:p>
+                  </a:txBody>
+                  <a:tcPr/>
+                </a:tc>
+                <a:extLst>
+                  <a:ext uri="{0D108BD9-81ED-4DB2-BD59-A6C34878D82A}">
+                    <a16:rowId xmlns:a16="http://schemas.microsoft.com/office/drawing/2014/main" val="2088809235"/>
+                  </a:ext>
+                </a:extLst>
+              </a:tr>
+              <a:tr h="672237">
+                <a:tc>
+                  <a:txBody>
+                    <a:bodyPr/>
+                    <a:lstStyle/>
+                    <a:p>
+                      <a:r>
+                        <a:rPr lang="en-GB" dirty="0"/>
+                        <a:t>ConcreteWalk.m4a</a:t>
+                      </a:r>
+                    </a:p>
+                  </a:txBody>
+                  <a:tcPr/>
+                </a:tc>
+                <a:tc>
+                  <a:txBody>
+                    <a:bodyPr/>
+                    <a:lstStyle/>
+                    <a:p>
+                      <a:r>
+                        <a:rPr lang="en-GB" dirty="0"/>
+                        <a:t>By walking on garden paving slabs</a:t>
+                      </a:r>
+                    </a:p>
+                  </a:txBody>
+                  <a:tcPr/>
+                </a:tc>
+                <a:extLst>
+                  <a:ext uri="{0D108BD9-81ED-4DB2-BD59-A6C34878D82A}">
+                    <a16:rowId xmlns:a16="http://schemas.microsoft.com/office/drawing/2014/main" val="3040528228"/>
+                  </a:ext>
+                </a:extLst>
+              </a:tr>
+              <a:tr h="672237">
+                <a:tc>
+                  <a:txBody>
+                    <a:bodyPr/>
+                    <a:lstStyle/>
+                    <a:p>
+                      <a:r>
+                        <a:rPr lang="en-GB" dirty="0"/>
+                        <a:t>CoinPickUp.m4a</a:t>
+                      </a:r>
+                    </a:p>
+                  </a:txBody>
+                  <a:tcPr/>
+                </a:tc>
+                <a:tc>
+                  <a:txBody>
+                    <a:bodyPr/>
+                    <a:lstStyle/>
+                    <a:p>
+                      <a:r>
+                        <a:rPr lang="en-GB" dirty="0"/>
+                        <a:t>Flicking the upper part of a glass </a:t>
+                      </a:r>
+                    </a:p>
+                  </a:txBody>
+                  <a:tcPr/>
+                </a:tc>
+                <a:extLst>
+                  <a:ext uri="{0D108BD9-81ED-4DB2-BD59-A6C34878D82A}">
+                    <a16:rowId xmlns:a16="http://schemas.microsoft.com/office/drawing/2014/main" val="305773528"/>
+                  </a:ext>
+                </a:extLst>
+              </a:tr>
+              <a:tr h="672237">
+                <a:tc>
+                  <a:txBody>
+                    <a:bodyPr/>
+                    <a:lstStyle/>
+                    <a:p>
+                      <a:r>
+                        <a:rPr lang="en-GB" dirty="0"/>
+                        <a:t>Snaps2.m4a</a:t>
+                      </a:r>
+                    </a:p>
+                  </a:txBody>
+                  <a:tcPr/>
+                </a:tc>
+                <a:tc>
+                  <a:txBody>
+                    <a:bodyPr/>
+                    <a:lstStyle/>
+                    <a:p>
+                      <a:r>
+                        <a:rPr lang="en-GB" dirty="0"/>
+                        <a:t>Stepping on shed eucalyptus bark </a:t>
+                      </a:r>
+                    </a:p>
+                  </a:txBody>
+                  <a:tcPr/>
+                </a:tc>
+                <a:extLst>
+                  <a:ext uri="{0D108BD9-81ED-4DB2-BD59-A6C34878D82A}">
+                    <a16:rowId xmlns:a16="http://schemas.microsoft.com/office/drawing/2014/main" val="1317083244"/>
+                  </a:ext>
+                </a:extLst>
+              </a:tr>
+            </a:tbl>
+          </a:graphicData>
+        </a:graphic>
+      </p:graphicFrame>
+      <p:graphicFrame>
+        <p:nvGraphicFramePr>
+          <p:cNvPr id="4" name="Table 3">
+            <a:extLst>
+              <a:ext uri="{FF2B5EF4-FFF2-40B4-BE49-F238E27FC236}">
+                <a16:creationId xmlns:a16="http://schemas.microsoft.com/office/drawing/2014/main" id="{393C45D4-BFD8-41B4-B981-0F6CE0CDFA7D}"/>
+              </a:ext>
+            </a:extLst>
+          </p:cNvPr>
+          <p:cNvGraphicFramePr>
+            <a:graphicFrameLocks noGrp="1"/>
+          </p:cNvGraphicFramePr>
+          <p:nvPr>
+            <p:extLst>
+              <p:ext uri="{D42A27DB-BD31-4B8C-83A1-F6EECF244321}">
+                <p14:modId xmlns:p14="http://schemas.microsoft.com/office/powerpoint/2010/main" val="1624055265"/>
+              </p:ext>
+            </p:extLst>
+          </p:nvPr>
+        </p:nvGraphicFramePr>
+        <p:xfrm>
+          <a:off x="6095999" y="1420077"/>
+          <a:ext cx="5781870" cy="4946245"/>
+        </p:xfrm>
+        <a:graphic>
+          <a:graphicData uri="http://schemas.openxmlformats.org/drawingml/2006/table">
+            <a:tbl>
+              <a:tblPr firstRow="1" bandRow="1">
+                <a:tableStyleId>{7DF18680-E054-41AD-8BC1-D1AEF772440D}</a:tableStyleId>
+              </a:tblPr>
+              <a:tblGrid>
+                <a:gridCol w="2890935">
+                  <a:extLst>
+                    <a:ext uri="{9D8B030D-6E8A-4147-A177-3AD203B41FA5}">
+                      <a16:colId xmlns:a16="http://schemas.microsoft.com/office/drawing/2014/main" val="181970994"/>
+                    </a:ext>
+                  </a:extLst>
+                </a:gridCol>
+                <a:gridCol w="2890935">
+                  <a:extLst>
+                    <a:ext uri="{9D8B030D-6E8A-4147-A177-3AD203B41FA5}">
+                      <a16:colId xmlns:a16="http://schemas.microsoft.com/office/drawing/2014/main" val="628041768"/>
+                    </a:ext>
+                  </a:extLst>
+                </a:gridCol>
+              </a:tblGrid>
+              <a:tr h="386493">
+                <a:tc>
+                  <a:txBody>
+                    <a:bodyPr/>
+                    <a:lstStyle/>
+                    <a:p>
+                      <a:r>
+                        <a:rPr lang="en-GB" dirty="0"/>
+                        <a:t>File Name</a:t>
+                      </a:r>
+                    </a:p>
+                  </a:txBody>
+                  <a:tcPr/>
+                </a:tc>
+                <a:tc>
+                  <a:txBody>
+                    <a:bodyPr/>
+                    <a:lstStyle/>
+                    <a:p>
+                      <a:r>
+                        <a:rPr lang="en-GB" dirty="0"/>
+                        <a:t>How sound was created</a:t>
+                      </a:r>
+                    </a:p>
+                  </a:txBody>
+                  <a:tcPr/>
+                </a:tc>
+                <a:extLst>
+                  <a:ext uri="{0D108BD9-81ED-4DB2-BD59-A6C34878D82A}">
+                    <a16:rowId xmlns:a16="http://schemas.microsoft.com/office/drawing/2014/main" val="1037850769"/>
+                  </a:ext>
+                </a:extLst>
+              </a:tr>
+              <a:tr h="759348">
+                <a:tc>
+                  <a:txBody>
+                    <a:bodyPr/>
+                    <a:lstStyle/>
+                    <a:p>
+                      <a:r>
+                        <a:rPr lang="en-GB" dirty="0"/>
+                        <a:t>BellChime.mp3</a:t>
+                      </a:r>
+                    </a:p>
+                  </a:txBody>
+                  <a:tcPr/>
+                </a:tc>
+                <a:tc>
+                  <a:txBody>
+                    <a:bodyPr/>
+                    <a:lstStyle/>
+                    <a:p>
+                      <a:r>
+                        <a:rPr lang="en-GB" dirty="0"/>
+                        <a:t>Gently ringing an old garden bell</a:t>
+                      </a:r>
+                    </a:p>
+                  </a:txBody>
+                  <a:tcPr/>
+                </a:tc>
+                <a:extLst>
+                  <a:ext uri="{0D108BD9-81ED-4DB2-BD59-A6C34878D82A}">
+                    <a16:rowId xmlns:a16="http://schemas.microsoft.com/office/drawing/2014/main" val="1982520596"/>
+                  </a:ext>
+                </a:extLst>
+              </a:tr>
+              <a:tr h="721501">
+                <a:tc>
+                  <a:txBody>
+                    <a:bodyPr/>
+                    <a:lstStyle/>
+                    <a:p>
+                      <a:r>
+                        <a:rPr lang="en-GB" dirty="0"/>
+                        <a:t>Keys.mp3</a:t>
+                      </a:r>
+                    </a:p>
+                  </a:txBody>
+                  <a:tcPr/>
+                </a:tc>
+                <a:tc>
+                  <a:txBody>
+                    <a:bodyPr/>
+                    <a:lstStyle/>
+                    <a:p>
+                      <a:r>
+                        <a:rPr lang="en-GB" dirty="0"/>
+                        <a:t>Gently shaking a keychain of keys together</a:t>
+                      </a:r>
+                    </a:p>
+                  </a:txBody>
+                  <a:tcPr/>
+                </a:tc>
+                <a:extLst>
+                  <a:ext uri="{0D108BD9-81ED-4DB2-BD59-A6C34878D82A}">
+                    <a16:rowId xmlns:a16="http://schemas.microsoft.com/office/drawing/2014/main" val="1544250371"/>
+                  </a:ext>
+                </a:extLst>
+              </a:tr>
+              <a:tr h="721501">
+                <a:tc>
+                  <a:txBody>
+                    <a:bodyPr/>
+                    <a:lstStyle/>
+                    <a:p>
+                      <a:r>
+                        <a:rPr lang="en-GB" dirty="0"/>
+                        <a:t>Flannel.m4a</a:t>
+                      </a:r>
+                    </a:p>
+                  </a:txBody>
+                  <a:tcPr/>
+                </a:tc>
+                <a:tc>
+                  <a:txBody>
+                    <a:bodyPr/>
+                    <a:lstStyle/>
+                    <a:p>
+                      <a:r>
+                        <a:rPr lang="en-GB" dirty="0"/>
+                        <a:t>Rinsing a wet flannel and squeezing it repeatedly</a:t>
+                      </a:r>
+                    </a:p>
+                  </a:txBody>
+                  <a:tcPr/>
+                </a:tc>
+                <a:extLst>
+                  <a:ext uri="{0D108BD9-81ED-4DB2-BD59-A6C34878D82A}">
+                    <a16:rowId xmlns:a16="http://schemas.microsoft.com/office/drawing/2014/main" val="336221061"/>
+                  </a:ext>
+                </a:extLst>
+              </a:tr>
+              <a:tr h="721501">
+                <a:tc>
+                  <a:txBody>
+                    <a:bodyPr/>
+                    <a:lstStyle/>
+                    <a:p>
+                      <a:r>
+                        <a:rPr lang="en-GB" dirty="0"/>
+                        <a:t>Water.m4a</a:t>
+                      </a:r>
+                    </a:p>
+                  </a:txBody>
+                  <a:tcPr/>
+                </a:tc>
+                <a:tc>
+                  <a:txBody>
+                    <a:bodyPr/>
+                    <a:lstStyle/>
+                    <a:p>
+                      <a:r>
+                        <a:rPr lang="en-GB" dirty="0"/>
+                        <a:t>Breaking surface tension of water using fingers</a:t>
+                      </a:r>
+                    </a:p>
+                  </a:txBody>
+                  <a:tcPr/>
+                </a:tc>
+                <a:extLst>
+                  <a:ext uri="{0D108BD9-81ED-4DB2-BD59-A6C34878D82A}">
+                    <a16:rowId xmlns:a16="http://schemas.microsoft.com/office/drawing/2014/main" val="2088809235"/>
+                  </a:ext>
+                </a:extLst>
+              </a:tr>
+              <a:tr h="721501">
+                <a:tc>
+                  <a:txBody>
+                    <a:bodyPr/>
+                    <a:lstStyle/>
+                    <a:p>
+                      <a:r>
+                        <a:rPr lang="en-GB" dirty="0"/>
+                        <a:t>Leaves1.m4a</a:t>
+                      </a:r>
+                    </a:p>
+                  </a:txBody>
+                  <a:tcPr/>
+                </a:tc>
+                <a:tc>
+                  <a:txBody>
+                    <a:bodyPr/>
+                    <a:lstStyle/>
+                    <a:p>
+                      <a:r>
+                        <a:rPr lang="en-GB" dirty="0"/>
+                        <a:t>Gently shaking a bush in the wind. Includes bird’s tweets as background noise</a:t>
+                      </a:r>
+                    </a:p>
+                  </a:txBody>
+                  <a:tcPr/>
+                </a:tc>
+                <a:extLst>
+                  <a:ext uri="{0D108BD9-81ED-4DB2-BD59-A6C34878D82A}">
+                    <a16:rowId xmlns:a16="http://schemas.microsoft.com/office/drawing/2014/main" val="3040528228"/>
+                  </a:ext>
+                </a:extLst>
+              </a:tr>
+              <a:tr h="721501">
+                <a:tc>
+                  <a:txBody>
+                    <a:bodyPr/>
+                    <a:lstStyle/>
+                    <a:p>
+                      <a:r>
+                        <a:rPr lang="en-GB" dirty="0"/>
+                        <a:t>WoodCreak.m4a</a:t>
+                      </a:r>
+                    </a:p>
+                  </a:txBody>
+                  <a:tcPr/>
+                </a:tc>
+                <a:tc>
+                  <a:txBody>
+                    <a:bodyPr/>
+                    <a:lstStyle/>
+                    <a:p>
+                      <a:r>
+                        <a:rPr lang="en-GB" dirty="0"/>
+                        <a:t>Shaking a pile of chopped branches together</a:t>
+                      </a:r>
+                    </a:p>
+                  </a:txBody>
+                  <a:tcPr/>
+                </a:tc>
+                <a:extLst>
+                  <a:ext uri="{0D108BD9-81ED-4DB2-BD59-A6C34878D82A}">
+                    <a16:rowId xmlns:a16="http://schemas.microsoft.com/office/drawing/2014/main" val="305773528"/>
+                  </a:ext>
+                </a:extLst>
+              </a:tr>
+            </a:tbl>
+          </a:graphicData>
+        </a:graphic>
+      </p:graphicFrame>
     </p:spTree>
     <p:extLst>
       <p:ext uri="{BB962C8B-B14F-4D97-AF65-F5344CB8AC3E}">
-        <p14:creationId xmlns:p14="http://schemas.microsoft.com/office/powerpoint/2010/main" val="984374411"/>
+        <p14:creationId xmlns:p14="http://schemas.microsoft.com/office/powerpoint/2010/main" val="3032562648"/>
       </p:ext>
     </p:extLst>
   </p:cSld>
@@ -8896,6 +9450,12 @@
             <a:r>
               <a:rPr lang="en-GB" sz="2400" dirty="0"/>
               <a:t>Original sound was a Pen Click</a:t>
+            </a:r>
+          </a:p>
+          <a:p>
+            <a:r>
+              <a:rPr lang="en-GB" sz="2400" dirty="0"/>
+              <a:t>Amplified by 11.1dB</a:t>
             </a:r>
           </a:p>
           <a:p>
@@ -8972,13 +9532,7 @@
   <p:cSld>
     <p:spTree>
       <p:nvGrpSpPr>
-        <p:cNvPr id="1" name="">
-          <a:extLst>
-            <a:ext uri="{FF2B5EF4-FFF2-40B4-BE49-F238E27FC236}">
-              <a16:creationId xmlns:a16="http://schemas.microsoft.com/office/drawing/2014/main" id="{7C03BD2E-B010-879D-7CDC-F403EDB89F5B}"/>
-            </a:ext>
-          </a:extLst>
-        </p:cNvPr>
+        <p:cNvPr id="1" name=""/>
         <p:cNvGrpSpPr/>
         <p:nvPr/>
       </p:nvGrpSpPr>
@@ -8995,7 +9549,7 @@
           <p:cNvPr id="2" name="Title 1">
             <a:extLst>
               <a:ext uri="{FF2B5EF4-FFF2-40B4-BE49-F238E27FC236}">
-                <a16:creationId xmlns:a16="http://schemas.microsoft.com/office/drawing/2014/main" id="{A22BAA2A-442E-3E81-F11C-F674141CAC4E}"/>
+                <a16:creationId xmlns:a16="http://schemas.microsoft.com/office/drawing/2014/main" id="{4A669AEC-2DF0-2255-F587-D88A4590DD2B}"/>
               </a:ext>
             </a:extLst>
           </p:cNvPr>
@@ -9018,505 +9572,70 @@
           <a:p>
             <a:r>
               <a:rPr lang="en-GB" dirty="0"/>
-              <a:t>Hand-MADE Sounds</a:t>
-            </a:r>
-          </a:p>
-        </p:txBody>
-      </p:sp>
-      <p:graphicFrame>
-        <p:nvGraphicFramePr>
-          <p:cNvPr id="3" name="Table 2">
-            <a:extLst>
-              <a:ext uri="{FF2B5EF4-FFF2-40B4-BE49-F238E27FC236}">
-                <a16:creationId xmlns:a16="http://schemas.microsoft.com/office/drawing/2014/main" id="{C8D99F40-09B5-1ABF-60F3-D26EF71F028B}"/>
-              </a:ext>
-            </a:extLst>
-          </p:cNvPr>
-          <p:cNvGraphicFramePr>
-            <a:graphicFrameLocks noGrp="1"/>
-          </p:cNvGraphicFramePr>
-          <p:nvPr>
-            <p:extLst>
-              <p:ext uri="{D42A27DB-BD31-4B8C-83A1-F6EECF244321}">
-                <p14:modId xmlns:p14="http://schemas.microsoft.com/office/powerpoint/2010/main" val="3219516698"/>
-              </p:ext>
-            </p:extLst>
-          </p:nvPr>
-        </p:nvGraphicFramePr>
-        <p:xfrm>
-          <a:off x="540191" y="1398719"/>
-          <a:ext cx="5429062" cy="4481590"/>
-        </p:xfrm>
-        <a:graphic>
-          <a:graphicData uri="http://schemas.openxmlformats.org/drawingml/2006/table">
-            <a:tbl>
-              <a:tblPr firstRow="1" bandRow="1">
-                <a:tableStyleId>{7DF18680-E054-41AD-8BC1-D1AEF772440D}</a:tableStyleId>
-              </a:tblPr>
-              <a:tblGrid>
-                <a:gridCol w="2692736">
-                  <a:extLst>
-                    <a:ext uri="{9D8B030D-6E8A-4147-A177-3AD203B41FA5}">
-                      <a16:colId xmlns:a16="http://schemas.microsoft.com/office/drawing/2014/main" val="181970994"/>
-                    </a:ext>
-                  </a:extLst>
-                </a:gridCol>
-                <a:gridCol w="2736326">
-                  <a:extLst>
-                    <a:ext uri="{9D8B030D-6E8A-4147-A177-3AD203B41FA5}">
-                      <a16:colId xmlns:a16="http://schemas.microsoft.com/office/drawing/2014/main" val="628041768"/>
-                    </a:ext>
-                  </a:extLst>
-                </a:gridCol>
-              </a:tblGrid>
-              <a:tr h="384814">
-                <a:tc>
-                  <a:txBody>
-                    <a:bodyPr/>
-                    <a:lstStyle/>
-                    <a:p>
-                      <a:r>
-                        <a:rPr lang="en-GB" dirty="0"/>
-                        <a:t>File Name</a:t>
-                      </a:r>
-                    </a:p>
-                  </a:txBody>
-                  <a:tcPr/>
-                </a:tc>
-                <a:tc>
-                  <a:txBody>
-                    <a:bodyPr/>
-                    <a:lstStyle/>
-                    <a:p>
-                      <a:r>
-                        <a:rPr lang="en-GB" dirty="0"/>
-                        <a:t>How sound was created</a:t>
-                      </a:r>
-                    </a:p>
-                  </a:txBody>
-                  <a:tcPr/>
-                </a:tc>
-                <a:extLst>
-                  <a:ext uri="{0D108BD9-81ED-4DB2-BD59-A6C34878D82A}">
-                    <a16:rowId xmlns:a16="http://schemas.microsoft.com/office/drawing/2014/main" val="1037850769"/>
-                  </a:ext>
-                </a:extLst>
-              </a:tr>
-              <a:tr h="682796">
-                <a:tc>
-                  <a:txBody>
-                    <a:bodyPr/>
-                    <a:lstStyle/>
-                    <a:p>
-                      <a:endParaRPr lang="en-GB" dirty="0"/>
-                    </a:p>
-                  </a:txBody>
-                  <a:tcPr/>
-                </a:tc>
-                <a:tc>
-                  <a:txBody>
-                    <a:bodyPr/>
-                    <a:lstStyle/>
-                    <a:p>
-                      <a:endParaRPr lang="en-GB"/>
-                    </a:p>
-                  </a:txBody>
-                  <a:tcPr/>
-                </a:tc>
-                <a:extLst>
-                  <a:ext uri="{0D108BD9-81ED-4DB2-BD59-A6C34878D82A}">
-                    <a16:rowId xmlns:a16="http://schemas.microsoft.com/office/drawing/2014/main" val="1982520596"/>
-                  </a:ext>
-                </a:extLst>
-              </a:tr>
-              <a:tr h="682796">
-                <a:tc>
-                  <a:txBody>
-                    <a:bodyPr/>
-                    <a:lstStyle/>
-                    <a:p>
-                      <a:endParaRPr lang="en-GB" dirty="0"/>
-                    </a:p>
-                  </a:txBody>
-                  <a:tcPr/>
-                </a:tc>
-                <a:tc>
-                  <a:txBody>
-                    <a:bodyPr/>
-                    <a:lstStyle/>
-                    <a:p>
-                      <a:endParaRPr lang="en-GB"/>
-                    </a:p>
-                  </a:txBody>
-                  <a:tcPr/>
-                </a:tc>
-                <a:extLst>
-                  <a:ext uri="{0D108BD9-81ED-4DB2-BD59-A6C34878D82A}">
-                    <a16:rowId xmlns:a16="http://schemas.microsoft.com/office/drawing/2014/main" val="1544250371"/>
-                  </a:ext>
-                </a:extLst>
-              </a:tr>
-              <a:tr h="682796">
-                <a:tc>
-                  <a:txBody>
-                    <a:bodyPr/>
-                    <a:lstStyle/>
-                    <a:p>
-                      <a:endParaRPr lang="en-GB"/>
-                    </a:p>
-                  </a:txBody>
-                  <a:tcPr/>
-                </a:tc>
-                <a:tc>
-                  <a:txBody>
-                    <a:bodyPr/>
-                    <a:lstStyle/>
-                    <a:p>
-                      <a:endParaRPr lang="en-GB" dirty="0"/>
-                    </a:p>
-                  </a:txBody>
-                  <a:tcPr/>
-                </a:tc>
-                <a:extLst>
-                  <a:ext uri="{0D108BD9-81ED-4DB2-BD59-A6C34878D82A}">
-                    <a16:rowId xmlns:a16="http://schemas.microsoft.com/office/drawing/2014/main" val="336221061"/>
-                  </a:ext>
-                </a:extLst>
-              </a:tr>
-              <a:tr h="682796">
-                <a:tc>
-                  <a:txBody>
-                    <a:bodyPr/>
-                    <a:lstStyle/>
-                    <a:p>
-                      <a:endParaRPr lang="en-GB"/>
-                    </a:p>
-                  </a:txBody>
-                  <a:tcPr/>
-                </a:tc>
-                <a:tc>
-                  <a:txBody>
-                    <a:bodyPr/>
-                    <a:lstStyle/>
-                    <a:p>
-                      <a:endParaRPr lang="en-GB"/>
-                    </a:p>
-                  </a:txBody>
-                  <a:tcPr/>
-                </a:tc>
-                <a:extLst>
-                  <a:ext uri="{0D108BD9-81ED-4DB2-BD59-A6C34878D82A}">
-                    <a16:rowId xmlns:a16="http://schemas.microsoft.com/office/drawing/2014/main" val="2088809235"/>
-                  </a:ext>
-                </a:extLst>
-              </a:tr>
-              <a:tr h="682796">
-                <a:tc>
-                  <a:txBody>
-                    <a:bodyPr/>
-                    <a:lstStyle/>
-                    <a:p>
-                      <a:endParaRPr lang="en-GB" dirty="0"/>
-                    </a:p>
-                  </a:txBody>
-                  <a:tcPr/>
-                </a:tc>
-                <a:tc>
-                  <a:txBody>
-                    <a:bodyPr/>
-                    <a:lstStyle/>
-                    <a:p>
-                      <a:endParaRPr lang="en-GB" dirty="0"/>
-                    </a:p>
-                  </a:txBody>
-                  <a:tcPr/>
-                </a:tc>
-                <a:extLst>
-                  <a:ext uri="{0D108BD9-81ED-4DB2-BD59-A6C34878D82A}">
-                    <a16:rowId xmlns:a16="http://schemas.microsoft.com/office/drawing/2014/main" val="3040528228"/>
-                  </a:ext>
-                </a:extLst>
-              </a:tr>
-              <a:tr h="682796">
-                <a:tc>
-                  <a:txBody>
-                    <a:bodyPr/>
-                    <a:lstStyle/>
-                    <a:p>
-                      <a:endParaRPr lang="en-GB" dirty="0"/>
-                    </a:p>
-                  </a:txBody>
-                  <a:tcPr/>
-                </a:tc>
-                <a:tc>
-                  <a:txBody>
-                    <a:bodyPr/>
-                    <a:lstStyle/>
-                    <a:p>
-                      <a:endParaRPr lang="en-GB" dirty="0"/>
-                    </a:p>
-                  </a:txBody>
-                  <a:tcPr/>
-                </a:tc>
-                <a:extLst>
-                  <a:ext uri="{0D108BD9-81ED-4DB2-BD59-A6C34878D82A}">
-                    <a16:rowId xmlns:a16="http://schemas.microsoft.com/office/drawing/2014/main" val="305773528"/>
-                  </a:ext>
-                </a:extLst>
-              </a:tr>
-            </a:tbl>
-          </a:graphicData>
-        </a:graphic>
-      </p:graphicFrame>
-      <p:graphicFrame>
-        <p:nvGraphicFramePr>
-          <p:cNvPr id="4" name="Table 3">
-            <a:extLst>
-              <a:ext uri="{FF2B5EF4-FFF2-40B4-BE49-F238E27FC236}">
-                <a16:creationId xmlns:a16="http://schemas.microsoft.com/office/drawing/2014/main" id="{393C45D4-BFD8-41B4-B981-0F6CE0CDFA7D}"/>
-              </a:ext>
-            </a:extLst>
-          </p:cNvPr>
-          <p:cNvGraphicFramePr>
-            <a:graphicFrameLocks noGrp="1"/>
-          </p:cNvGraphicFramePr>
-          <p:nvPr>
-            <p:extLst>
-              <p:ext uri="{D42A27DB-BD31-4B8C-83A1-F6EECF244321}">
-                <p14:modId xmlns:p14="http://schemas.microsoft.com/office/powerpoint/2010/main" val="2694835298"/>
-              </p:ext>
-            </p:extLst>
-          </p:nvPr>
-        </p:nvGraphicFramePr>
-        <p:xfrm>
-          <a:off x="6095999" y="1420077"/>
-          <a:ext cx="5429062" cy="4462536"/>
-        </p:xfrm>
-        <a:graphic>
-          <a:graphicData uri="http://schemas.openxmlformats.org/drawingml/2006/table">
-            <a:tbl>
-              <a:tblPr firstRow="1" bandRow="1">
-                <a:tableStyleId>{7DF18680-E054-41AD-8BC1-D1AEF772440D}</a:tableStyleId>
-              </a:tblPr>
-              <a:tblGrid>
-                <a:gridCol w="2714531">
-                  <a:extLst>
-                    <a:ext uri="{9D8B030D-6E8A-4147-A177-3AD203B41FA5}">
-                      <a16:colId xmlns:a16="http://schemas.microsoft.com/office/drawing/2014/main" val="181970994"/>
-                    </a:ext>
-                  </a:extLst>
-                </a:gridCol>
-                <a:gridCol w="2714531">
-                  <a:extLst>
-                    <a:ext uri="{9D8B030D-6E8A-4147-A177-3AD203B41FA5}">
-                      <a16:colId xmlns:a16="http://schemas.microsoft.com/office/drawing/2014/main" val="628041768"/>
-                    </a:ext>
-                  </a:extLst>
-                </a:gridCol>
-              </a:tblGrid>
-              <a:tr h="160671">
-                <a:tc>
-                  <a:txBody>
-                    <a:bodyPr/>
-                    <a:lstStyle/>
-                    <a:p>
-                      <a:r>
-                        <a:rPr lang="en-GB" dirty="0"/>
-                        <a:t>File Name</a:t>
-                      </a:r>
-                    </a:p>
-                  </a:txBody>
-                  <a:tcPr/>
-                </a:tc>
-                <a:tc>
-                  <a:txBody>
-                    <a:bodyPr/>
-                    <a:lstStyle/>
-                    <a:p>
-                      <a:r>
-                        <a:rPr lang="en-GB" dirty="0"/>
-                        <a:t>How sound was created</a:t>
-                      </a:r>
-                    </a:p>
-                  </a:txBody>
-                  <a:tcPr/>
-                </a:tc>
-                <a:extLst>
-                  <a:ext uri="{0D108BD9-81ED-4DB2-BD59-A6C34878D82A}">
-                    <a16:rowId xmlns:a16="http://schemas.microsoft.com/office/drawing/2014/main" val="1037850769"/>
-                  </a:ext>
-                </a:extLst>
-              </a:tr>
-              <a:tr h="682796">
-                <a:tc>
-                  <a:txBody>
-                    <a:bodyPr/>
-                    <a:lstStyle/>
-                    <a:p>
-                      <a:endParaRPr lang="en-GB" dirty="0"/>
-                    </a:p>
-                  </a:txBody>
-                  <a:tcPr/>
-                </a:tc>
-                <a:tc>
-                  <a:txBody>
-                    <a:bodyPr/>
-                    <a:lstStyle/>
-                    <a:p>
-                      <a:endParaRPr lang="en-GB" dirty="0"/>
-                    </a:p>
-                  </a:txBody>
-                  <a:tcPr/>
-                </a:tc>
-                <a:extLst>
-                  <a:ext uri="{0D108BD9-81ED-4DB2-BD59-A6C34878D82A}">
-                    <a16:rowId xmlns:a16="http://schemas.microsoft.com/office/drawing/2014/main" val="1982520596"/>
-                  </a:ext>
-                </a:extLst>
-              </a:tr>
-              <a:tr h="682796">
-                <a:tc>
-                  <a:txBody>
-                    <a:bodyPr/>
-                    <a:lstStyle/>
-                    <a:p>
-                      <a:endParaRPr lang="en-GB"/>
-                    </a:p>
-                  </a:txBody>
-                  <a:tcPr/>
-                </a:tc>
-                <a:tc>
-                  <a:txBody>
-                    <a:bodyPr/>
-                    <a:lstStyle/>
-                    <a:p>
-                      <a:endParaRPr lang="en-GB"/>
-                    </a:p>
-                  </a:txBody>
-                  <a:tcPr/>
-                </a:tc>
-                <a:extLst>
-                  <a:ext uri="{0D108BD9-81ED-4DB2-BD59-A6C34878D82A}">
-                    <a16:rowId xmlns:a16="http://schemas.microsoft.com/office/drawing/2014/main" val="1544250371"/>
-                  </a:ext>
-                </a:extLst>
-              </a:tr>
-              <a:tr h="682796">
-                <a:tc>
-                  <a:txBody>
-                    <a:bodyPr/>
-                    <a:lstStyle/>
-                    <a:p>
-                      <a:endParaRPr lang="en-GB" dirty="0"/>
-                    </a:p>
-                  </a:txBody>
-                  <a:tcPr/>
-                </a:tc>
-                <a:tc>
-                  <a:txBody>
-                    <a:bodyPr/>
-                    <a:lstStyle/>
-                    <a:p>
-                      <a:endParaRPr lang="en-GB" dirty="0"/>
-                    </a:p>
-                  </a:txBody>
-                  <a:tcPr/>
-                </a:tc>
-                <a:extLst>
-                  <a:ext uri="{0D108BD9-81ED-4DB2-BD59-A6C34878D82A}">
-                    <a16:rowId xmlns:a16="http://schemas.microsoft.com/office/drawing/2014/main" val="336221061"/>
-                  </a:ext>
-                </a:extLst>
-              </a:tr>
-              <a:tr h="682796">
-                <a:tc>
-                  <a:txBody>
-                    <a:bodyPr/>
-                    <a:lstStyle/>
-                    <a:p>
-                      <a:endParaRPr lang="en-GB"/>
-                    </a:p>
-                  </a:txBody>
-                  <a:tcPr/>
-                </a:tc>
-                <a:tc>
-                  <a:txBody>
-                    <a:bodyPr/>
-                    <a:lstStyle/>
-                    <a:p>
-                      <a:endParaRPr lang="en-GB"/>
-                    </a:p>
-                  </a:txBody>
-                  <a:tcPr/>
-                </a:tc>
-                <a:extLst>
-                  <a:ext uri="{0D108BD9-81ED-4DB2-BD59-A6C34878D82A}">
-                    <a16:rowId xmlns:a16="http://schemas.microsoft.com/office/drawing/2014/main" val="2088809235"/>
-                  </a:ext>
-                </a:extLst>
-              </a:tr>
-              <a:tr h="682796">
-                <a:tc>
-                  <a:txBody>
-                    <a:bodyPr/>
-                    <a:lstStyle/>
-                    <a:p>
-                      <a:endParaRPr lang="en-GB" dirty="0"/>
-                    </a:p>
-                  </a:txBody>
-                  <a:tcPr/>
-                </a:tc>
-                <a:tc>
-                  <a:txBody>
-                    <a:bodyPr/>
-                    <a:lstStyle/>
-                    <a:p>
-                      <a:endParaRPr lang="en-GB" dirty="0"/>
-                    </a:p>
-                  </a:txBody>
-                  <a:tcPr/>
-                </a:tc>
-                <a:extLst>
-                  <a:ext uri="{0D108BD9-81ED-4DB2-BD59-A6C34878D82A}">
-                    <a16:rowId xmlns:a16="http://schemas.microsoft.com/office/drawing/2014/main" val="3040528228"/>
-                  </a:ext>
-                </a:extLst>
-              </a:tr>
-              <a:tr h="682796">
-                <a:tc>
-                  <a:txBody>
-                    <a:bodyPr/>
-                    <a:lstStyle/>
-                    <a:p>
-                      <a:endParaRPr lang="en-GB" dirty="0"/>
-                    </a:p>
-                  </a:txBody>
-                  <a:tcPr/>
-                </a:tc>
-                <a:tc>
-                  <a:txBody>
-                    <a:bodyPr/>
-                    <a:lstStyle/>
-                    <a:p>
-                      <a:endParaRPr lang="en-GB" dirty="0"/>
-                    </a:p>
-                  </a:txBody>
-                  <a:tcPr/>
-                </a:tc>
-                <a:extLst>
-                  <a:ext uri="{0D108BD9-81ED-4DB2-BD59-A6C34878D82A}">
-                    <a16:rowId xmlns:a16="http://schemas.microsoft.com/office/drawing/2014/main" val="305773528"/>
-                  </a:ext>
-                </a:extLst>
-              </a:tr>
-            </a:tbl>
-          </a:graphicData>
-        </a:graphic>
-      </p:graphicFrame>
+              <a:t>Sound ORIGINS</a:t>
+            </a:r>
+          </a:p>
+        </p:txBody>
+      </p:sp>
+      <p:sp>
+        <p:nvSpPr>
+          <p:cNvPr id="3" name="Content Placeholder 2">
+            <a:extLst>
+              <a:ext uri="{FF2B5EF4-FFF2-40B4-BE49-F238E27FC236}">
+                <a16:creationId xmlns:a16="http://schemas.microsoft.com/office/drawing/2014/main" id="{077BADC9-E785-AB9C-2915-D6DE1879AC85}"/>
+              </a:ext>
+            </a:extLst>
+          </p:cNvPr>
+          <p:cNvSpPr>
+            <a:spLocks noGrp="1"/>
+          </p:cNvSpPr>
+          <p:nvPr>
+            <p:ph idx="1"/>
+          </p:nvPr>
+        </p:nvSpPr>
+        <p:spPr>
+          <a:xfrm>
+            <a:off x="2093976" y="1405771"/>
+            <a:ext cx="7729728" cy="3101983"/>
+          </a:xfrm>
+        </p:spPr>
+        <p:txBody>
+          <a:bodyPr/>
+          <a:lstStyle/>
+          <a:p>
+            <a:r>
+              <a:rPr lang="en-GB" sz="2400" dirty="0"/>
+              <a:t>Most sounds were recorded by me and are listed on the Recording Details Template</a:t>
+            </a:r>
+          </a:p>
+          <a:p>
+            <a:pPr marL="0" indent="0">
+              <a:buNone/>
+            </a:pPr>
+            <a:endParaRPr lang="en-GB" sz="2400" dirty="0"/>
+          </a:p>
+          <a:p>
+            <a:r>
+              <a:rPr lang="en-GB" sz="2400" dirty="0"/>
+              <a:t>The Laugh.ogg Sound Effect used for the slime laughing can be found here: </a:t>
+            </a:r>
+            <a:r>
+              <a:rPr lang="en-GB" sz="2400" u="sng" dirty="0">
+                <a:hlinkClick r:id="rId2"/>
+              </a:rPr>
+              <a:t>https://opengameart.org/content/tiny-creatures-sounds</a:t>
+            </a:r>
+            <a:endParaRPr lang="en-GB" sz="2400" dirty="0"/>
+          </a:p>
+          <a:p>
+            <a:endParaRPr lang="en-GB" dirty="0"/>
+          </a:p>
+        </p:txBody>
+      </p:sp>
     </p:spTree>
     <p:extLst>
       <p:ext uri="{BB962C8B-B14F-4D97-AF65-F5344CB8AC3E}">
-        <p14:creationId xmlns:p14="http://schemas.microsoft.com/office/powerpoint/2010/main" val="3032562648"/>
+        <p14:creationId xmlns:p14="http://schemas.microsoft.com/office/powerpoint/2010/main" val="984374411"/>
       </p:ext>
     </p:extLst>
   </p:cSld>
@@ -9902,6 +10021,23 @@
                   </a:schemeClr>
                 </a:solidFill>
               </a:rPr>
+              <a:t>(100 Hz, 12dB)</a:t>
+            </a:r>
+          </a:p>
+          <a:p>
+            <a:pPr marL="285750" indent="-285750">
+              <a:buFontTx/>
+              <a:buChar char="-"/>
+            </a:pPr>
+            <a:r>
+              <a:rPr lang="en-GB" dirty="0">
+                <a:solidFill>
+                  <a:schemeClr val="tx1">
+                    <a:lumMod val="75000"/>
+                    <a:lumOff val="25000"/>
+                  </a:schemeClr>
+                </a:solidFill>
+              </a:rPr>
               <a:t>Compressed Audio to add impact:</a:t>
             </a:r>
           </a:p>
@@ -9989,7 +10125,7 @@
                   </a:schemeClr>
                 </a:solidFill>
               </a:rPr>
-              <a:t>Normalised perceived loudness to -30 dB</a:t>
+              <a:t>Normalised perceived loudness to -23 dB</a:t>
             </a:r>
           </a:p>
           <a:p>
@@ -10336,7 +10472,7 @@
         </p:blipFill>
         <p:spPr>
           <a:xfrm>
-            <a:off x="798576" y="4162957"/>
+            <a:off x="675068" y="4408729"/>
             <a:ext cx="2371408" cy="1174702"/>
           </a:xfrm>
           <a:prstGeom prst="rect">
@@ -10551,7 +10687,7 @@
                   </a:schemeClr>
                 </a:solidFill>
               </a:rPr>
-              <a:t>Low pass filter to remove any birds / grass crunches</a:t>
+              <a:t>Low pass filter to remove any birds / grass crunches (900 Hz, 6 dB)</a:t>
             </a:r>
           </a:p>
           <a:p>
